--- a/diapositivas/bloque4.pptx
+++ b/diapositivas/bloque4.pptx
@@ -4,6 +4,9 @@
   <p:sldMasterIdLst>
     <p:sldMasterId id="2147483648" r:id="rId1"/>
   </p:sldMasterIdLst>
+  <p:notesMasterIdLst>
+    <p:notesMasterId r:id="rId15"/>
+  </p:notesMasterIdLst>
   <p:sldIdLst>
     <p:sldId id="256" r:id="rId2"/>
     <p:sldId id="257" r:id="rId3"/>
@@ -19,9 +22,6 @@
     <p:sldId id="267" r:id="rId13"/>
     <p:sldId id="268" r:id="rId14"/>
   </p:sldIdLst>
-  <p:notesMasterIdLst>
-    <p:notesMasterId r:id="rId15"/>
-  </p:notesMasterIdLst>
   <p:sldSz cx="12192000" cy="6858000"/>
   <p:notesSz cx="6858000" cy="12192000"/>
   <p:defaultTextStyle>
@@ -119,38 +119,38 @@
   <p:extLst>
     <p:ext uri="{521415D9-36F7-43E2-AB2F-B90AF26B5E84}">
       <p14:sectionLst xmlns:p14="http://schemas.microsoft.com/office/powerpoint/2010/main">
-        <p14:section name="Bloque 4" id="{7bca5e5f-802c-3753-1ec0-c0587f4580a5}">
+        <p14:section name="Bloque 4" id="{7BCA5E5F-802C-3753-1EC0-C0587F4580A5}">
           <p14:sldIdLst>
             <p14:sldId id="256"/>
             <p14:sldId id="257"/>
           </p14:sldIdLst>
         </p14:section>
-        <p14:section name="Preguntas difíciles" id="{2d91e8e8-afad-c5e7-2274-ac2cc2dd8368}">
+        <p14:section name="Preguntas difíciles" id="{2D91E8E8-AFAD-C5E7-2274-AC2CC2DD8368}">
           <p14:sldIdLst>
             <p14:sldId id="258"/>
             <p14:sldId id="259"/>
           </p14:sldIdLst>
         </p14:section>
-        <p14:section name="Documento" id="{d349ee5c-bb33-0f3f-7018-d8ffe9593eea}">
+        <p14:section name="Documento" id="{D349EE5C-BB33-0F3F-7018-D8FFE9593EEA}">
           <p14:sldIdLst>
             <p14:sldId id="260"/>
             <p14:sldId id="261"/>
           </p14:sldIdLst>
         </p14:section>
-        <p14:section name="Indicadores" id="{5b13284e-aed3-16d3-a498-2b8497215cca}">
+        <p14:section name="Indicadores" id="{5B13284E-AED3-16D3-A498-2B8497215CCA}">
           <p14:sldIdLst>
             <p14:sldId id="262"/>
             <p14:sldId id="263"/>
             <p14:sldId id="264"/>
           </p14:sldIdLst>
         </p14:section>
-        <p14:section name="Presentación" id="{658f1447-2a2d-9e55-c687-f7013656feea}">
+        <p14:section name="Presentación" id="{658F1447-2A2D-9E55-C687-F7013656FEEA}">
           <p14:sldIdLst>
             <p14:sldId id="265"/>
             <p14:sldId id="266"/>
           </p14:sldIdLst>
         </p14:section>
-        <p14:section name="Revisión cruzada" id="{0d63c469-8267-7214-3137-617b4d539423}">
+        <p14:section name="Revisión cruzada" id="{0D63C469-8267-7214-3137-617B4D539423}">
           <p14:sldIdLst>
             <p14:sldId id="267"/>
             <p14:sldId id="268"/>
@@ -187,234 +187,10 @@
           <a:chExt cx="0" cy="0"/>
         </a:xfrm>
       </p:grpSpPr>
-      <p:sp>
-        <p:nvSpPr>
-          <p:cNvPr id="2" name="Header Placeholder 1"/>
-          <p:cNvSpPr>
-            <a:spLocks noGrp="1"/>
-          </p:cNvSpPr>
-          <p:nvPr>
-            <p:ph type="hdr" sz="quarter"/>
-          </p:nvPr>
-        </p:nvSpPr>
-        <p:spPr>
-          <a:xfrm>
-            <a:off x="0" y="0"/>
-            <a:ext cx="2971800" cy="458788"/>
-          </a:xfrm>
-          <a:prstGeom prst="rect">
-            <a:avLst/>
-          </a:prstGeom>
-        </p:spPr>
-        <p:txBody>
-          <a:bodyPr vert="horz" lIns="91440" tIns="45720" rIns="91440" bIns="45720" rtlCol="0"/>
-          <a:lstStyle>
-            <a:lvl1pPr algn="l">
-              <a:defRPr sz="1200"/>
-            </a:lvl1pPr>
-          </a:lstStyle>
-          <a:p>
-            <a:endParaRPr lang="en-US"/>
-          </a:p>
-        </p:txBody>
-      </p:sp>
-      <p:sp>
-        <p:nvSpPr>
-          <p:cNvPr id="3" name="Date Placeholder 2"/>
-          <p:cNvSpPr>
-            <a:spLocks noGrp="1"/>
-          </p:cNvSpPr>
-          <p:nvPr>
-            <p:ph type="dt" idx="1"/>
-          </p:nvPr>
-        </p:nvSpPr>
-        <p:spPr>
-          <a:xfrm>
-            <a:off x="3884613" y="0"/>
-            <a:ext cx="2971800" cy="458788"/>
-          </a:xfrm>
-          <a:prstGeom prst="rect">
-            <a:avLst/>
-          </a:prstGeom>
-        </p:spPr>
-        <p:txBody>
-          <a:bodyPr vert="horz" lIns="91440" tIns="45720" rIns="91440" bIns="45720" rtlCol="0"/>
-          <a:lstStyle>
-            <a:lvl1pPr algn="r">
-              <a:defRPr sz="1200"/>
-            </a:lvl1pPr>
-          </a:lstStyle>
-          <a:p>
-            <a:fld id="{5282F153-3F37-0F45-9E97-73ACFA13230C}" type="datetimeFigureOut">
-              <a:rPr lang="en-US"/>
-              <a:t>7/23/19</a:t>
-            </a:fld>
-            <a:endParaRPr lang="en-US"/>
-          </a:p>
-        </p:txBody>
-      </p:sp>
-      <p:sp>
-        <p:nvSpPr>
-          <p:cNvPr id="4" name="Slide Image Placeholder 3"/>
-          <p:cNvSpPr>
-            <a:spLocks noGrp="1" noRot="1" noChangeAspect="1"/>
-          </p:cNvSpPr>
-          <p:nvPr>
-            <p:ph type="sldImg" idx="2"/>
-          </p:nvPr>
-        </p:nvSpPr>
-        <p:spPr>
-          <a:xfrm>
-            <a:off x="685800" y="1143000"/>
-            <a:ext cx="5486400" cy="3086100"/>
-          </a:xfrm>
-          <a:prstGeom prst="rect">
-            <a:avLst/>
-          </a:prstGeom>
-          <a:noFill/>
-          <a:ln w="12700">
-            <a:solidFill>
-              <a:prstClr val="black"/>
-            </a:solidFill>
-          </a:ln>
-        </p:spPr>
-        <p:txBody>
-          <a:bodyPr vert="horz" lIns="91440" tIns="45720" rIns="91440" bIns="45720" rtlCol="0" anchor="ctr"/>
-          <a:lstStyle/>
-          <a:p>
-            <a:endParaRPr lang="en-US"/>
-          </a:p>
-        </p:txBody>
-      </p:sp>
-      <p:sp>
-        <p:nvSpPr>
-          <p:cNvPr id="5" name="Notes Placeholder 4"/>
-          <p:cNvSpPr>
-            <a:spLocks noGrp="1"/>
-          </p:cNvSpPr>
-          <p:nvPr>
-            <p:ph type="body" sz="quarter" idx="3"/>
-          </p:nvPr>
-        </p:nvSpPr>
-        <p:spPr>
-          <a:xfrm>
-            <a:off x="685800" y="4400550"/>
-            <a:ext cx="5486400" cy="3600450"/>
-          </a:xfrm>
-          <a:prstGeom prst="rect">
-            <a:avLst/>
-          </a:prstGeom>
-        </p:spPr>
-        <p:txBody>
-          <a:bodyPr vert="horz" lIns="91440" tIns="45720" rIns="91440" bIns="45720" rtlCol="0"/>
-          <a:lstStyle/>
-          <a:p>
-            <a:pPr lvl="0"/>
-            <a:r>
-              <a:rPr lang="en-US"/>
-              <a:t>Click to edit Master text styles</a:t>
-            </a:r>
-          </a:p>
-          <a:p>
-            <a:pPr lvl="1"/>
-            <a:r>
-              <a:rPr lang="en-US"/>
-              <a:t>Second level</a:t>
-            </a:r>
-          </a:p>
-          <a:p>
-            <a:pPr lvl="2"/>
-            <a:r>
-              <a:rPr lang="en-US"/>
-              <a:t>Third level</a:t>
-            </a:r>
-          </a:p>
-          <a:p>
-            <a:pPr lvl="3"/>
-            <a:r>
-              <a:rPr lang="en-US"/>
-              <a:t>Fourth level</a:t>
-            </a:r>
-          </a:p>
-          <a:p>
-            <a:pPr lvl="4"/>
-            <a:r>
-              <a:rPr lang="en-US"/>
-              <a:t>Fifth level</a:t>
-            </a:r>
-          </a:p>
-        </p:txBody>
-      </p:sp>
-      <p:sp>
-        <p:nvSpPr>
-          <p:cNvPr id="6" name="Footer Placeholder 5"/>
-          <p:cNvSpPr>
-            <a:spLocks noGrp="1"/>
-          </p:cNvSpPr>
-          <p:nvPr>
-            <p:ph type="ftr" sz="quarter" idx="4"/>
-          </p:nvPr>
-        </p:nvSpPr>
-        <p:spPr>
-          <a:xfrm>
-            <a:off x="0" y="8685213"/>
-            <a:ext cx="2971800" cy="458787"/>
-          </a:xfrm>
-          <a:prstGeom prst="rect">
-            <a:avLst/>
-          </a:prstGeom>
-        </p:spPr>
-        <p:txBody>
-          <a:bodyPr vert="horz" lIns="91440" tIns="45720" rIns="91440" bIns="45720" rtlCol="0" anchor="b"/>
-          <a:lstStyle>
-            <a:lvl1pPr algn="l">
-              <a:defRPr sz="1200"/>
-            </a:lvl1pPr>
-          </a:lstStyle>
-          <a:p>
-            <a:endParaRPr lang="en-US"/>
-          </a:p>
-        </p:txBody>
-      </p:sp>
-      <p:sp>
-        <p:nvSpPr>
-          <p:cNvPr id="7" name="Slide Number Placeholder 6"/>
-          <p:cNvSpPr>
-            <a:spLocks noGrp="1"/>
-          </p:cNvSpPr>
-          <p:nvPr>
-            <p:ph type="sldNum" sz="quarter" idx="5"/>
-          </p:nvPr>
-        </p:nvSpPr>
-        <p:spPr>
-          <a:xfrm>
-            <a:off x="3884613" y="8685213"/>
-            <a:ext cx="2971800" cy="458787"/>
-          </a:xfrm>
-          <a:prstGeom prst="rect">
-            <a:avLst/>
-          </a:prstGeom>
-        </p:spPr>
-        <p:txBody>
-          <a:bodyPr vert="horz" lIns="91440" tIns="45720" rIns="91440" bIns="45720" rtlCol="0" anchor="b"/>
-          <a:lstStyle>
-            <a:lvl1pPr algn="r">
-              <a:defRPr sz="1200"/>
-            </a:lvl1pPr>
-          </a:lstStyle>
-          <a:p>
-            <a:fld id="{CE5E9CC1-C706-0F49-92D6-E571CC5EEA8F}" type="slidenum">
-              <a:rPr lang="en-US"/>
-              <a:t>‹#›</a:t>
-            </a:fld>
-            <a:endParaRPr lang="en-US"/>
-          </a:p>
-        </p:txBody>
-      </p:sp>
     </p:spTree>
     <p:extLst>
       <p:ext uri="{BB962C8B-B14F-4D97-AF65-F5344CB8AC3E}">
-        <p14:creationId xmlns:p14="http://schemas.microsoft.com/office/powerpoint/2010/main" val="1024086991"/>
+        <p14:creationId xmlns:p14="http://schemas.microsoft.com/office/powerpoint/2010/main" val="4182967069"/>
       </p:ext>
     </p:extLst>
   </p:cSld>
@@ -562,7 +338,6 @@
               <a:rPr lang="en-US" dirty="0"/>
               <a:t>Objetivo del bloque: convertir la propuesta ganadora de cada pareja en un proyecto defendible: bien explicado, con sus riesgos, con una forma de medir si funciona y con una presentación breve.</a:t>
             </a:r>
-            <a:endParaRPr lang="en-US" dirty="0"/>
           </a:p>
         </p:txBody>
       </p:sp>
@@ -650,7 +425,6 @@
               <a:rPr lang="en-US" dirty="0"/>
               <a:t>Minutos 210–235. Tres diapositivas, cada una con una idea central. La tercera incluye los dos indicadores definidos antes.</a:t>
             </a:r>
-            <a:endParaRPr lang="en-US" dirty="0"/>
           </a:p>
         </p:txBody>
       </p:sp>
@@ -738,7 +512,6 @@
               <a:rPr lang="en-US" dirty="0"/>
               <a:t>Criterios de la presentación. Son los mismos que se comprobarán en la revisión cruzada.</a:t>
             </a:r>
-            <a:endParaRPr lang="en-US" dirty="0"/>
           </a:p>
         </p:txBody>
       </p:sp>
@@ -826,7 +599,6 @@
               <a:rPr lang="en-US" dirty="0"/>
               <a:t>Minutos 235–240. Cada pareja devuelve a la otra una mejora concreta.</a:t>
             </a:r>
-            <a:endParaRPr lang="en-US" dirty="0"/>
           </a:p>
         </p:txBody>
       </p:sp>
@@ -914,7 +686,6 @@
               <a:rPr lang="en-US" dirty="0"/>
               <a:t>Entregables del taller: matriz de decisión (bloque 3), documento del proyecto y presentación. Enlazar con el bloque 5: la defensa.</a:t>
             </a:r>
-            <a:endParaRPr lang="en-US" dirty="0"/>
           </a:p>
         </p:txBody>
       </p:sp>
@@ -1002,7 +773,6 @@
               <a:rPr lang="en-US" dirty="0"/>
               <a:t>Continuidad: cada pareja trabaja sobre su propia propuesta ganadora del bloque 3 y su ficha exprés. Al final del bloque tendrá su matriz, su documento y su presentación, listos para defenderlos en el bloque 5.</a:t>
             </a:r>
-            <a:endParaRPr lang="en-US" dirty="0"/>
           </a:p>
         </p:txBody>
       </p:sp>
@@ -1090,7 +860,6 @@
               <a:rPr lang="en-US" dirty="0"/>
               <a:t>Minutos 165–175. Antes de desarrollar el proyecto, hay que ponerlo a prueba. Las parejas se juntan de dos en dos; la pareja A explica su propuesta en un minuto y la pareja B le hace dos preguntas difíciles. Después se cambian los papeles. Recordad cuál es vuestra pareja: volveréis a juntaros con ella en la revisión cruzada del final.</a:t>
             </a:r>
-            <a:endParaRPr lang="en-US" dirty="0"/>
           </a:p>
         </p:txBody>
       </p:sp>
@@ -1178,7 +947,6 @@
               <a:rPr lang="en-US" dirty="0"/>
               <a:t>Cada pareja apunta las preguntas que no ha sabido responder: son lo primero que tiene que resolver el documento del proyecto.</a:t>
             </a:r>
-            <a:endParaRPr lang="en-US" dirty="0"/>
           </a:p>
         </p:txBody>
       </p:sp>
@@ -1266,7 +1034,6 @@
               <a:rPr lang="en-US" dirty="0"/>
               <a:t>Minutos 175–195. Ampliar la ficha exprés hasta un máximo de dos páginas con los siete apartados. La IA puede ayudar a redactar, pero cada apartado lo revisa la pareja con el mismo criterio de la ficha exprés: qué sobra, qué falta y qué no es cierto.</a:t>
             </a:r>
-            <a:endParaRPr lang="en-US" dirty="0"/>
           </a:p>
         </p:txBody>
       </p:sp>
@@ -1354,7 +1121,6 @@
               <a:rPr lang="en-US" dirty="0"/>
               <a:t>Preguntas de acompañamiento docente mientras las parejas redactan. Pasar por las mesas.</a:t>
             </a:r>
-            <a:endParaRPr lang="en-US" dirty="0"/>
           </a:p>
         </p:txBody>
       </p:sp>
@@ -1442,7 +1208,6 @@
               <a:rPr lang="en-US" dirty="0"/>
               <a:t>Minutos 195–210. No hay que esperar un mes ni simular nada: las parejas solo diseñan cómo se comprobaría que la propuesta funciona si alguien decidiera probarla. Es un plan de medición, no una medición. Otros ejemplos de indicadores: tiempo de tramitación, pedidos servidos tarde o plazas sin cubrir.</a:t>
             </a:r>
-            <a:endParaRPr lang="en-US" dirty="0"/>
           </a:p>
         </p:txBody>
       </p:sp>
@@ -1530,7 +1295,6 @@
               <a:rPr lang="en-US" dirty="0"/>
               <a:t>El prompt está en el guion para copiarlo. La IA propone; la pareja elige los dos indicadores y decide cómo medirlos.</a:t>
             </a:r>
-            <a:endParaRPr lang="en-US" dirty="0"/>
           </a:p>
         </p:txBody>
       </p:sp>
@@ -1618,7 +1382,6 @@
               <a:rPr lang="en-US" dirty="0"/>
               <a:t>Plantilla para que cada pareja ordene sus dos indicadores antes de pasarlos al documento.</a:t>
             </a:r>
-            <a:endParaRPr lang="en-US" dirty="0"/>
           </a:p>
         </p:txBody>
       </p:sp>
@@ -1696,6 +1459,7 @@
         <a:solidFill>
           <a:schemeClr val="tx1"/>
         </a:solidFill>
+        <a:effectLst/>
       </p:bgPr>
     </p:bg>
     <p:spTree>
@@ -1715,9 +1479,11 @@
       <p:sp>
         <p:nvSpPr>
           <p:cNvPr id="2" name="Text 0"/>
-          <p:cNvSpPr/>
+          <p:cNvSpPr>
+            <a:spLocks noGrp="1"/>
+          </p:cNvSpPr>
           <p:nvPr>
-            <p:ph idx="100" type="title" hasCustomPrompt="1"/>
+            <p:ph type="title" idx="100" hasCustomPrompt="1"/>
           </p:nvPr>
         </p:nvSpPr>
         <p:spPr>
@@ -1734,7 +1500,7 @@
         <p:txBody>
           <a:bodyPr wrap="square" rtlCol="0"/>
           <a:lstStyle>
-            <a:lvl1pPr algn="l" indent="0" marL="0">
+            <a:lvl1pPr marL="0" indent="0" algn="l">
               <a:buNone/>
               <a:defRPr lang="en-US" sz="4400" b="1" dirty="0">
                 <a:solidFill>
@@ -1744,7 +1510,7 @@
             </a:lvl1pPr>
           </a:lstStyle>
           <a:p>
-            <a:pPr algn="l" indent="0" marL="0">
+            <a:pPr marL="0" indent="0" algn="l">
               <a:buNone/>
             </a:pPr>
             <a:endParaRPr lang="en-US" sz="4400" dirty="0"/>
@@ -1754,9 +1520,11 @@
       <p:sp>
         <p:nvSpPr>
           <p:cNvPr id="3" name="Text 0"/>
-          <p:cNvSpPr/>
+          <p:cNvSpPr>
+            <a:spLocks noGrp="1"/>
+          </p:cNvSpPr>
           <p:nvPr>
-            <p:ph idx="101" type="body" hasCustomPrompt="1"/>
+            <p:ph type="body" idx="101" hasCustomPrompt="1"/>
           </p:nvPr>
         </p:nvSpPr>
         <p:spPr>
@@ -1773,7 +1541,7 @@
         <p:txBody>
           <a:bodyPr wrap="square" rtlCol="0"/>
           <a:lstStyle>
-            <a:lvl1pPr indent="0" marL="0">
+            <a:lvl1pPr marL="0" indent="0">
               <a:buNone/>
               <a:defRPr lang="en-US" sz="2000" dirty="0">
                 <a:solidFill>
@@ -1783,7 +1551,7 @@
             </a:lvl1pPr>
           </a:lstStyle>
           <a:p>
-            <a:pPr indent="0" marL="0">
+            <a:pPr marL="0" indent="0">
               <a:buNone/>
             </a:pPr>
             <a:endParaRPr lang="en-US" sz="2000" dirty="0"/>
@@ -1806,6 +1574,7 @@
         <a:solidFill>
           <a:schemeClr val="tx1"/>
         </a:solidFill>
+        <a:effectLst/>
       </p:bgPr>
     </p:bg>
     <p:spTree>
@@ -1825,9 +1594,11 @@
       <p:sp>
         <p:nvSpPr>
           <p:cNvPr id="2" name="Text 0"/>
-          <p:cNvSpPr/>
+          <p:cNvSpPr>
+            <a:spLocks noGrp="1"/>
+          </p:cNvSpPr>
           <p:nvPr>
-            <p:ph idx="100" type="title" hasCustomPrompt="1"/>
+            <p:ph type="title" idx="100" hasCustomPrompt="1"/>
           </p:nvPr>
         </p:nvSpPr>
         <p:spPr>
@@ -1844,7 +1615,7 @@
         <p:txBody>
           <a:bodyPr wrap="square" rtlCol="0"/>
           <a:lstStyle>
-            <a:lvl1pPr algn="l" indent="0" marL="0">
+            <a:lvl1pPr marL="0" indent="0" algn="l">
               <a:buNone/>
               <a:defRPr lang="en-US" sz="4000" b="1" dirty="0">
                 <a:solidFill>
@@ -1854,7 +1625,7 @@
             </a:lvl1pPr>
           </a:lstStyle>
           <a:p>
-            <a:pPr algn="l" indent="0" marL="0">
+            <a:pPr marL="0" indent="0" algn="l">
               <a:buNone/>
             </a:pPr>
             <a:endParaRPr lang="en-US" sz="4000" dirty="0"/>
@@ -1864,9 +1635,11 @@
       <p:sp>
         <p:nvSpPr>
           <p:cNvPr id="3" name="Text 0"/>
-          <p:cNvSpPr/>
+          <p:cNvSpPr>
+            <a:spLocks noGrp="1"/>
+          </p:cNvSpPr>
           <p:nvPr>
-            <p:ph idx="101" type="body" hasCustomPrompt="1"/>
+            <p:ph type="body" idx="101" hasCustomPrompt="1"/>
           </p:nvPr>
         </p:nvSpPr>
         <p:spPr>
@@ -1883,7 +1656,7 @@
         <p:txBody>
           <a:bodyPr wrap="square" rtlCol="0"/>
           <a:lstStyle>
-            <a:lvl1pPr indent="0" marL="0">
+            <a:lvl1pPr marL="0" indent="0">
               <a:buNone/>
               <a:defRPr lang="en-US" sz="2200" dirty="0">
                 <a:solidFill>
@@ -1893,7 +1666,7 @@
             </a:lvl1pPr>
           </a:lstStyle>
           <a:p>
-            <a:pPr indent="0" marL="0">
+            <a:pPr marL="0" indent="0">
               <a:buNone/>
             </a:pPr>
             <a:endParaRPr lang="en-US" sz="2200" dirty="0"/>
@@ -1916,6 +1689,7 @@
         <a:solidFill>
           <a:schemeClr val="bg1"/>
         </a:solidFill>
+        <a:effectLst/>
       </p:bgPr>
     </p:bg>
     <p:spTree>
@@ -1935,9 +1709,11 @@
       <p:sp>
         <p:nvSpPr>
           <p:cNvPr id="2" name="Text 0"/>
-          <p:cNvSpPr/>
+          <p:cNvSpPr>
+            <a:spLocks noGrp="1"/>
+          </p:cNvSpPr>
           <p:nvPr>
-            <p:ph idx="100" type="title" hasCustomPrompt="1"/>
+            <p:ph type="title" idx="100" hasCustomPrompt="1"/>
           </p:nvPr>
         </p:nvSpPr>
         <p:spPr>
@@ -1954,7 +1730,7 @@
         <p:txBody>
           <a:bodyPr wrap="square" rtlCol="0"/>
           <a:lstStyle>
-            <a:lvl1pPr algn="l" indent="0" marL="0">
+            <a:lvl1pPr marL="0" indent="0" algn="l">
               <a:buNone/>
               <a:defRPr lang="en-US" sz="3200" b="1" dirty="0">
                 <a:solidFill>
@@ -1964,7 +1740,7 @@
             </a:lvl1pPr>
           </a:lstStyle>
           <a:p>
-            <a:pPr algn="l" indent="0" marL="0">
+            <a:pPr marL="0" indent="0" algn="l">
               <a:buNone/>
             </a:pPr>
             <a:endParaRPr lang="en-US" sz="3200" dirty="0"/>
@@ -1992,7 +1768,7 @@
           <a:bodyPr wrap="square" lIns="0" tIns="0" rIns="0" bIns="0" rtlCol="0" anchor="ctr"/>
           <a:lstStyle/>
           <a:p>
-            <a:pPr indent="0" marL="0">
+            <a:pPr marL="0" indent="0">
               <a:buNone/>
             </a:pPr>
             <a:r>
@@ -2027,7 +1803,7 @@
           </a:prstGeom>
           <a:extLst>
             <a:ext uri="{C572A759-6A51-4108-AA02-DFA0A04FC94B}">
-              <ma14:wrappingTextBoxFlag xmlns:ma14="http://schemas.microsoft.com/office/mac/drawingml/2011/main" val="0"/>
+              <ma14:wrappingTextBoxFlag xmlns:ma14="http://schemas.microsoft.com/office/mac/drawingml/2011/main" xmlns="" val="0"/>
             </a:ext>
           </a:extLst>
         </p:spPr>
@@ -2045,8 +1821,8 @@
           <a:p>
             <a:pPr algn="r"/>
             <a:fld id="{F7021451-1387-4CA6-816F-3879F97B5CBC}" type="slidenum">
-              <a:rPr b="0" lang="en-US"/>
-              <a:t>1004</a:t>
+              <a:rPr lang="en-US" b="0"/>
+              <a:t>‹Nº›</a:t>
             </a:fld>
             <a:endParaRPr lang="en-US"/>
           </a:p>
@@ -2068,6 +1844,7 @@
         <a:solidFill>
           <a:schemeClr val="tx1"/>
         </a:solidFill>
+        <a:effectLst/>
       </p:bgPr>
     </p:bg>
     <p:spTree>
@@ -2087,9 +1864,11 @@
       <p:sp>
         <p:nvSpPr>
           <p:cNvPr id="2" name="Text 0"/>
-          <p:cNvSpPr/>
+          <p:cNvSpPr>
+            <a:spLocks noGrp="1"/>
+          </p:cNvSpPr>
           <p:nvPr>
-            <p:ph idx="100" type="body" hasCustomPrompt="1"/>
+            <p:ph type="body" idx="100" hasCustomPrompt="1"/>
           </p:nvPr>
         </p:nvSpPr>
         <p:spPr>
@@ -2106,7 +1885,7 @@
         <p:txBody>
           <a:bodyPr wrap="square" rtlCol="0"/>
           <a:lstStyle>
-            <a:lvl1pPr indent="0" marL="0">
+            <a:lvl1pPr marL="0" indent="0">
               <a:buNone/>
               <a:defRPr lang="en-US" sz="3400" dirty="0">
                 <a:solidFill>
@@ -2116,7 +1895,7 @@
             </a:lvl1pPr>
           </a:lstStyle>
           <a:p>
-            <a:pPr indent="0" marL="0">
+            <a:pPr marL="0" indent="0">
               <a:buNone/>
             </a:pPr>
             <a:endParaRPr lang="en-US" sz="3400" dirty="0"/>
@@ -2144,7 +1923,7 @@
           <a:bodyPr wrap="square" lIns="0" tIns="0" rIns="0" bIns="0" rtlCol="0" anchor="ctr"/>
           <a:lstStyle/>
           <a:p>
-            <a:pPr indent="0" marL="0">
+            <a:pPr marL="0" indent="0">
               <a:buNone/>
             </a:pPr>
             <a:r>
@@ -2179,7 +1958,7 @@
           </a:prstGeom>
           <a:extLst>
             <a:ext uri="{C572A759-6A51-4108-AA02-DFA0A04FC94B}">
-              <ma14:wrappingTextBoxFlag xmlns:ma14="http://schemas.microsoft.com/office/mac/drawingml/2011/main" val="0"/>
+              <ma14:wrappingTextBoxFlag xmlns:ma14="http://schemas.microsoft.com/office/mac/drawingml/2011/main" xmlns="" val="0"/>
             </a:ext>
           </a:extLst>
         </p:spPr>
@@ -2197,8 +1976,8 @@
           <a:p>
             <a:pPr algn="r"/>
             <a:fld id="{F7021451-1387-4CA6-816F-3879F97B5CBC}" type="slidenum">
-              <a:rPr b="0" lang="en-US"/>
-              <a:t>1005</a:t>
+              <a:rPr lang="en-US" b="0"/>
+              <a:t>‹Nº›</a:t>
             </a:fld>
             <a:endParaRPr lang="en-US"/>
           </a:p>
@@ -2215,6 +1994,11 @@
 <file path=ppt/slideMasters/slideMaster1.xml><?xml version="1.0" encoding="utf-8"?>
 <p:sldMaster xmlns:a="http://schemas.openxmlformats.org/drawingml/2006/main" xmlns:r="http://schemas.openxmlformats.org/officeDocument/2006/relationships" xmlns:p="http://schemas.openxmlformats.org/presentationml/2006/main">
   <p:cSld>
+    <p:bg>
+      <p:bgRef idx="1001">
+        <a:schemeClr val="bg1"/>
+      </p:bgRef>
+    </p:bg>
     <p:spTree>
       <p:nvGrpSpPr>
         <p:cNvPr id="1" name=""/>
@@ -2249,7 +2033,7 @@
           </a:prstGeom>
           <a:extLst>
             <a:ext uri="{C572A759-6A51-4108-AA02-DFA0A04FC94B}">
-              <ma14:wrappingTextBoxFlag xmlns:ma14="http://schemas.microsoft.com/office/mac/drawingml/2011/main" val="0"/>
+              <ma14:wrappingTextBoxFlag xmlns:ma14="http://schemas.microsoft.com/office/mac/drawingml/2011/main" xmlns="" val="0"/>
             </a:ext>
           </a:extLst>
         </p:spPr>
@@ -2267,8 +2051,8 @@
           <a:p>
             <a:pPr algn="r"/>
             <a:fld id="{F7021451-1387-4CA6-816F-3879F97B5CBC}" type="slidenum">
-              <a:rPr b="0" lang="en-US"/>
-              <a:t>null</a:t>
+              <a:rPr lang="en-US" b="0"/>
+              <a:t>‹Nº›</a:t>
             </a:fld>
             <a:endParaRPr lang="en-US"/>
           </a:p>
@@ -2576,7 +2360,7 @@
           <a:bodyPr wrap="square" lIns="0" tIns="0" rIns="0" bIns="0" rtlCol="0" anchor="ctr"/>
           <a:lstStyle/>
           <a:p>
-            <a:pPr algn="ctr" indent="0" marL="0">
+            <a:pPr marL="0" indent="0" algn="ctr">
               <a:buNone/>
             </a:pPr>
             <a:r>
@@ -2597,9 +2381,11 @@
       <p:sp>
         <p:nvSpPr>
           <p:cNvPr id="3" name="Text 0"/>
-          <p:cNvSpPr/>
+          <p:cNvSpPr>
+            <a:spLocks noGrp="1"/>
+          </p:cNvSpPr>
           <p:nvPr>
-            <p:ph idx="100" type="title" hasCustomPrompt="1"/>
+            <p:ph type="title" idx="100" hasCustomPrompt="1"/>
           </p:nvPr>
         </p:nvSpPr>
         <p:spPr>
@@ -2617,7 +2403,7 @@
           <a:bodyPr wrap="square" lIns="0" tIns="0" rIns="0" bIns="0" rtlCol="0" anchor="b"/>
           <a:lstStyle/>
           <a:p>
-            <a:pPr algn="l" indent="0" marL="0">
+            <a:pPr marL="0" indent="0" algn="l">
               <a:buNone/>
             </a:pPr>
             <a:r>
@@ -2635,9 +2421,11 @@
       <p:sp>
         <p:nvSpPr>
           <p:cNvPr id="4" name="Text 0"/>
-          <p:cNvSpPr/>
+          <p:cNvSpPr>
+            <a:spLocks noGrp="1"/>
+          </p:cNvSpPr>
           <p:nvPr>
-            <p:ph idx="101" type="body" hasCustomPrompt="1"/>
+            <p:ph type="body" idx="101" hasCustomPrompt="1"/>
           </p:nvPr>
         </p:nvSpPr>
         <p:spPr>
@@ -2655,7 +2443,7 @@
           <a:bodyPr wrap="square" lIns="0" tIns="0" rIns="0" bIns="0" rtlCol="0" anchor="t"/>
           <a:lstStyle/>
           <a:p>
-            <a:pPr indent="0" marL="0">
+            <a:pPr marL="0" indent="0">
               <a:buNone/>
             </a:pPr>
             <a:r>
@@ -2698,9 +2486,11 @@
       <p:sp>
         <p:nvSpPr>
           <p:cNvPr id="2" name="Text 0"/>
-          <p:cNvSpPr/>
+          <p:cNvSpPr>
+            <a:spLocks noGrp="1"/>
+          </p:cNvSpPr>
           <p:nvPr>
-            <p:ph idx="100" type="title" hasCustomPrompt="1"/>
+            <p:ph type="title" idx="100" hasCustomPrompt="1"/>
           </p:nvPr>
         </p:nvSpPr>
         <p:spPr>
@@ -2718,7 +2508,7 @@
           <a:bodyPr wrap="square" lIns="0" tIns="0" rIns="0" bIns="0" rtlCol="0" anchor="ctr"/>
           <a:lstStyle/>
           <a:p>
-            <a:pPr algn="l" indent="0" marL="0">
+            <a:pPr marL="0" indent="0" algn="l">
               <a:buNone/>
             </a:pPr>
             <a:r>
@@ -2776,7 +2566,7 @@
           <a:bodyPr wrap="square" lIns="0" tIns="0" rIns="0" bIns="0" rtlCol="0" anchor="ctr"/>
           <a:lstStyle/>
           <a:p>
-            <a:pPr algn="ctr" indent="0" marL="0">
+            <a:pPr marL="0" indent="0" algn="ctr">
               <a:buNone/>
             </a:pPr>
             <a:r>
@@ -2812,7 +2602,7 @@
           <a:bodyPr wrap="square" lIns="0" tIns="0" rIns="0" bIns="0" rtlCol="0" anchor="ctr"/>
           <a:lstStyle/>
           <a:p>
-            <a:pPr indent="0" marL="0">
+            <a:pPr marL="0" indent="0">
               <a:buNone/>
             </a:pPr>
             <a:r>
@@ -2846,7 +2636,7 @@
           </a:solidFill>
           <a:ln/>
           <a:effectLst>
-            <a:outerShdw sx="100000" sy="100000" kx="0" ky="0" algn="bl" rotWithShape="0" blurRad="101600" dist="38100" dir="5400000">
+            <a:outerShdw blurRad="101600" dist="38100" dir="5400000" algn="bl" rotWithShape="0">
               <a:srgbClr val="8A94A6">
                 <a:alpha val="35000"/>
               </a:srgbClr>
@@ -2875,7 +2665,7 @@
           <a:bodyPr wrap="square" lIns="0" tIns="0" rIns="0" bIns="0" rtlCol="0" anchor="ctr"/>
           <a:lstStyle/>
           <a:p>
-            <a:pPr indent="0" marL="0">
+            <a:pPr marL="0" indent="0">
               <a:buNone/>
             </a:pPr>
             <a:r>
@@ -2889,7 +2679,7 @@
             <a:endParaRPr lang="en-US" sz="4000" dirty="0"/>
           </a:p>
           <a:p>
-            <a:pPr indent="0" marL="0">
+            <a:pPr marL="0" indent="0">
               <a:buNone/>
             </a:pPr>
             <a:r>
@@ -2925,7 +2715,7 @@
           <a:bodyPr wrap="square" lIns="0" tIns="0" rIns="0" bIns="0" rtlCol="0" anchor="t"/>
           <a:lstStyle/>
           <a:p>
-            <a:pPr indent="0" marL="0">
+            <a:pPr marL="0" indent="0">
               <a:buNone/>
             </a:pPr>
             <a:r>
@@ -2959,7 +2749,7 @@
           </a:solidFill>
           <a:ln/>
           <a:effectLst>
-            <a:outerShdw sx="100000" sy="100000" kx="0" ky="0" algn="bl" rotWithShape="0" blurRad="101600" dist="38100" dir="5400000">
+            <a:outerShdw blurRad="101600" dist="38100" dir="5400000" algn="bl" rotWithShape="0">
               <a:srgbClr val="8A94A6">
                 <a:alpha val="35000"/>
               </a:srgbClr>
@@ -2988,7 +2778,7 @@
           <a:bodyPr wrap="square" lIns="0" tIns="0" rIns="0" bIns="0" rtlCol="0" anchor="ctr"/>
           <a:lstStyle/>
           <a:p>
-            <a:pPr indent="0" marL="0">
+            <a:pPr marL="0" indent="0">
               <a:buNone/>
             </a:pPr>
             <a:r>
@@ -3002,7 +2792,7 @@
             <a:endParaRPr lang="en-US" sz="4000" dirty="0"/>
           </a:p>
           <a:p>
-            <a:pPr indent="0" marL="0">
+            <a:pPr marL="0" indent="0">
               <a:buNone/>
             </a:pPr>
             <a:r>
@@ -3038,7 +2828,7 @@
           <a:bodyPr wrap="square" lIns="0" tIns="0" rIns="0" bIns="0" rtlCol="0" anchor="t"/>
           <a:lstStyle/>
           <a:p>
-            <a:pPr indent="0" marL="0">
+            <a:pPr marL="0" indent="0">
               <a:buNone/>
             </a:pPr>
             <a:r>
@@ -3072,7 +2862,7 @@
           </a:solidFill>
           <a:ln/>
           <a:effectLst>
-            <a:outerShdw sx="100000" sy="100000" kx="0" ky="0" algn="bl" rotWithShape="0" blurRad="101600" dist="38100" dir="5400000">
+            <a:outerShdw blurRad="101600" dist="38100" dir="5400000" algn="bl" rotWithShape="0">
               <a:srgbClr val="8A94A6">
                 <a:alpha val="35000"/>
               </a:srgbClr>
@@ -3101,7 +2891,7 @@
           <a:bodyPr wrap="square" lIns="0" tIns="0" rIns="0" bIns="0" rtlCol="0" anchor="ctr"/>
           <a:lstStyle/>
           <a:p>
-            <a:pPr indent="0" marL="0">
+            <a:pPr marL="0" indent="0">
               <a:buNone/>
             </a:pPr>
             <a:r>
@@ -3115,7 +2905,7 @@
             <a:endParaRPr lang="en-US" sz="4000" dirty="0"/>
           </a:p>
           <a:p>
-            <a:pPr indent="0" marL="0">
+            <a:pPr marL="0" indent="0">
               <a:buNone/>
             </a:pPr>
             <a:r>
@@ -3151,7 +2941,7 @@
           <a:bodyPr wrap="square" lIns="0" tIns="0" rIns="0" bIns="0" rtlCol="0" anchor="t"/>
           <a:lstStyle/>
           <a:p>
-            <a:pPr indent="0" marL="0">
+            <a:pPr marL="0" indent="0">
               <a:buNone/>
             </a:pPr>
             <a:r>
@@ -3186,7 +2976,7 @@
           </a:prstGeom>
           <a:extLst>
             <a:ext uri="{C572A759-6A51-4108-AA02-DFA0A04FC94B}">
-              <ma14:wrappingTextBoxFlag xmlns:ma14="http://schemas.microsoft.com/office/mac/drawingml/2011/main" val="0"/>
+              <ma14:wrappingTextBoxFlag xmlns:ma14="http://schemas.microsoft.com/office/mac/drawingml/2011/main" xmlns="" val="0"/>
             </a:ext>
           </a:extLst>
         </p:spPr>
@@ -3204,7 +2994,7 @@
           <a:p>
             <a:pPr algn="r"/>
             <a:fld id="{F7021451-1387-4CA6-816F-3879F97B5CBC}" type="slidenum">
-              <a:rPr b="0" lang="en-US"/>
+              <a:rPr lang="en-US" b="0"/>
               <a:t>10</a:t>
             </a:fld>
             <a:endParaRPr lang="en-US"/>
@@ -3239,9 +3029,11 @@
       <p:sp>
         <p:nvSpPr>
           <p:cNvPr id="2" name="Text 0"/>
-          <p:cNvSpPr/>
+          <p:cNvSpPr>
+            <a:spLocks noGrp="1"/>
+          </p:cNvSpPr>
           <p:nvPr>
-            <p:ph idx="100" type="title" hasCustomPrompt="1"/>
+            <p:ph type="title" idx="100" hasCustomPrompt="1"/>
           </p:nvPr>
         </p:nvSpPr>
         <p:spPr>
@@ -3259,7 +3051,7 @@
           <a:bodyPr wrap="square" lIns="0" tIns="0" rIns="0" bIns="0" rtlCol="0" anchor="ctr"/>
           <a:lstStyle/>
           <a:p>
-            <a:pPr algn="l" indent="0" marL="0">
+            <a:pPr marL="0" indent="0" algn="l">
               <a:buNone/>
             </a:pPr>
             <a:r>
@@ -3317,7 +3109,7 @@
           <a:bodyPr wrap="square" lIns="0" tIns="0" rIns="0" bIns="0" rtlCol="0" anchor="ctr"/>
           <a:lstStyle/>
           <a:p>
-            <a:pPr algn="ctr" indent="0" marL="0">
+            <a:pPr marL="0" indent="0" algn="ctr">
               <a:buNone/>
             </a:pPr>
             <a:r>
@@ -3354,167 +3146,7 @@
       </p:sp>
       <p:pic>
         <p:nvPicPr>
-          <p:cNvPr id="6" name="Image 0" descr="Una idea central por diapositiva.">    </p:cNvPr>
-          <p:cNvPicPr>
-            <a:picLocks noChangeAspect="1"/>
-          </p:cNvPicPr>
-          <p:nvPr/>
-        </p:nvPicPr>
-        <p:blipFill>
-          <a:blip r:embed="rId1"/>
-          <a:stretch>
-            <a:fillRect/>
-          </a:stretch>
-        </p:blipFill>
-        <p:spPr>
-          <a:xfrm>
-            <a:off x="713232" y="1673352"/>
-            <a:ext cx="356616" cy="356616"/>
-          </a:xfrm>
-          <a:prstGeom prst="rect">
-            <a:avLst/>
-          </a:prstGeom>
-        </p:spPr>
-      </p:pic>
-      <p:sp>
-        <p:nvSpPr>
-          <p:cNvPr id="7" name="Text 4"/>
-          <p:cNvSpPr txBox="1"/>
-          <p:nvPr/>
-        </p:nvSpPr>
-        <p:spPr>
-          <a:xfrm>
-            <a:off x="1463040" y="1508760"/>
-            <a:ext cx="10058400" cy="685800"/>
-          </a:xfrm>
-          <a:prstGeom prst="rect">
-            <a:avLst/>
-          </a:prstGeom>
-          <a:noFill/>
-          <a:ln/>
-        </p:spPr>
-        <p:txBody>
-          <a:bodyPr wrap="square" lIns="0" tIns="0" rIns="0" bIns="0" rtlCol="0" anchor="ctr"/>
-          <a:lstStyle/>
-          <a:p>
-            <a:pPr indent="0" marL="0">
-              <a:buNone/>
-            </a:pPr>
-            <a:r>
-              <a:rPr lang="en-US" sz="2200" dirty="0">
-                <a:solidFill>
-                  <a:schemeClr val="tx1"/>
-                </a:solidFill>
-              </a:rPr>
-              <a:t>Una idea central por diapositiva.</a:t>
-            </a:r>
-            <a:endParaRPr lang="en-US" sz="2200" dirty="0"/>
-          </a:p>
-        </p:txBody>
-      </p:sp>
-      <p:sp>
-        <p:nvSpPr>
-          <p:cNvPr id="8" name="Poco texto."/>
-          <p:cNvSpPr/>
-          <p:nvPr/>
-        </p:nvSpPr>
-        <p:spPr>
-          <a:xfrm>
-            <a:off x="548640" y="2377440"/>
-            <a:ext cx="685800" cy="685800"/>
-          </a:xfrm>
-          <a:prstGeom prst="ellipse">
-            <a:avLst/>
-          </a:prstGeom>
-          <a:solidFill>
-            <a:schemeClr val="tx2"/>
-          </a:solidFill>
-          <a:ln/>
-        </p:spPr>
-      </p:sp>
-      <p:pic>
-        <p:nvPicPr>
-          <p:cNvPr id="9" name="Image 1" descr="Poco texto.">    </p:cNvPr>
-          <p:cNvPicPr>
-            <a:picLocks noChangeAspect="1"/>
-          </p:cNvPicPr>
-          <p:nvPr/>
-        </p:nvPicPr>
-        <p:blipFill>
-          <a:blip r:embed="rId2"/>
-          <a:stretch>
-            <a:fillRect/>
-          </a:stretch>
-        </p:blipFill>
-        <p:spPr>
-          <a:xfrm>
-            <a:off x="713232" y="2542032"/>
-            <a:ext cx="356616" cy="356616"/>
-          </a:xfrm>
-          <a:prstGeom prst="rect">
-            <a:avLst/>
-          </a:prstGeom>
-        </p:spPr>
-      </p:pic>
-      <p:sp>
-        <p:nvSpPr>
-          <p:cNvPr id="10" name="Text 6"/>
-          <p:cNvSpPr txBox="1"/>
-          <p:nvPr/>
-        </p:nvSpPr>
-        <p:spPr>
-          <a:xfrm>
-            <a:off x="1463040" y="2377440"/>
-            <a:ext cx="10058400" cy="685800"/>
-          </a:xfrm>
-          <a:prstGeom prst="rect">
-            <a:avLst/>
-          </a:prstGeom>
-          <a:noFill/>
-          <a:ln/>
-        </p:spPr>
-        <p:txBody>
-          <a:bodyPr wrap="square" lIns="0" tIns="0" rIns="0" bIns="0" rtlCol="0" anchor="ctr"/>
-          <a:lstStyle/>
-          <a:p>
-            <a:pPr indent="0" marL="0">
-              <a:buNone/>
-            </a:pPr>
-            <a:r>
-              <a:rPr lang="en-US" sz="2200" dirty="0">
-                <a:solidFill>
-                  <a:schemeClr val="tx1"/>
-                </a:solidFill>
-              </a:rPr>
-              <a:t>Poco texto.</a:t>
-            </a:r>
-            <a:endParaRPr lang="en-US" sz="2200" dirty="0"/>
-          </a:p>
-        </p:txBody>
-      </p:sp>
-      <p:sp>
-        <p:nvSpPr>
-          <p:cNvPr id="11" name="Títulos claros."/>
-          <p:cNvSpPr/>
-          <p:nvPr/>
-        </p:nvSpPr>
-        <p:spPr>
-          <a:xfrm>
-            <a:off x="548640" y="3246120"/>
-            <a:ext cx="685800" cy="685800"/>
-          </a:xfrm>
-          <a:prstGeom prst="ellipse">
-            <a:avLst/>
-          </a:prstGeom>
-          <a:solidFill>
-            <a:schemeClr val="tx2"/>
-          </a:solidFill>
-          <a:ln/>
-        </p:spPr>
-      </p:sp>
-      <p:pic>
-        <p:nvPicPr>
-          <p:cNvPr id="12" name="Image 2" descr="Títulos claros.">    </p:cNvPr>
+          <p:cNvPr id="6" name="Image 0" descr="Una idea central por diapositiva."/>
           <p:cNvPicPr>
             <a:picLocks noChangeAspect="1"/>
           </p:cNvPicPr>
@@ -3528,7 +3160,7 @@
         </p:blipFill>
         <p:spPr>
           <a:xfrm>
-            <a:off x="713232" y="3410712"/>
+            <a:off x="713232" y="1673352"/>
             <a:ext cx="356616" cy="356616"/>
           </a:xfrm>
           <a:prstGeom prst="rect">
@@ -3538,13 +3170,13 @@
       </p:pic>
       <p:sp>
         <p:nvSpPr>
-          <p:cNvPr id="13" name="Text 8"/>
+          <p:cNvPr id="7" name="Text 4"/>
           <p:cNvSpPr txBox="1"/>
           <p:nvPr/>
         </p:nvSpPr>
         <p:spPr>
           <a:xfrm>
-            <a:off x="1463040" y="3246120"/>
+            <a:off x="1463040" y="1508760"/>
             <a:ext cx="10058400" cy="685800"/>
           </a:xfrm>
           <a:prstGeom prst="rect">
@@ -3557,7 +3189,7 @@
           <a:bodyPr wrap="square" lIns="0" tIns="0" rIns="0" bIns="0" rtlCol="0" anchor="ctr"/>
           <a:lstStyle/>
           <a:p>
-            <a:pPr indent="0" marL="0">
+            <a:pPr marL="0" indent="0">
               <a:buNone/>
             </a:pPr>
             <a:r>
@@ -3566,7 +3198,7 @@
                   <a:schemeClr val="tx1"/>
                 </a:solidFill>
               </a:rPr>
-              <a:t>Títulos claros.</a:t>
+              <a:t>Una idea central por diapositiva.</a:t>
             </a:r>
             <a:endParaRPr lang="en-US" sz="2200" dirty="0"/>
           </a:p>
@@ -3574,13 +3206,13 @@
       </p:sp>
       <p:sp>
         <p:nvSpPr>
-          <p:cNvPr id="14" name="Gráficos simples."/>
+          <p:cNvPr id="8" name="Poco texto."/>
           <p:cNvSpPr/>
           <p:nvPr/>
         </p:nvSpPr>
         <p:spPr>
           <a:xfrm>
-            <a:off x="548640" y="4114800"/>
+            <a:off x="548640" y="2377440"/>
             <a:ext cx="685800" cy="685800"/>
           </a:xfrm>
           <a:prstGeom prst="ellipse">
@@ -3594,7 +3226,7 @@
       </p:sp>
       <p:pic>
         <p:nvPicPr>
-          <p:cNvPr id="15" name="Image 3" descr="Gráficos simples.">    </p:cNvPr>
+          <p:cNvPr id="9" name="Image 1" descr="Poco texto."/>
           <p:cNvPicPr>
             <a:picLocks noChangeAspect="1"/>
           </p:cNvPicPr>
@@ -3608,7 +3240,7 @@
         </p:blipFill>
         <p:spPr>
           <a:xfrm>
-            <a:off x="713232" y="4279392"/>
+            <a:off x="713232" y="2542032"/>
             <a:ext cx="356616" cy="356616"/>
           </a:xfrm>
           <a:prstGeom prst="rect">
@@ -3618,13 +3250,13 @@
       </p:pic>
       <p:sp>
         <p:nvSpPr>
-          <p:cNvPr id="16" name="Text 10"/>
+          <p:cNvPr id="10" name="Text 6"/>
           <p:cNvSpPr txBox="1"/>
           <p:nvPr/>
         </p:nvSpPr>
         <p:spPr>
           <a:xfrm>
-            <a:off x="1463040" y="4114800"/>
+            <a:off x="1463040" y="2377440"/>
             <a:ext cx="10058400" cy="685800"/>
           </a:xfrm>
           <a:prstGeom prst="rect">
@@ -3637,7 +3269,7 @@
           <a:bodyPr wrap="square" lIns="0" tIns="0" rIns="0" bIns="0" rtlCol="0" anchor="ctr"/>
           <a:lstStyle/>
           <a:p>
-            <a:pPr indent="0" marL="0">
+            <a:pPr marL="0" indent="0">
               <a:buNone/>
             </a:pPr>
             <a:r>
@@ -3646,7 +3278,7 @@
                   <a:schemeClr val="tx1"/>
                 </a:solidFill>
               </a:rPr>
-              <a:t>Gráficos simples.</a:t>
+              <a:t>Poco texto.</a:t>
             </a:r>
             <a:endParaRPr lang="en-US" sz="2200" dirty="0"/>
           </a:p>
@@ -3654,27 +3286,27 @@
       </p:sp>
       <p:sp>
         <p:nvSpPr>
-          <p:cNvPr id="17" name="Ningún resultado sin justificar."/>
+          <p:cNvPr id="11" name="Títulos claros."/>
           <p:cNvSpPr/>
           <p:nvPr/>
         </p:nvSpPr>
         <p:spPr>
           <a:xfrm>
-            <a:off x="548640" y="4983480"/>
+            <a:off x="548640" y="3246120"/>
             <a:ext cx="685800" cy="685800"/>
           </a:xfrm>
           <a:prstGeom prst="ellipse">
             <a:avLst/>
           </a:prstGeom>
           <a:solidFill>
-            <a:schemeClr val="accent3"/>
+            <a:schemeClr val="tx2"/>
           </a:solidFill>
           <a:ln/>
         </p:spPr>
       </p:sp>
       <p:pic>
         <p:nvPicPr>
-          <p:cNvPr id="18" name="Image 4" descr="Ningún resultado sin justificar.">    </p:cNvPr>
+          <p:cNvPr id="12" name="Image 2" descr="Títulos claros."/>
           <p:cNvPicPr>
             <a:picLocks noChangeAspect="1"/>
           </p:cNvPicPr>
@@ -3688,6 +3320,166 @@
         </p:blipFill>
         <p:spPr>
           <a:xfrm>
+            <a:off x="713232" y="3410712"/>
+            <a:ext cx="356616" cy="356616"/>
+          </a:xfrm>
+          <a:prstGeom prst="rect">
+            <a:avLst/>
+          </a:prstGeom>
+        </p:spPr>
+      </p:pic>
+      <p:sp>
+        <p:nvSpPr>
+          <p:cNvPr id="13" name="Text 8"/>
+          <p:cNvSpPr txBox="1"/>
+          <p:nvPr/>
+        </p:nvSpPr>
+        <p:spPr>
+          <a:xfrm>
+            <a:off x="1463040" y="3246120"/>
+            <a:ext cx="10058400" cy="685800"/>
+          </a:xfrm>
+          <a:prstGeom prst="rect">
+            <a:avLst/>
+          </a:prstGeom>
+          <a:noFill/>
+          <a:ln/>
+        </p:spPr>
+        <p:txBody>
+          <a:bodyPr wrap="square" lIns="0" tIns="0" rIns="0" bIns="0" rtlCol="0" anchor="ctr"/>
+          <a:lstStyle/>
+          <a:p>
+            <a:pPr marL="0" indent="0">
+              <a:buNone/>
+            </a:pPr>
+            <a:r>
+              <a:rPr lang="en-US" sz="2200" dirty="0">
+                <a:solidFill>
+                  <a:schemeClr val="tx1"/>
+                </a:solidFill>
+              </a:rPr>
+              <a:t>Títulos claros.</a:t>
+            </a:r>
+            <a:endParaRPr lang="en-US" sz="2200" dirty="0"/>
+          </a:p>
+        </p:txBody>
+      </p:sp>
+      <p:sp>
+        <p:nvSpPr>
+          <p:cNvPr id="14" name="Gráficos simples."/>
+          <p:cNvSpPr/>
+          <p:nvPr/>
+        </p:nvSpPr>
+        <p:spPr>
+          <a:xfrm>
+            <a:off x="548640" y="4114800"/>
+            <a:ext cx="685800" cy="685800"/>
+          </a:xfrm>
+          <a:prstGeom prst="ellipse">
+            <a:avLst/>
+          </a:prstGeom>
+          <a:solidFill>
+            <a:schemeClr val="tx2"/>
+          </a:solidFill>
+          <a:ln/>
+        </p:spPr>
+      </p:sp>
+      <p:pic>
+        <p:nvPicPr>
+          <p:cNvPr id="15" name="Image 3" descr="Gráficos simples."/>
+          <p:cNvPicPr>
+            <a:picLocks noChangeAspect="1"/>
+          </p:cNvPicPr>
+          <p:nvPr/>
+        </p:nvPicPr>
+        <p:blipFill>
+          <a:blip r:embed="rId6"/>
+          <a:stretch>
+            <a:fillRect/>
+          </a:stretch>
+        </p:blipFill>
+        <p:spPr>
+          <a:xfrm>
+            <a:off x="713232" y="4279392"/>
+            <a:ext cx="356616" cy="356616"/>
+          </a:xfrm>
+          <a:prstGeom prst="rect">
+            <a:avLst/>
+          </a:prstGeom>
+        </p:spPr>
+      </p:pic>
+      <p:sp>
+        <p:nvSpPr>
+          <p:cNvPr id="16" name="Text 10"/>
+          <p:cNvSpPr txBox="1"/>
+          <p:nvPr/>
+        </p:nvSpPr>
+        <p:spPr>
+          <a:xfrm>
+            <a:off x="1463040" y="4114800"/>
+            <a:ext cx="10058400" cy="685800"/>
+          </a:xfrm>
+          <a:prstGeom prst="rect">
+            <a:avLst/>
+          </a:prstGeom>
+          <a:noFill/>
+          <a:ln/>
+        </p:spPr>
+        <p:txBody>
+          <a:bodyPr wrap="square" lIns="0" tIns="0" rIns="0" bIns="0" rtlCol="0" anchor="ctr"/>
+          <a:lstStyle/>
+          <a:p>
+            <a:pPr marL="0" indent="0">
+              <a:buNone/>
+            </a:pPr>
+            <a:r>
+              <a:rPr lang="en-US" sz="2200" dirty="0">
+                <a:solidFill>
+                  <a:schemeClr val="tx1"/>
+                </a:solidFill>
+              </a:rPr>
+              <a:t>Gráficos simples.</a:t>
+            </a:r>
+            <a:endParaRPr lang="en-US" sz="2200" dirty="0"/>
+          </a:p>
+        </p:txBody>
+      </p:sp>
+      <p:sp>
+        <p:nvSpPr>
+          <p:cNvPr id="17" name="Ningún resultado sin justificar."/>
+          <p:cNvSpPr/>
+          <p:nvPr/>
+        </p:nvSpPr>
+        <p:spPr>
+          <a:xfrm>
+            <a:off x="548640" y="4983480"/>
+            <a:ext cx="685800" cy="685800"/>
+          </a:xfrm>
+          <a:prstGeom prst="ellipse">
+            <a:avLst/>
+          </a:prstGeom>
+          <a:solidFill>
+            <a:schemeClr val="accent3"/>
+          </a:solidFill>
+          <a:ln/>
+        </p:spPr>
+      </p:sp>
+      <p:pic>
+        <p:nvPicPr>
+          <p:cNvPr id="18" name="Image 4" descr="Ningún resultado sin justificar."/>
+          <p:cNvPicPr>
+            <a:picLocks noChangeAspect="1"/>
+          </p:cNvPicPr>
+          <p:nvPr/>
+        </p:nvPicPr>
+        <p:blipFill>
+          <a:blip r:embed="rId7"/>
+          <a:stretch>
+            <a:fillRect/>
+          </a:stretch>
+        </p:blipFill>
+        <p:spPr>
+          <a:xfrm>
             <a:off x="713232" y="5148072"/>
             <a:ext cx="356616" cy="356616"/>
           </a:xfrm>
@@ -3717,7 +3509,7 @@
           <a:bodyPr wrap="square" lIns="0" tIns="0" rIns="0" bIns="0" rtlCol="0" anchor="ctr"/>
           <a:lstStyle/>
           <a:p>
-            <a:pPr indent="0" marL="0">
+            <a:pPr marL="0" indent="0">
               <a:buNone/>
             </a:pPr>
             <a:r>
@@ -3752,7 +3544,7 @@
           </a:prstGeom>
           <a:extLst>
             <a:ext uri="{C572A759-6A51-4108-AA02-DFA0A04FC94B}">
-              <ma14:wrappingTextBoxFlag xmlns:ma14="http://schemas.microsoft.com/office/mac/drawingml/2011/main" val="0"/>
+              <ma14:wrappingTextBoxFlag xmlns:ma14="http://schemas.microsoft.com/office/mac/drawingml/2011/main" xmlns="" val="0"/>
             </a:ext>
           </a:extLst>
         </p:spPr>
@@ -3770,7 +3562,7 @@
           <a:p>
             <a:pPr algn="r"/>
             <a:fld id="{F7021451-1387-4CA6-816F-3879F97B5CBC}" type="slidenum">
-              <a:rPr b="0" lang="en-US"/>
+              <a:rPr lang="en-US" b="0"/>
               <a:t>11</a:t>
             </a:fld>
             <a:endParaRPr lang="en-US"/>
@@ -3805,9 +3597,11 @@
       <p:sp>
         <p:nvSpPr>
           <p:cNvPr id="2" name="Text 0"/>
-          <p:cNvSpPr/>
+          <p:cNvSpPr>
+            <a:spLocks noGrp="1"/>
+          </p:cNvSpPr>
           <p:nvPr>
-            <p:ph idx="100" type="title" hasCustomPrompt="1"/>
+            <p:ph type="title" idx="100" hasCustomPrompt="1"/>
           </p:nvPr>
         </p:nvSpPr>
         <p:spPr>
@@ -3825,7 +3619,7 @@
           <a:bodyPr wrap="square" lIns="0" tIns="0" rIns="0" bIns="0" rtlCol="0" anchor="ctr"/>
           <a:lstStyle/>
           <a:p>
-            <a:pPr algn="l" indent="0" marL="0">
+            <a:pPr marL="0" indent="0" algn="l">
               <a:buNone/>
             </a:pPr>
             <a:r>
@@ -3883,7 +3677,7 @@
           <a:bodyPr wrap="square" lIns="0" tIns="0" rIns="0" bIns="0" rtlCol="0" anchor="ctr"/>
           <a:lstStyle/>
           <a:p>
-            <a:pPr algn="ctr" indent="0" marL="0">
+            <a:pPr marL="0" indent="0" algn="ctr">
               <a:buNone/>
             </a:pPr>
             <a:r>
@@ -3919,7 +3713,7 @@
           <a:bodyPr wrap="square" lIns="0" tIns="0" rIns="0" bIns="0" rtlCol="0" anchor="ctr"/>
           <a:lstStyle/>
           <a:p>
-            <a:pPr indent="0" marL="0">
+            <a:pPr marL="0" indent="0">
               <a:buNone/>
             </a:pPr>
             <a:r>
@@ -3978,211 +3772,7 @@
       </p:sp>
       <p:pic>
         <p:nvPicPr>
-          <p:cNvPr id="8" name="Image 0" descr="¿Una idea por diapositiva?">    </p:cNvPr>
-          <p:cNvPicPr>
-            <a:picLocks noChangeAspect="1"/>
-          </p:cNvPicPr>
-          <p:nvPr/>
-        </p:nvPicPr>
-        <p:blipFill>
-          <a:blip r:embed="rId1"/>
-          <a:stretch>
-            <a:fillRect/>
-          </a:stretch>
-        </p:blipFill>
-        <p:spPr>
-          <a:xfrm>
-            <a:off x="998525" y="2507285"/>
-            <a:ext cx="380390" cy="380390"/>
-          </a:xfrm>
-          <a:prstGeom prst="rect">
-            <a:avLst/>
-          </a:prstGeom>
-        </p:spPr>
-      </p:pic>
-      <p:sp>
-        <p:nvSpPr>
-          <p:cNvPr id="9" name="Text 6"/>
-          <p:cNvSpPr txBox="1"/>
-          <p:nvPr/>
-        </p:nvSpPr>
-        <p:spPr>
-          <a:xfrm>
-            <a:off x="1737360" y="1965960"/>
-            <a:ext cx="2082698" cy="1463040"/>
-          </a:xfrm>
-          <a:prstGeom prst="rect">
-            <a:avLst/>
-          </a:prstGeom>
-          <a:noFill/>
-          <a:ln/>
-        </p:spPr>
-        <p:txBody>
-          <a:bodyPr wrap="square" lIns="0" tIns="0" rIns="0" bIns="0" rtlCol="0" anchor="ctr"/>
-          <a:lstStyle/>
-          <a:p>
-            <a:pPr indent="0" marL="0">
-              <a:buNone/>
-            </a:pPr>
-            <a:r>
-              <a:rPr lang="en-US" sz="2000" b="1" dirty="0">
-                <a:solidFill>
-                  <a:schemeClr val="tx1"/>
-                </a:solidFill>
-              </a:rPr>
-              <a:t>¿Una idea por diapositiva?</a:t>
-            </a:r>
-            <a:endParaRPr lang="en-US" sz="2000" dirty="0"/>
-          </a:p>
-        </p:txBody>
-      </p:sp>
-      <p:sp>
-        <p:nvSpPr>
-          <p:cNvPr id="10" name="Tarjeta"/>
-          <p:cNvSpPr/>
-          <p:nvPr/>
-        </p:nvSpPr>
-        <p:spPr>
-          <a:xfrm>
-            <a:off x="4368698" y="1965960"/>
-            <a:ext cx="3454298" cy="1463040"/>
-          </a:xfrm>
-          <a:prstGeom prst="roundRect">
-            <a:avLst>
-              <a:gd name="adj" fmla="val 9375"/>
-            </a:avLst>
-          </a:prstGeom>
-          <a:solidFill>
-            <a:schemeClr val="bg2"/>
-          </a:solidFill>
-          <a:ln/>
-        </p:spPr>
-      </p:sp>
-      <p:sp>
-        <p:nvSpPr>
-          <p:cNvPr id="11" name="¿Poco texto?"/>
-          <p:cNvSpPr/>
-          <p:nvPr/>
-        </p:nvSpPr>
-        <p:spPr>
-          <a:xfrm>
-            <a:off x="4643018" y="2331720"/>
-            <a:ext cx="731520" cy="731520"/>
-          </a:xfrm>
-          <a:prstGeom prst="ellipse">
-            <a:avLst/>
-          </a:prstGeom>
-          <a:solidFill>
-            <a:schemeClr val="accent1"/>
-          </a:solidFill>
-          <a:ln/>
-        </p:spPr>
-      </p:sp>
-      <p:pic>
-        <p:nvPicPr>
-          <p:cNvPr id="12" name="Image 1" descr="¿Poco texto?">    </p:cNvPr>
-          <p:cNvPicPr>
-            <a:picLocks noChangeAspect="1"/>
-          </p:cNvPicPr>
-          <p:nvPr/>
-        </p:nvPicPr>
-        <p:blipFill>
-          <a:blip r:embed="rId2"/>
-          <a:stretch>
-            <a:fillRect/>
-          </a:stretch>
-        </p:blipFill>
-        <p:spPr>
-          <a:xfrm>
-            <a:off x="4818583" y="2507285"/>
-            <a:ext cx="380390" cy="380390"/>
-          </a:xfrm>
-          <a:prstGeom prst="rect">
-            <a:avLst/>
-          </a:prstGeom>
-        </p:spPr>
-      </p:pic>
-      <p:sp>
-        <p:nvSpPr>
-          <p:cNvPr id="13" name="Text 9"/>
-          <p:cNvSpPr txBox="1"/>
-          <p:nvPr/>
-        </p:nvSpPr>
-        <p:spPr>
-          <a:xfrm>
-            <a:off x="5557418" y="1965960"/>
-            <a:ext cx="2082698" cy="1463040"/>
-          </a:xfrm>
-          <a:prstGeom prst="rect">
-            <a:avLst/>
-          </a:prstGeom>
-          <a:noFill/>
-          <a:ln/>
-        </p:spPr>
-        <p:txBody>
-          <a:bodyPr wrap="square" lIns="0" tIns="0" rIns="0" bIns="0" rtlCol="0" anchor="ctr"/>
-          <a:lstStyle/>
-          <a:p>
-            <a:pPr indent="0" marL="0">
-              <a:buNone/>
-            </a:pPr>
-            <a:r>
-              <a:rPr lang="en-US" sz="2000" b="1" dirty="0">
-                <a:solidFill>
-                  <a:schemeClr val="tx1"/>
-                </a:solidFill>
-              </a:rPr>
-              <a:t>¿Poco texto?</a:t>
-            </a:r>
-            <a:endParaRPr lang="en-US" sz="2000" dirty="0"/>
-          </a:p>
-        </p:txBody>
-      </p:sp>
-      <p:sp>
-        <p:nvSpPr>
-          <p:cNvPr id="14" name="Tarjeta"/>
-          <p:cNvSpPr/>
-          <p:nvPr/>
-        </p:nvSpPr>
-        <p:spPr>
-          <a:xfrm>
-            <a:off x="8188757" y="1965960"/>
-            <a:ext cx="3454298" cy="1463040"/>
-          </a:xfrm>
-          <a:prstGeom prst="roundRect">
-            <a:avLst>
-              <a:gd name="adj" fmla="val 9375"/>
-            </a:avLst>
-          </a:prstGeom>
-          <a:solidFill>
-            <a:schemeClr val="bg2"/>
-          </a:solidFill>
-          <a:ln/>
-        </p:spPr>
-      </p:sp>
-      <p:sp>
-        <p:nvSpPr>
-          <p:cNvPr id="15" name="¿Alguna cifra sin justificar?"/>
-          <p:cNvSpPr/>
-          <p:nvPr/>
-        </p:nvSpPr>
-        <p:spPr>
-          <a:xfrm>
-            <a:off x="8463077" y="2331720"/>
-            <a:ext cx="731520" cy="731520"/>
-          </a:xfrm>
-          <a:prstGeom prst="ellipse">
-            <a:avLst/>
-          </a:prstGeom>
-          <a:solidFill>
-            <a:schemeClr val="accent1"/>
-          </a:solidFill>
-          <a:ln/>
-        </p:spPr>
-      </p:sp>
-      <p:pic>
-        <p:nvPicPr>
-          <p:cNvPr id="16" name="Image 2" descr="¿Alguna cifra sin justificar?">    </p:cNvPr>
+          <p:cNvPr id="8" name="Image 0" descr="¿Una idea por diapositiva?"/>
           <p:cNvPicPr>
             <a:picLocks noChangeAspect="1"/>
           </p:cNvPicPr>
@@ -4196,6 +3786,210 @@
         </p:blipFill>
         <p:spPr>
           <a:xfrm>
+            <a:off x="998525" y="2507285"/>
+            <a:ext cx="380390" cy="380390"/>
+          </a:xfrm>
+          <a:prstGeom prst="rect">
+            <a:avLst/>
+          </a:prstGeom>
+        </p:spPr>
+      </p:pic>
+      <p:sp>
+        <p:nvSpPr>
+          <p:cNvPr id="9" name="Text 6"/>
+          <p:cNvSpPr txBox="1"/>
+          <p:nvPr/>
+        </p:nvSpPr>
+        <p:spPr>
+          <a:xfrm>
+            <a:off x="1737360" y="1965960"/>
+            <a:ext cx="2082698" cy="1463040"/>
+          </a:xfrm>
+          <a:prstGeom prst="rect">
+            <a:avLst/>
+          </a:prstGeom>
+          <a:noFill/>
+          <a:ln/>
+        </p:spPr>
+        <p:txBody>
+          <a:bodyPr wrap="square" lIns="0" tIns="0" rIns="0" bIns="0" rtlCol="0" anchor="ctr"/>
+          <a:lstStyle/>
+          <a:p>
+            <a:pPr marL="0" indent="0">
+              <a:buNone/>
+            </a:pPr>
+            <a:r>
+              <a:rPr lang="en-US" sz="2000" b="1" dirty="0">
+                <a:solidFill>
+                  <a:schemeClr val="tx1"/>
+                </a:solidFill>
+              </a:rPr>
+              <a:t>¿Una idea por diapositiva?</a:t>
+            </a:r>
+            <a:endParaRPr lang="en-US" sz="2000" dirty="0"/>
+          </a:p>
+        </p:txBody>
+      </p:sp>
+      <p:sp>
+        <p:nvSpPr>
+          <p:cNvPr id="10" name="Tarjeta"/>
+          <p:cNvSpPr/>
+          <p:nvPr/>
+        </p:nvSpPr>
+        <p:spPr>
+          <a:xfrm>
+            <a:off x="4368698" y="1965960"/>
+            <a:ext cx="3454298" cy="1463040"/>
+          </a:xfrm>
+          <a:prstGeom prst="roundRect">
+            <a:avLst>
+              <a:gd name="adj" fmla="val 9375"/>
+            </a:avLst>
+          </a:prstGeom>
+          <a:solidFill>
+            <a:schemeClr val="bg2"/>
+          </a:solidFill>
+          <a:ln/>
+        </p:spPr>
+      </p:sp>
+      <p:sp>
+        <p:nvSpPr>
+          <p:cNvPr id="11" name="¿Poco texto?"/>
+          <p:cNvSpPr/>
+          <p:nvPr/>
+        </p:nvSpPr>
+        <p:spPr>
+          <a:xfrm>
+            <a:off x="4643018" y="2331720"/>
+            <a:ext cx="731520" cy="731520"/>
+          </a:xfrm>
+          <a:prstGeom prst="ellipse">
+            <a:avLst/>
+          </a:prstGeom>
+          <a:solidFill>
+            <a:schemeClr val="accent1"/>
+          </a:solidFill>
+          <a:ln/>
+        </p:spPr>
+      </p:sp>
+      <p:pic>
+        <p:nvPicPr>
+          <p:cNvPr id="12" name="Image 1" descr="¿Poco texto?"/>
+          <p:cNvPicPr>
+            <a:picLocks noChangeAspect="1"/>
+          </p:cNvPicPr>
+          <p:nvPr/>
+        </p:nvPicPr>
+        <p:blipFill>
+          <a:blip r:embed="rId3"/>
+          <a:stretch>
+            <a:fillRect/>
+          </a:stretch>
+        </p:blipFill>
+        <p:spPr>
+          <a:xfrm>
+            <a:off x="4818583" y="2507285"/>
+            <a:ext cx="380390" cy="380390"/>
+          </a:xfrm>
+          <a:prstGeom prst="rect">
+            <a:avLst/>
+          </a:prstGeom>
+        </p:spPr>
+      </p:pic>
+      <p:sp>
+        <p:nvSpPr>
+          <p:cNvPr id="13" name="Text 9"/>
+          <p:cNvSpPr txBox="1"/>
+          <p:nvPr/>
+        </p:nvSpPr>
+        <p:spPr>
+          <a:xfrm>
+            <a:off x="5557418" y="1965960"/>
+            <a:ext cx="2082698" cy="1463040"/>
+          </a:xfrm>
+          <a:prstGeom prst="rect">
+            <a:avLst/>
+          </a:prstGeom>
+          <a:noFill/>
+          <a:ln/>
+        </p:spPr>
+        <p:txBody>
+          <a:bodyPr wrap="square" lIns="0" tIns="0" rIns="0" bIns="0" rtlCol="0" anchor="ctr"/>
+          <a:lstStyle/>
+          <a:p>
+            <a:pPr marL="0" indent="0">
+              <a:buNone/>
+            </a:pPr>
+            <a:r>
+              <a:rPr lang="en-US" sz="2000" b="1" dirty="0">
+                <a:solidFill>
+                  <a:schemeClr val="tx1"/>
+                </a:solidFill>
+              </a:rPr>
+              <a:t>¿Poco texto?</a:t>
+            </a:r>
+            <a:endParaRPr lang="en-US" sz="2000" dirty="0"/>
+          </a:p>
+        </p:txBody>
+      </p:sp>
+      <p:sp>
+        <p:nvSpPr>
+          <p:cNvPr id="14" name="Tarjeta"/>
+          <p:cNvSpPr/>
+          <p:nvPr/>
+        </p:nvSpPr>
+        <p:spPr>
+          <a:xfrm>
+            <a:off x="8188757" y="1965960"/>
+            <a:ext cx="3454298" cy="1463040"/>
+          </a:xfrm>
+          <a:prstGeom prst="roundRect">
+            <a:avLst>
+              <a:gd name="adj" fmla="val 9375"/>
+            </a:avLst>
+          </a:prstGeom>
+          <a:solidFill>
+            <a:schemeClr val="bg2"/>
+          </a:solidFill>
+          <a:ln/>
+        </p:spPr>
+      </p:sp>
+      <p:sp>
+        <p:nvSpPr>
+          <p:cNvPr id="15" name="¿Alguna cifra sin justificar?"/>
+          <p:cNvSpPr/>
+          <p:nvPr/>
+        </p:nvSpPr>
+        <p:spPr>
+          <a:xfrm>
+            <a:off x="8463077" y="2331720"/>
+            <a:ext cx="731520" cy="731520"/>
+          </a:xfrm>
+          <a:prstGeom prst="ellipse">
+            <a:avLst/>
+          </a:prstGeom>
+          <a:solidFill>
+            <a:schemeClr val="accent1"/>
+          </a:solidFill>
+          <a:ln/>
+        </p:spPr>
+      </p:sp>
+      <p:pic>
+        <p:nvPicPr>
+          <p:cNvPr id="16" name="Image 2" descr="¿Alguna cifra sin justificar?"/>
+          <p:cNvPicPr>
+            <a:picLocks noChangeAspect="1"/>
+          </p:cNvPicPr>
+          <p:nvPr/>
+        </p:nvPicPr>
+        <p:blipFill>
+          <a:blip r:embed="rId3"/>
+          <a:stretch>
+            <a:fillRect/>
+          </a:stretch>
+        </p:blipFill>
+        <p:spPr>
+          <a:xfrm>
             <a:off x="8638642" y="2507285"/>
             <a:ext cx="380390" cy="380390"/>
           </a:xfrm>
@@ -4225,7 +4019,7 @@
           <a:bodyPr wrap="square" lIns="0" tIns="0" rIns="0" bIns="0" rtlCol="0" anchor="ctr"/>
           <a:lstStyle/>
           <a:p>
-            <a:pPr indent="0" marL="0">
+            <a:pPr marL="0" indent="0">
               <a:buNone/>
             </a:pPr>
             <a:r>
@@ -4261,7 +4055,7 @@
           <a:bodyPr wrap="square" lIns="0" tIns="0" rIns="0" bIns="0" rtlCol="0" anchor="ctr"/>
           <a:lstStyle/>
           <a:p>
-            <a:pPr indent="0" marL="0">
+            <a:pPr marL="0" indent="0">
               <a:buNone/>
             </a:pPr>
             <a:r>
@@ -4323,7 +4117,7 @@
           </a:prstGeom>
           <a:extLst>
             <a:ext uri="{C572A759-6A51-4108-AA02-DFA0A04FC94B}">
-              <ma14:wrappingTextBoxFlag xmlns:ma14="http://schemas.microsoft.com/office/mac/drawingml/2011/main" val="0"/>
+              <ma14:wrappingTextBoxFlag xmlns:ma14="http://schemas.microsoft.com/office/mac/drawingml/2011/main" xmlns="" val="0"/>
             </a:ext>
           </a:extLst>
         </p:spPr>
@@ -4341,7 +4135,7 @@
           <a:p>
             <a:pPr algn="r"/>
             <a:fld id="{F7021451-1387-4CA6-816F-3879F97B5CBC}" type="slidenum">
-              <a:rPr b="0" lang="en-US"/>
+              <a:rPr lang="en-US" b="0"/>
               <a:t>12</a:t>
             </a:fld>
             <a:endParaRPr lang="en-US"/>
@@ -4376,9 +4170,11 @@
       <p:sp>
         <p:nvSpPr>
           <p:cNvPr id="2" name="Text 0"/>
-          <p:cNvSpPr/>
+          <p:cNvSpPr>
+            <a:spLocks noGrp="1"/>
+          </p:cNvSpPr>
           <p:nvPr>
-            <p:ph idx="100" type="title" hasCustomPrompt="1"/>
+            <p:ph type="title" idx="100" hasCustomPrompt="1"/>
           </p:nvPr>
         </p:nvSpPr>
         <p:spPr>
@@ -4396,7 +4192,7 @@
           <a:bodyPr wrap="square" lIns="0" tIns="0" rIns="0" bIns="0" rtlCol="0" anchor="ctr"/>
           <a:lstStyle/>
           <a:p>
-            <a:pPr algn="l" indent="0" marL="0">
+            <a:pPr marL="0" indent="0" algn="l">
               <a:buNone/>
             </a:pPr>
             <a:r>
@@ -4455,239 +4251,7 @@
       </p:sp>
       <p:pic>
         <p:nvPicPr>
-          <p:cNvPr id="5" name="Image 0" descr="Matriz de decisión">    </p:cNvPr>
-          <p:cNvPicPr>
-            <a:picLocks noChangeAspect="1"/>
-          </p:cNvPicPr>
-          <p:nvPr/>
-        </p:nvPicPr>
-        <p:blipFill>
-          <a:blip r:embed="rId1"/>
-          <a:stretch>
-            <a:fillRect/>
-          </a:stretch>
-        </p:blipFill>
-        <p:spPr>
-          <a:xfrm>
-            <a:off x="1919173" y="2249424"/>
-            <a:ext cx="713232" cy="713232"/>
-          </a:xfrm>
-          <a:prstGeom prst="rect">
-            <a:avLst/>
-          </a:prstGeom>
-        </p:spPr>
-      </p:pic>
-      <p:sp>
-        <p:nvSpPr>
-          <p:cNvPr id="6" name="Text 3"/>
-          <p:cNvSpPr txBox="1"/>
-          <p:nvPr/>
-        </p:nvSpPr>
-        <p:spPr>
-          <a:xfrm>
-            <a:off x="822960" y="3520440"/>
-            <a:ext cx="2905658" cy="1143000"/>
-          </a:xfrm>
-          <a:prstGeom prst="rect">
-            <a:avLst/>
-          </a:prstGeom>
-          <a:noFill/>
-          <a:ln/>
-        </p:spPr>
-        <p:txBody>
-          <a:bodyPr wrap="square" lIns="0" tIns="0" rIns="0" bIns="0" rtlCol="0" anchor="t"/>
-          <a:lstStyle/>
-          <a:p>
-            <a:pPr algn="ctr" indent="0" marL="0">
-              <a:buNone/>
-            </a:pPr>
-            <a:r>
-              <a:rPr lang="en-US" sz="2400" b="1" dirty="0">
-                <a:solidFill>
-                  <a:schemeClr val="tx1"/>
-                </a:solidFill>
-              </a:rPr>
-              <a:t>Matriz de decisión</a:t>
-            </a:r>
-            <a:endParaRPr lang="en-US" sz="2400" dirty="0"/>
-          </a:p>
-          <a:p>
-            <a:pPr algn="ctr" indent="0" marL="0">
-              <a:buNone/>
-            </a:pPr>
-            <a:r>
-              <a:rPr lang="en-US" sz="1700" dirty="0">
-                <a:solidFill>
-                  <a:schemeClr val="tx2"/>
-                </a:solidFill>
-              </a:rPr>
-              <a:t>Bloque 3</a:t>
-            </a:r>
-            <a:endParaRPr lang="en-US" sz="2400" dirty="0"/>
-          </a:p>
-        </p:txBody>
-      </p:sp>
-      <p:sp>
-        <p:nvSpPr>
-          <p:cNvPr id="7" name="Tarjeta"/>
-          <p:cNvSpPr/>
-          <p:nvPr/>
-        </p:nvSpPr>
-        <p:spPr>
-          <a:xfrm>
-            <a:off x="4368698" y="1554480"/>
-            <a:ext cx="3454298" cy="3291840"/>
-          </a:xfrm>
-          <a:prstGeom prst="roundRect">
-            <a:avLst>
-              <a:gd name="adj" fmla="val 4167"/>
-            </a:avLst>
-          </a:prstGeom>
-          <a:solidFill>
-            <a:schemeClr val="bg2"/>
-          </a:solidFill>
-          <a:ln/>
-        </p:spPr>
-      </p:sp>
-      <p:sp>
-        <p:nvSpPr>
-          <p:cNvPr id="8" name="Documento del proyecto"/>
-          <p:cNvSpPr/>
-          <p:nvPr/>
-        </p:nvSpPr>
-        <p:spPr>
-          <a:xfrm>
-            <a:off x="5410048" y="1920240"/>
-            <a:ext cx="1371600" cy="1371600"/>
-          </a:xfrm>
-          <a:prstGeom prst="ellipse">
-            <a:avLst/>
-          </a:prstGeom>
-          <a:solidFill>
-            <a:schemeClr val="accent1"/>
-          </a:solidFill>
-          <a:ln/>
-        </p:spPr>
-      </p:sp>
-      <p:pic>
-        <p:nvPicPr>
-          <p:cNvPr id="9" name="Image 1" descr="Documento del proyecto">    </p:cNvPr>
-          <p:cNvPicPr>
-            <a:picLocks noChangeAspect="1"/>
-          </p:cNvPicPr>
-          <p:nvPr/>
-        </p:nvPicPr>
-        <p:blipFill>
-          <a:blip r:embed="rId2"/>
-          <a:stretch>
-            <a:fillRect/>
-          </a:stretch>
-        </p:blipFill>
-        <p:spPr>
-          <a:xfrm>
-            <a:off x="5739232" y="2249424"/>
-            <a:ext cx="713232" cy="713232"/>
-          </a:xfrm>
-          <a:prstGeom prst="rect">
-            <a:avLst/>
-          </a:prstGeom>
-        </p:spPr>
-      </p:pic>
-      <p:sp>
-        <p:nvSpPr>
-          <p:cNvPr id="10" name="Text 6"/>
-          <p:cNvSpPr txBox="1"/>
-          <p:nvPr/>
-        </p:nvSpPr>
-        <p:spPr>
-          <a:xfrm>
-            <a:off x="4643018" y="3520440"/>
-            <a:ext cx="2905658" cy="1143000"/>
-          </a:xfrm>
-          <a:prstGeom prst="rect">
-            <a:avLst/>
-          </a:prstGeom>
-          <a:noFill/>
-          <a:ln/>
-        </p:spPr>
-        <p:txBody>
-          <a:bodyPr wrap="square" lIns="0" tIns="0" rIns="0" bIns="0" rtlCol="0" anchor="t"/>
-          <a:lstStyle/>
-          <a:p>
-            <a:pPr algn="ctr" indent="0" marL="0">
-              <a:buNone/>
-            </a:pPr>
-            <a:r>
-              <a:rPr lang="en-US" sz="2400" b="1" dirty="0">
-                <a:solidFill>
-                  <a:schemeClr val="tx1"/>
-                </a:solidFill>
-              </a:rPr>
-              <a:t>Documento del proyecto</a:t>
-            </a:r>
-            <a:endParaRPr lang="en-US" sz="2400" dirty="0"/>
-          </a:p>
-          <a:p>
-            <a:pPr algn="ctr" indent="0" marL="0">
-              <a:buNone/>
-            </a:pPr>
-            <a:r>
-              <a:rPr lang="en-US" sz="1700" dirty="0">
-                <a:solidFill>
-                  <a:schemeClr val="tx2"/>
-                </a:solidFill>
-              </a:rPr>
-              <a:t>Bloque 4</a:t>
-            </a:r>
-            <a:endParaRPr lang="en-US" sz="2400" dirty="0"/>
-          </a:p>
-        </p:txBody>
-      </p:sp>
-      <p:sp>
-        <p:nvSpPr>
-          <p:cNvPr id="11" name="Tarjeta"/>
-          <p:cNvSpPr/>
-          <p:nvPr/>
-        </p:nvSpPr>
-        <p:spPr>
-          <a:xfrm>
-            <a:off x="8188757" y="1554480"/>
-            <a:ext cx="3454298" cy="3291840"/>
-          </a:xfrm>
-          <a:prstGeom prst="roundRect">
-            <a:avLst>
-              <a:gd name="adj" fmla="val 4167"/>
-            </a:avLst>
-          </a:prstGeom>
-          <a:solidFill>
-            <a:schemeClr val="bg2"/>
-          </a:solidFill>
-          <a:ln/>
-        </p:spPr>
-      </p:sp>
-      <p:sp>
-        <p:nvSpPr>
-          <p:cNvPr id="12" name="Presentación"/>
-          <p:cNvSpPr/>
-          <p:nvPr/>
-        </p:nvSpPr>
-        <p:spPr>
-          <a:xfrm>
-            <a:off x="9230106" y="1920240"/>
-            <a:ext cx="1371600" cy="1371600"/>
-          </a:xfrm>
-          <a:prstGeom prst="ellipse">
-            <a:avLst/>
-          </a:prstGeom>
-          <a:solidFill>
-            <a:schemeClr val="accent1"/>
-          </a:solidFill>
-          <a:ln/>
-        </p:spPr>
-      </p:sp>
-      <p:pic>
-        <p:nvPicPr>
-          <p:cNvPr id="13" name="Image 2" descr="Presentación">    </p:cNvPr>
+          <p:cNvPr id="5" name="Image 0" descr="Matriz de decisión"/>
           <p:cNvPicPr>
             <a:picLocks noChangeAspect="1"/>
           </p:cNvPicPr>
@@ -4701,6 +4265,238 @@
         </p:blipFill>
         <p:spPr>
           <a:xfrm>
+            <a:off x="1919173" y="2249424"/>
+            <a:ext cx="713232" cy="713232"/>
+          </a:xfrm>
+          <a:prstGeom prst="rect">
+            <a:avLst/>
+          </a:prstGeom>
+        </p:spPr>
+      </p:pic>
+      <p:sp>
+        <p:nvSpPr>
+          <p:cNvPr id="6" name="Text 3"/>
+          <p:cNvSpPr txBox="1"/>
+          <p:nvPr/>
+        </p:nvSpPr>
+        <p:spPr>
+          <a:xfrm>
+            <a:off x="822960" y="3520440"/>
+            <a:ext cx="2905658" cy="1143000"/>
+          </a:xfrm>
+          <a:prstGeom prst="rect">
+            <a:avLst/>
+          </a:prstGeom>
+          <a:noFill/>
+          <a:ln/>
+        </p:spPr>
+        <p:txBody>
+          <a:bodyPr wrap="square" lIns="0" tIns="0" rIns="0" bIns="0" rtlCol="0" anchor="t"/>
+          <a:lstStyle/>
+          <a:p>
+            <a:pPr marL="0" indent="0" algn="ctr">
+              <a:buNone/>
+            </a:pPr>
+            <a:r>
+              <a:rPr lang="en-US" sz="2400" b="1" dirty="0">
+                <a:solidFill>
+                  <a:schemeClr val="tx1"/>
+                </a:solidFill>
+              </a:rPr>
+              <a:t>Matriz de decisión</a:t>
+            </a:r>
+            <a:endParaRPr lang="en-US" sz="2400" dirty="0"/>
+          </a:p>
+          <a:p>
+            <a:pPr marL="0" indent="0" algn="ctr">
+              <a:buNone/>
+            </a:pPr>
+            <a:r>
+              <a:rPr lang="en-US" sz="1700" dirty="0">
+                <a:solidFill>
+                  <a:schemeClr val="tx2"/>
+                </a:solidFill>
+              </a:rPr>
+              <a:t>Bloque 3</a:t>
+            </a:r>
+            <a:endParaRPr lang="en-US" sz="2400" dirty="0"/>
+          </a:p>
+        </p:txBody>
+      </p:sp>
+      <p:sp>
+        <p:nvSpPr>
+          <p:cNvPr id="7" name="Tarjeta"/>
+          <p:cNvSpPr/>
+          <p:nvPr/>
+        </p:nvSpPr>
+        <p:spPr>
+          <a:xfrm>
+            <a:off x="4368698" y="1554480"/>
+            <a:ext cx="3454298" cy="3291840"/>
+          </a:xfrm>
+          <a:prstGeom prst="roundRect">
+            <a:avLst>
+              <a:gd name="adj" fmla="val 4167"/>
+            </a:avLst>
+          </a:prstGeom>
+          <a:solidFill>
+            <a:schemeClr val="bg2"/>
+          </a:solidFill>
+          <a:ln/>
+        </p:spPr>
+      </p:sp>
+      <p:sp>
+        <p:nvSpPr>
+          <p:cNvPr id="8" name="Documento del proyecto"/>
+          <p:cNvSpPr/>
+          <p:nvPr/>
+        </p:nvSpPr>
+        <p:spPr>
+          <a:xfrm>
+            <a:off x="5410048" y="1920240"/>
+            <a:ext cx="1371600" cy="1371600"/>
+          </a:xfrm>
+          <a:prstGeom prst="ellipse">
+            <a:avLst/>
+          </a:prstGeom>
+          <a:solidFill>
+            <a:schemeClr val="accent1"/>
+          </a:solidFill>
+          <a:ln/>
+        </p:spPr>
+      </p:sp>
+      <p:pic>
+        <p:nvPicPr>
+          <p:cNvPr id="9" name="Image 1" descr="Documento del proyecto"/>
+          <p:cNvPicPr>
+            <a:picLocks noChangeAspect="1"/>
+          </p:cNvPicPr>
+          <p:nvPr/>
+        </p:nvPicPr>
+        <p:blipFill>
+          <a:blip r:embed="rId4"/>
+          <a:stretch>
+            <a:fillRect/>
+          </a:stretch>
+        </p:blipFill>
+        <p:spPr>
+          <a:xfrm>
+            <a:off x="5739232" y="2249424"/>
+            <a:ext cx="713232" cy="713232"/>
+          </a:xfrm>
+          <a:prstGeom prst="rect">
+            <a:avLst/>
+          </a:prstGeom>
+        </p:spPr>
+      </p:pic>
+      <p:sp>
+        <p:nvSpPr>
+          <p:cNvPr id="10" name="Text 6"/>
+          <p:cNvSpPr txBox="1"/>
+          <p:nvPr/>
+        </p:nvSpPr>
+        <p:spPr>
+          <a:xfrm>
+            <a:off x="4643018" y="3520440"/>
+            <a:ext cx="2905658" cy="1143000"/>
+          </a:xfrm>
+          <a:prstGeom prst="rect">
+            <a:avLst/>
+          </a:prstGeom>
+          <a:noFill/>
+          <a:ln/>
+        </p:spPr>
+        <p:txBody>
+          <a:bodyPr wrap="square" lIns="0" tIns="0" rIns="0" bIns="0" rtlCol="0" anchor="t"/>
+          <a:lstStyle/>
+          <a:p>
+            <a:pPr marL="0" indent="0" algn="ctr">
+              <a:buNone/>
+            </a:pPr>
+            <a:r>
+              <a:rPr lang="en-US" sz="2400" b="1" dirty="0">
+                <a:solidFill>
+                  <a:schemeClr val="tx1"/>
+                </a:solidFill>
+              </a:rPr>
+              <a:t>Documento del proyecto</a:t>
+            </a:r>
+            <a:endParaRPr lang="en-US" sz="2400" dirty="0"/>
+          </a:p>
+          <a:p>
+            <a:pPr marL="0" indent="0" algn="ctr">
+              <a:buNone/>
+            </a:pPr>
+            <a:r>
+              <a:rPr lang="en-US" sz="1700" dirty="0">
+                <a:solidFill>
+                  <a:schemeClr val="tx2"/>
+                </a:solidFill>
+              </a:rPr>
+              <a:t>Bloque 4</a:t>
+            </a:r>
+            <a:endParaRPr lang="en-US" sz="2400" dirty="0"/>
+          </a:p>
+        </p:txBody>
+      </p:sp>
+      <p:sp>
+        <p:nvSpPr>
+          <p:cNvPr id="11" name="Tarjeta"/>
+          <p:cNvSpPr/>
+          <p:nvPr/>
+        </p:nvSpPr>
+        <p:spPr>
+          <a:xfrm>
+            <a:off x="8188757" y="1554480"/>
+            <a:ext cx="3454298" cy="3291840"/>
+          </a:xfrm>
+          <a:prstGeom prst="roundRect">
+            <a:avLst>
+              <a:gd name="adj" fmla="val 4167"/>
+            </a:avLst>
+          </a:prstGeom>
+          <a:solidFill>
+            <a:schemeClr val="bg2"/>
+          </a:solidFill>
+          <a:ln/>
+        </p:spPr>
+      </p:sp>
+      <p:sp>
+        <p:nvSpPr>
+          <p:cNvPr id="12" name="Presentación"/>
+          <p:cNvSpPr/>
+          <p:nvPr/>
+        </p:nvSpPr>
+        <p:spPr>
+          <a:xfrm>
+            <a:off x="9230106" y="1920240"/>
+            <a:ext cx="1371600" cy="1371600"/>
+          </a:xfrm>
+          <a:prstGeom prst="ellipse">
+            <a:avLst/>
+          </a:prstGeom>
+          <a:solidFill>
+            <a:schemeClr val="accent1"/>
+          </a:solidFill>
+          <a:ln/>
+        </p:spPr>
+      </p:sp>
+      <p:pic>
+        <p:nvPicPr>
+          <p:cNvPr id="13" name="Image 2" descr="Presentación"/>
+          <p:cNvPicPr>
+            <a:picLocks noChangeAspect="1"/>
+          </p:cNvPicPr>
+          <p:nvPr/>
+        </p:nvPicPr>
+        <p:blipFill>
+          <a:blip r:embed="rId5"/>
+          <a:stretch>
+            <a:fillRect/>
+          </a:stretch>
+        </p:blipFill>
+        <p:spPr>
+          <a:xfrm>
             <a:off x="9559290" y="2249424"/>
             <a:ext cx="713232" cy="713232"/>
           </a:xfrm>
@@ -4730,7 +4526,7 @@
           <a:bodyPr wrap="square" lIns="0" tIns="0" rIns="0" bIns="0" rtlCol="0" anchor="t"/>
           <a:lstStyle/>
           <a:p>
-            <a:pPr algn="ctr" indent="0" marL="0">
+            <a:pPr marL="0" indent="0" algn="ctr">
               <a:buNone/>
             </a:pPr>
             <a:r>
@@ -4744,7 +4540,7 @@
             <a:endParaRPr lang="en-US" sz="2400" dirty="0"/>
           </a:p>
           <a:p>
-            <a:pPr algn="ctr" indent="0" marL="0">
+            <a:pPr marL="0" indent="0" algn="ctr">
               <a:buNone/>
             </a:pPr>
             <a:r>
@@ -4780,7 +4576,7 @@
           <a:bodyPr wrap="square" lIns="0" tIns="0" rIns="0" bIns="0" rtlCol="0" anchor="ctr"/>
           <a:lstStyle/>
           <a:p>
-            <a:pPr indent="0" marL="0">
+            <a:pPr marL="0" indent="0">
               <a:buNone/>
             </a:pPr>
             <a:r>
@@ -4815,7 +4611,7 @@
           </a:prstGeom>
           <a:extLst>
             <a:ext uri="{C572A759-6A51-4108-AA02-DFA0A04FC94B}">
-              <ma14:wrappingTextBoxFlag xmlns:ma14="http://schemas.microsoft.com/office/mac/drawingml/2011/main" val="0"/>
+              <ma14:wrappingTextBoxFlag xmlns:ma14="http://schemas.microsoft.com/office/mac/drawingml/2011/main" xmlns="" val="0"/>
             </a:ext>
           </a:extLst>
         </p:spPr>
@@ -4833,7 +4629,7 @@
           <a:p>
             <a:pPr algn="r"/>
             <a:fld id="{F7021451-1387-4CA6-816F-3879F97B5CBC}" type="slidenum">
-              <a:rPr b="0" lang="en-US"/>
+              <a:rPr lang="en-US" b="0"/>
               <a:t>13</a:t>
             </a:fld>
             <a:endParaRPr lang="en-US"/>
@@ -4868,9 +4664,11 @@
       <p:sp>
         <p:nvSpPr>
           <p:cNvPr id="2" name="Text 0"/>
-          <p:cNvSpPr/>
+          <p:cNvSpPr>
+            <a:spLocks noGrp="1"/>
+          </p:cNvSpPr>
           <p:nvPr>
-            <p:ph idx="100" type="title" hasCustomPrompt="1"/>
+            <p:ph type="title" idx="100" hasCustomPrompt="1"/>
           </p:nvPr>
         </p:nvSpPr>
         <p:spPr>
@@ -4888,7 +4686,7 @@
           <a:bodyPr wrap="square" lIns="0" tIns="0" rIns="0" bIns="0" rtlCol="0" anchor="ctr"/>
           <a:lstStyle/>
           <a:p>
-            <a:pPr algn="l" indent="0" marL="0">
+            <a:pPr marL="0" indent="0" algn="l">
               <a:buNone/>
             </a:pPr>
             <a:r>
@@ -4967,7 +4765,7 @@
           <a:bodyPr wrap="square" lIns="0" tIns="0" rIns="0" bIns="0" rtlCol="0" anchor="ctr"/>
           <a:lstStyle/>
           <a:p>
-            <a:pPr algn="ctr" indent="0" marL="0">
+            <a:pPr marL="0" indent="0" algn="ctr">
               <a:buNone/>
             </a:pPr>
             <a:r>
@@ -5003,7 +4801,7 @@
           <a:bodyPr wrap="square" lIns="0" tIns="0" rIns="0" bIns="0" rtlCol="0" anchor="t"/>
           <a:lstStyle/>
           <a:p>
-            <a:pPr algn="ctr" indent="0" marL="0">
+            <a:pPr marL="0" indent="0" algn="ctr">
               <a:buNone/>
             </a:pPr>
             <a:r>
@@ -5059,7 +4857,7 @@
           <a:bodyPr wrap="square" lIns="0" tIns="0" rIns="0" bIns="0" rtlCol="0" anchor="ctr"/>
           <a:lstStyle/>
           <a:p>
-            <a:pPr algn="ctr" indent="0" marL="0">
+            <a:pPr marL="0" indent="0" algn="ctr">
               <a:buNone/>
             </a:pPr>
             <a:r>
@@ -5095,7 +4893,7 @@
           <a:bodyPr wrap="square" lIns="0" tIns="0" rIns="0" bIns="0" rtlCol="0" anchor="t"/>
           <a:lstStyle/>
           <a:p>
-            <a:pPr algn="ctr" indent="0" marL="0">
+            <a:pPr marL="0" indent="0" algn="ctr">
               <a:buNone/>
             </a:pPr>
             <a:r>
@@ -5151,7 +4949,7 @@
           <a:bodyPr wrap="square" lIns="0" tIns="0" rIns="0" bIns="0" rtlCol="0" anchor="ctr"/>
           <a:lstStyle/>
           <a:p>
-            <a:pPr algn="ctr" indent="0" marL="0">
+            <a:pPr marL="0" indent="0" algn="ctr">
               <a:buNone/>
             </a:pPr>
             <a:r>
@@ -5187,7 +4985,7 @@
           <a:bodyPr wrap="square" lIns="0" tIns="0" rIns="0" bIns="0" rtlCol="0" anchor="t"/>
           <a:lstStyle/>
           <a:p>
-            <a:pPr algn="ctr" indent="0" marL="0">
+            <a:pPr marL="0" indent="0" algn="ctr">
               <a:buNone/>
             </a:pPr>
             <a:r>
@@ -5243,7 +5041,7 @@
           <a:bodyPr wrap="square" lIns="0" tIns="0" rIns="0" bIns="0" rtlCol="0" anchor="ctr"/>
           <a:lstStyle/>
           <a:p>
-            <a:pPr algn="ctr" indent="0" marL="0">
+            <a:pPr marL="0" indent="0" algn="ctr">
               <a:buNone/>
             </a:pPr>
             <a:r>
@@ -5279,7 +5077,7 @@
           <a:bodyPr wrap="square" lIns="0" tIns="0" rIns="0" bIns="0" rtlCol="0" anchor="t"/>
           <a:lstStyle/>
           <a:p>
-            <a:pPr algn="ctr" indent="0" marL="0">
+            <a:pPr marL="0" indent="0" algn="ctr">
               <a:buNone/>
             </a:pPr>
             <a:r>
@@ -5335,7 +5133,7 @@
           <a:bodyPr wrap="square" lIns="0" tIns="0" rIns="0" bIns="0" rtlCol="0" anchor="ctr"/>
           <a:lstStyle/>
           <a:p>
-            <a:pPr algn="ctr" indent="0" marL="0">
+            <a:pPr marL="0" indent="0" algn="ctr">
               <a:buNone/>
             </a:pPr>
             <a:r>
@@ -5371,7 +5169,7 @@
           <a:bodyPr wrap="square" lIns="0" tIns="0" rIns="0" bIns="0" rtlCol="0" anchor="t"/>
           <a:lstStyle/>
           <a:p>
-            <a:pPr algn="ctr" indent="0" marL="0">
+            <a:pPr marL="0" indent="0" algn="ctr">
               <a:buNone/>
             </a:pPr>
             <a:r>
@@ -5429,7 +5227,7 @@
           <a:bodyPr wrap="square" lIns="0" tIns="0" rIns="0" bIns="0" rtlCol="0" anchor="ctr"/>
           <a:lstStyle/>
           <a:p>
-            <a:pPr indent="0" marL="0">
+            <a:pPr marL="0" indent="0">
               <a:buNone/>
             </a:pPr>
             <a:r>
@@ -5440,9 +5238,6 @@
               </a:rPr>
               <a:t>Sin caso nuevo: </a:t>
             </a:r>
-            <a:pPr indent="0" marL="0">
-              <a:buNone/>
-            </a:pPr>
             <a:r>
               <a:rPr lang="en-US" sz="2000" dirty="0">
                 <a:solidFill>
@@ -5475,7 +5270,7 @@
           </a:prstGeom>
           <a:extLst>
             <a:ext uri="{C572A759-6A51-4108-AA02-DFA0A04FC94B}">
-              <ma14:wrappingTextBoxFlag xmlns:ma14="http://schemas.microsoft.com/office/mac/drawingml/2011/main" val="0"/>
+              <ma14:wrappingTextBoxFlag xmlns:ma14="http://schemas.microsoft.com/office/mac/drawingml/2011/main" xmlns="" val="0"/>
             </a:ext>
           </a:extLst>
         </p:spPr>
@@ -5493,7 +5288,7 @@
           <a:p>
             <a:pPr algn="r"/>
             <a:fld id="{F7021451-1387-4CA6-816F-3879F97B5CBC}" type="slidenum">
-              <a:rPr b="0" lang="en-US"/>
+              <a:rPr lang="en-US" b="0"/>
               <a:t>2</a:t>
             </a:fld>
             <a:endParaRPr lang="en-US"/>
@@ -5528,9 +5323,11 @@
       <p:sp>
         <p:nvSpPr>
           <p:cNvPr id="2" name="Text 0"/>
-          <p:cNvSpPr/>
+          <p:cNvSpPr>
+            <a:spLocks noGrp="1"/>
+          </p:cNvSpPr>
           <p:nvPr>
-            <p:ph idx="100" type="title" hasCustomPrompt="1"/>
+            <p:ph type="title" idx="100" hasCustomPrompt="1"/>
           </p:nvPr>
         </p:nvSpPr>
         <p:spPr>
@@ -5548,7 +5345,7 @@
           <a:bodyPr wrap="square" lIns="0" tIns="0" rIns="0" bIns="0" rtlCol="0" anchor="ctr"/>
           <a:lstStyle/>
           <a:p>
-            <a:pPr algn="l" indent="0" marL="0">
+            <a:pPr marL="0" indent="0" algn="l">
               <a:buNone/>
             </a:pPr>
             <a:r>
@@ -5606,7 +5403,7 @@
           <a:bodyPr wrap="square" lIns="0" tIns="0" rIns="0" bIns="0" rtlCol="0" anchor="ctr"/>
           <a:lstStyle/>
           <a:p>
-            <a:pPr algn="ctr" indent="0" marL="0">
+            <a:pPr marL="0" indent="0" algn="ctr">
               <a:buNone/>
             </a:pPr>
             <a:r>
@@ -5642,7 +5439,7 @@
           <a:bodyPr wrap="square" lIns="0" tIns="0" rIns="0" bIns="0" rtlCol="0" anchor="ctr"/>
           <a:lstStyle/>
           <a:p>
-            <a:pPr indent="0" marL="0">
+            <a:pPr marL="0" indent="0">
               <a:buNone/>
             </a:pPr>
             <a:r>
@@ -5701,14 +5498,14 @@
       </p:sp>
       <p:pic>
         <p:nvPicPr>
-          <p:cNvPr id="8" name="Image 0" descr="Paso 1">    </p:cNvPr>
+          <p:cNvPr id="8" name="Image 0" descr="Paso 1"/>
           <p:cNvPicPr>
             <a:picLocks noChangeAspect="1"/>
           </p:cNvPicPr>
           <p:nvPr/>
         </p:nvPicPr>
         <p:blipFill>
-          <a:blip r:embed="rId1"/>
+          <a:blip r:embed="rId3"/>
           <a:stretch>
             <a:fillRect/>
           </a:stretch>
@@ -5744,7 +5541,7 @@
           <a:bodyPr wrap="square" lIns="0" tIns="0" rIns="0" bIns="0" rtlCol="0" anchor="ctr"/>
           <a:lstStyle/>
           <a:p>
-            <a:pPr indent="0" marL="0">
+            <a:pPr marL="0" indent="0">
               <a:buNone/>
             </a:pPr>
             <a:r>
@@ -5827,14 +5624,14 @@
       </p:sp>
       <p:pic>
         <p:nvPicPr>
-          <p:cNvPr id="13" name="Image 1" descr="Paso 2">    </p:cNvPr>
+          <p:cNvPr id="13" name="Image 1" descr="Paso 2"/>
           <p:cNvPicPr>
             <a:picLocks noChangeAspect="1"/>
           </p:cNvPicPr>
           <p:nvPr/>
         </p:nvPicPr>
         <p:blipFill>
-          <a:blip r:embed="rId2"/>
+          <a:blip r:embed="rId4"/>
           <a:stretch>
             <a:fillRect/>
           </a:stretch>
@@ -5870,7 +5667,7 @@
           <a:bodyPr wrap="square" lIns="0" tIns="0" rIns="0" bIns="0" rtlCol="0" anchor="ctr"/>
           <a:lstStyle/>
           <a:p>
-            <a:pPr indent="0" marL="0">
+            <a:pPr marL="0" indent="0">
               <a:buNone/>
             </a:pPr>
             <a:r>
@@ -5879,7 +5676,39 @@
                   <a:schemeClr val="tx1"/>
                 </a:solidFill>
               </a:rPr>
-              <a:t>La pareja B le hace dos preguntas difíciles.</a:t>
+              <a:t>La pareja B le </a:t>
+            </a:r>
+            <a:r>
+              <a:rPr lang="en-US" sz="1800" dirty="0" err="1">
+                <a:solidFill>
+                  <a:schemeClr val="tx1"/>
+                </a:solidFill>
+              </a:rPr>
+              <a:t>hace</a:t>
+            </a:r>
+            <a:r>
+              <a:rPr lang="en-US" sz="1800" dirty="0">
+                <a:solidFill>
+                  <a:schemeClr val="tx1"/>
+                </a:solidFill>
+              </a:rPr>
+              <a:t> </a:t>
+            </a:r>
+            <a:r>
+              <a:rPr lang="en-US" sz="1800" dirty="0" err="1">
+                <a:solidFill>
+                  <a:schemeClr val="tx1"/>
+                </a:solidFill>
+              </a:rPr>
+              <a:t>varias</a:t>
+            </a:r>
+            <a:r>
+              <a:rPr lang="en-US" sz="1800" dirty="0">
+                <a:solidFill>
+                  <a:schemeClr val="tx1"/>
+                </a:solidFill>
+              </a:rPr>
+              <a:t> preguntas difíciles.</a:t>
             </a:r>
             <a:endParaRPr lang="en-US" sz="1800" dirty="0"/>
           </a:p>
@@ -5953,247 +5782,7 @@
       </p:sp>
       <p:pic>
         <p:nvPicPr>
-          <p:cNvPr id="18" name="Image 2" descr="Paso 3">    </p:cNvPr>
-          <p:cNvPicPr>
-            <a:picLocks noChangeAspect="1"/>
-          </p:cNvPicPr>
-          <p:nvPr/>
-        </p:nvPicPr>
-        <p:blipFill>
-          <a:blip r:embed="rId3"/>
-          <a:stretch>
-            <a:fillRect/>
-          </a:stretch>
-        </p:blipFill>
-        <p:spPr>
-          <a:xfrm>
-            <a:off x="8741054" y="2335378"/>
-            <a:ext cx="404165" cy="404165"/>
-          </a:xfrm>
-          <a:prstGeom prst="rect">
-            <a:avLst/>
-          </a:prstGeom>
-        </p:spPr>
-      </p:pic>
-      <p:sp>
-        <p:nvSpPr>
-          <p:cNvPr id="19" name="Text 14"/>
-          <p:cNvSpPr txBox="1"/>
-          <p:nvPr/>
-        </p:nvSpPr>
-        <p:spPr>
-          <a:xfrm>
-            <a:off x="9514637" y="1920240"/>
-            <a:ext cx="1945538" cy="1828800"/>
-          </a:xfrm>
-          <a:prstGeom prst="rect">
-            <a:avLst/>
-          </a:prstGeom>
-          <a:noFill/>
-          <a:ln/>
-        </p:spPr>
-        <p:txBody>
-          <a:bodyPr wrap="square" lIns="0" tIns="0" rIns="0" bIns="0" rtlCol="0" anchor="ctr"/>
-          <a:lstStyle/>
-          <a:p>
-            <a:pPr indent="0" marL="0">
-              <a:buNone/>
-            </a:pPr>
-            <a:r>
-              <a:rPr lang="en-US" sz="1800" dirty="0">
-                <a:solidFill>
-                  <a:schemeClr val="tx1"/>
-                </a:solidFill>
-              </a:rPr>
-              <a:t>Os cambiáis los papeles.</a:t>
-            </a:r>
-            <a:endParaRPr lang="en-US" sz="1800" dirty="0"/>
-          </a:p>
-        </p:txBody>
-      </p:sp>
-      <p:sp>
-        <p:nvSpPr>
-          <p:cNvPr id="20" name="Text 15"/>
-          <p:cNvSpPr txBox="1"/>
-          <p:nvPr/>
-        </p:nvSpPr>
-        <p:spPr>
-          <a:xfrm>
-            <a:off x="548640" y="4023360"/>
-            <a:ext cx="11094415" cy="411480"/>
-          </a:xfrm>
-          <a:prstGeom prst="rect">
-            <a:avLst/>
-          </a:prstGeom>
-          <a:noFill/>
-          <a:ln/>
-        </p:spPr>
-        <p:txBody>
-          <a:bodyPr wrap="square" lIns="0" tIns="0" rIns="0" bIns="0" rtlCol="0" anchor="ctr"/>
-          <a:lstStyle/>
-          <a:p>
-            <a:pPr indent="0" marL="0">
-              <a:buNone/>
-            </a:pPr>
-            <a:r>
-              <a:rPr lang="en-US" sz="1800" b="1" dirty="0">
-                <a:solidFill>
-                  <a:schemeClr val="tx1"/>
-                </a:solidFill>
-              </a:rPr>
-              <a:t>Preguntas difíciles, por ejemplo:</a:t>
-            </a:r>
-            <a:endParaRPr lang="en-US" sz="1800" dirty="0"/>
-          </a:p>
-        </p:txBody>
-      </p:sp>
-      <p:sp>
-        <p:nvSpPr>
-          <p:cNvPr id="21" name="¿Cuánto cuesta?"/>
-          <p:cNvSpPr/>
-          <p:nvPr/>
-        </p:nvSpPr>
-        <p:spPr>
-          <a:xfrm>
-            <a:off x="548640" y="4572000"/>
-            <a:ext cx="2567864" cy="868680"/>
-          </a:xfrm>
-          <a:prstGeom prst="roundRect">
-            <a:avLst>
-              <a:gd name="adj" fmla="val 49474"/>
-            </a:avLst>
-          </a:prstGeom>
-          <a:solidFill>
-            <a:schemeClr val="tx1"/>
-          </a:solidFill>
-          <a:ln/>
-        </p:spPr>
-      </p:sp>
-      <p:sp>
-        <p:nvSpPr>
-          <p:cNvPr id="22" name="¿Cuánto cuesta?"/>
-          <p:cNvSpPr/>
-          <p:nvPr/>
-        </p:nvSpPr>
-        <p:spPr>
-          <a:xfrm>
-            <a:off x="685800" y="4681728"/>
-            <a:ext cx="640080" cy="640080"/>
-          </a:xfrm>
-          <a:prstGeom prst="ellipse">
-            <a:avLst/>
-          </a:prstGeom>
-          <a:solidFill>
-            <a:schemeClr val="accent3"/>
-          </a:solidFill>
-          <a:ln/>
-        </p:spPr>
-      </p:sp>
-      <p:pic>
-        <p:nvPicPr>
-          <p:cNvPr id="23" name="Image 3" descr="¿Cuánto cuesta?">    </p:cNvPr>
-          <p:cNvPicPr>
-            <a:picLocks noChangeAspect="1"/>
-          </p:cNvPicPr>
-          <p:nvPr/>
-        </p:nvPicPr>
-        <p:blipFill>
-          <a:blip r:embed="rId4"/>
-          <a:stretch>
-            <a:fillRect/>
-          </a:stretch>
-        </p:blipFill>
-        <p:spPr>
-          <a:xfrm>
-            <a:off x="839419" y="4835347"/>
-            <a:ext cx="332842" cy="332842"/>
-          </a:xfrm>
-          <a:prstGeom prst="rect">
-            <a:avLst/>
-          </a:prstGeom>
-        </p:spPr>
-      </p:pic>
-      <p:sp>
-        <p:nvSpPr>
-          <p:cNvPr id="24" name="Text 18"/>
-          <p:cNvSpPr txBox="1"/>
-          <p:nvPr/>
-        </p:nvSpPr>
-        <p:spPr>
-          <a:xfrm>
-            <a:off x="1463040" y="4572000"/>
-            <a:ext cx="1516304" cy="868680"/>
-          </a:xfrm>
-          <a:prstGeom prst="rect">
-            <a:avLst/>
-          </a:prstGeom>
-          <a:noFill/>
-          <a:ln/>
-        </p:spPr>
-        <p:txBody>
-          <a:bodyPr wrap="square" lIns="0" tIns="0" rIns="0" bIns="0" rtlCol="0" anchor="ctr"/>
-          <a:lstStyle/>
-          <a:p>
-            <a:pPr indent="0" marL="0">
-              <a:buNone/>
-            </a:pPr>
-            <a:r>
-              <a:rPr lang="en-US" sz="1600" b="1" dirty="0">
-                <a:solidFill>
-                  <a:schemeClr val="bg1"/>
-                </a:solidFill>
-              </a:rPr>
-              <a:t>¿Cuánto cuesta?</a:t>
-            </a:r>
-            <a:endParaRPr lang="en-US" sz="1600" dirty="0"/>
-          </a:p>
-        </p:txBody>
-      </p:sp>
-      <p:sp>
-        <p:nvSpPr>
-          <p:cNvPr id="25" name="¿Quién se encarga?"/>
-          <p:cNvSpPr/>
-          <p:nvPr/>
-        </p:nvSpPr>
-        <p:spPr>
-          <a:xfrm>
-            <a:off x="3390824" y="4572000"/>
-            <a:ext cx="2567864" cy="868680"/>
-          </a:xfrm>
-          <a:prstGeom prst="roundRect">
-            <a:avLst>
-              <a:gd name="adj" fmla="val 49474"/>
-            </a:avLst>
-          </a:prstGeom>
-          <a:solidFill>
-            <a:schemeClr val="tx1"/>
-          </a:solidFill>
-          <a:ln/>
-        </p:spPr>
-      </p:sp>
-      <p:sp>
-        <p:nvSpPr>
-          <p:cNvPr id="26" name="¿Quién se encarga?"/>
-          <p:cNvSpPr/>
-          <p:nvPr/>
-        </p:nvSpPr>
-        <p:spPr>
-          <a:xfrm>
-            <a:off x="3527984" y="4681728"/>
-            <a:ext cx="640080" cy="640080"/>
-          </a:xfrm>
-          <a:prstGeom prst="ellipse">
-            <a:avLst/>
-          </a:prstGeom>
-          <a:solidFill>
-            <a:schemeClr val="accent3"/>
-          </a:solidFill>
-          <a:ln/>
-        </p:spPr>
-      </p:sp>
-      <p:pic>
-        <p:nvPicPr>
-          <p:cNvPr id="27" name="Image 4" descr="¿Quién se encarga?">    </p:cNvPr>
+          <p:cNvPr id="18" name="Image 2" descr="Paso 3"/>
           <p:cNvPicPr>
             <a:picLocks noChangeAspect="1"/>
           </p:cNvPicPr>
@@ -6207,8 +5796,8 @@
         </p:blipFill>
         <p:spPr>
           <a:xfrm>
-            <a:off x="3681603" y="4835347"/>
-            <a:ext cx="332842" cy="332842"/>
+            <a:off x="8741054" y="2335378"/>
+            <a:ext cx="404165" cy="404165"/>
           </a:xfrm>
           <a:prstGeom prst="rect">
             <a:avLst/>
@@ -6217,14 +5806,14 @@
       </p:pic>
       <p:sp>
         <p:nvSpPr>
-          <p:cNvPr id="28" name="Text 21"/>
+          <p:cNvPr id="19" name="Text 14"/>
           <p:cNvSpPr txBox="1"/>
           <p:nvPr/>
         </p:nvSpPr>
         <p:spPr>
           <a:xfrm>
-            <a:off x="4305224" y="4572000"/>
-            <a:ext cx="1516304" cy="868680"/>
+            <a:off x="9514637" y="1920240"/>
+            <a:ext cx="1945538" cy="1828800"/>
           </a:xfrm>
           <a:prstGeom prst="rect">
             <a:avLst/>
@@ -6236,30 +5825,66 @@
           <a:bodyPr wrap="square" lIns="0" tIns="0" rIns="0" bIns="0" rtlCol="0" anchor="ctr"/>
           <a:lstStyle/>
           <a:p>
-            <a:pPr indent="0" marL="0">
-              <a:buNone/>
-            </a:pPr>
-            <a:r>
-              <a:rPr lang="en-US" sz="1600" b="1" dirty="0">
-                <a:solidFill>
-                  <a:schemeClr val="bg1"/>
-                </a:solidFill>
-              </a:rPr>
-              <a:t>¿Quién se encarga?</a:t>
-            </a:r>
-            <a:endParaRPr lang="en-US" sz="1600" dirty="0"/>
-          </a:p>
-        </p:txBody>
-      </p:sp>
-      <p:sp>
-        <p:nvSpPr>
-          <p:cNvPr id="29" name="¿Y si alguien no lo usa?"/>
+            <a:pPr marL="0" indent="0">
+              <a:buNone/>
+            </a:pPr>
+            <a:r>
+              <a:rPr lang="en-US" sz="1800" dirty="0">
+                <a:solidFill>
+                  <a:schemeClr val="tx1"/>
+                </a:solidFill>
+              </a:rPr>
+              <a:t>Os cambiáis los papeles.</a:t>
+            </a:r>
+            <a:endParaRPr lang="en-US" sz="1800" dirty="0"/>
+          </a:p>
+        </p:txBody>
+      </p:sp>
+      <p:sp>
+        <p:nvSpPr>
+          <p:cNvPr id="20" name="Text 15"/>
+          <p:cNvSpPr txBox="1"/>
+          <p:nvPr/>
+        </p:nvSpPr>
+        <p:spPr>
+          <a:xfrm>
+            <a:off x="548640" y="4023360"/>
+            <a:ext cx="11094415" cy="411480"/>
+          </a:xfrm>
+          <a:prstGeom prst="rect">
+            <a:avLst/>
+          </a:prstGeom>
+          <a:noFill/>
+          <a:ln/>
+        </p:spPr>
+        <p:txBody>
+          <a:bodyPr wrap="square" lIns="0" tIns="0" rIns="0" bIns="0" rtlCol="0" anchor="ctr"/>
+          <a:lstStyle/>
+          <a:p>
+            <a:pPr marL="0" indent="0">
+              <a:buNone/>
+            </a:pPr>
+            <a:r>
+              <a:rPr lang="en-US" sz="1800" b="1" dirty="0">
+                <a:solidFill>
+                  <a:schemeClr val="tx1"/>
+                </a:solidFill>
+              </a:rPr>
+              <a:t>Preguntas difíciles, por ejemplo:</a:t>
+            </a:r>
+            <a:endParaRPr lang="en-US" sz="1800" dirty="0"/>
+          </a:p>
+        </p:txBody>
+      </p:sp>
+      <p:sp>
+        <p:nvSpPr>
+          <p:cNvPr id="21" name="¿Cuánto cuesta?"/>
           <p:cNvSpPr/>
           <p:nvPr/>
         </p:nvSpPr>
         <p:spPr>
           <a:xfrm>
-            <a:off x="6233008" y="4572000"/>
+            <a:off x="548640" y="4572000"/>
             <a:ext cx="2567864" cy="868680"/>
           </a:xfrm>
           <a:prstGeom prst="roundRect">
@@ -6275,13 +5900,13 @@
       </p:sp>
       <p:sp>
         <p:nvSpPr>
-          <p:cNvPr id="30" name="¿Y si alguien no lo usa?"/>
+          <p:cNvPr id="22" name="¿Cuánto cuesta?"/>
           <p:cNvSpPr/>
           <p:nvPr/>
         </p:nvSpPr>
         <p:spPr>
           <a:xfrm>
-            <a:off x="6370168" y="4681728"/>
+            <a:off x="685800" y="4681728"/>
             <a:ext cx="640080" cy="640080"/>
           </a:xfrm>
           <a:prstGeom prst="ellipse">
@@ -6295,7 +5920,7 @@
       </p:sp>
       <p:pic>
         <p:nvPicPr>
-          <p:cNvPr id="31" name="Image 5" descr="¿Y si alguien no lo usa?">    </p:cNvPr>
+          <p:cNvPr id="23" name="Image 3" descr="¿Cuánto cuesta?"/>
           <p:cNvPicPr>
             <a:picLocks noChangeAspect="1"/>
           </p:cNvPicPr>
@@ -6309,7 +5934,7 @@
         </p:blipFill>
         <p:spPr>
           <a:xfrm>
-            <a:off x="6523787" y="4835347"/>
+            <a:off x="839419" y="4835347"/>
             <a:ext cx="332842" cy="332842"/>
           </a:xfrm>
           <a:prstGeom prst="rect">
@@ -6319,13 +5944,13 @@
       </p:pic>
       <p:sp>
         <p:nvSpPr>
-          <p:cNvPr id="32" name="Text 24"/>
+          <p:cNvPr id="24" name="Text 18"/>
           <p:cNvSpPr txBox="1"/>
           <p:nvPr/>
         </p:nvSpPr>
         <p:spPr>
           <a:xfrm>
-            <a:off x="7147408" y="4572000"/>
+            <a:off x="1463040" y="4572000"/>
             <a:ext cx="1516304" cy="868680"/>
           </a:xfrm>
           <a:prstGeom prst="rect">
@@ -6338,7 +5963,7 @@
           <a:bodyPr wrap="square" lIns="0" tIns="0" rIns="0" bIns="0" rtlCol="0" anchor="ctr"/>
           <a:lstStyle/>
           <a:p>
-            <a:pPr indent="0" marL="0">
+            <a:pPr marL="0" indent="0">
               <a:buNone/>
             </a:pPr>
             <a:r>
@@ -6347,7 +5972,7 @@
                   <a:schemeClr val="bg1"/>
                 </a:solidFill>
               </a:rPr>
-              <a:t>¿Y si alguien no lo usa?</a:t>
+              <a:t>¿Cuánto cuesta?</a:t>
             </a:r>
             <a:endParaRPr lang="en-US" sz="1600" dirty="0"/>
           </a:p>
@@ -6355,13 +5980,13 @@
       </p:sp>
       <p:sp>
         <p:nvSpPr>
-          <p:cNvPr id="33" name="¿Cómo sabremos si funciona?"/>
+          <p:cNvPr id="25" name="¿Quién se encarga?"/>
           <p:cNvSpPr/>
           <p:nvPr/>
         </p:nvSpPr>
         <p:spPr>
           <a:xfrm>
-            <a:off x="9075191" y="4572000"/>
+            <a:off x="3390824" y="4572000"/>
             <a:ext cx="2567864" cy="868680"/>
           </a:xfrm>
           <a:prstGeom prst="roundRect">
@@ -6377,13 +6002,13 @@
       </p:sp>
       <p:sp>
         <p:nvSpPr>
-          <p:cNvPr id="34" name="¿Cómo sabremos si funciona?"/>
+          <p:cNvPr id="26" name="¿Quién se encarga?"/>
           <p:cNvSpPr/>
           <p:nvPr/>
         </p:nvSpPr>
         <p:spPr>
           <a:xfrm>
-            <a:off x="9212351" y="4681728"/>
+            <a:off x="3527984" y="4681728"/>
             <a:ext cx="640080" cy="640080"/>
           </a:xfrm>
           <a:prstGeom prst="ellipse">
@@ -6397,7 +6022,7 @@
       </p:sp>
       <p:pic>
         <p:nvPicPr>
-          <p:cNvPr id="35" name="Image 6" descr="¿Cómo sabremos si funciona?">    </p:cNvPr>
+          <p:cNvPr id="27" name="Image 4" descr="¿Quién se encarga?"/>
           <p:cNvPicPr>
             <a:picLocks noChangeAspect="1"/>
           </p:cNvPicPr>
@@ -6411,6 +6036,210 @@
         </p:blipFill>
         <p:spPr>
           <a:xfrm>
+            <a:off x="3681603" y="4835347"/>
+            <a:ext cx="332842" cy="332842"/>
+          </a:xfrm>
+          <a:prstGeom prst="rect">
+            <a:avLst/>
+          </a:prstGeom>
+        </p:spPr>
+      </p:pic>
+      <p:sp>
+        <p:nvSpPr>
+          <p:cNvPr id="28" name="Text 21"/>
+          <p:cNvSpPr txBox="1"/>
+          <p:nvPr/>
+        </p:nvSpPr>
+        <p:spPr>
+          <a:xfrm>
+            <a:off x="4305224" y="4572000"/>
+            <a:ext cx="1516304" cy="868680"/>
+          </a:xfrm>
+          <a:prstGeom prst="rect">
+            <a:avLst/>
+          </a:prstGeom>
+          <a:noFill/>
+          <a:ln/>
+        </p:spPr>
+        <p:txBody>
+          <a:bodyPr wrap="square" lIns="0" tIns="0" rIns="0" bIns="0" rtlCol="0" anchor="ctr"/>
+          <a:lstStyle/>
+          <a:p>
+            <a:pPr marL="0" indent="0">
+              <a:buNone/>
+            </a:pPr>
+            <a:r>
+              <a:rPr lang="en-US" sz="1600" b="1" dirty="0">
+                <a:solidFill>
+                  <a:schemeClr val="bg1"/>
+                </a:solidFill>
+              </a:rPr>
+              <a:t>¿Quién se encarga?</a:t>
+            </a:r>
+            <a:endParaRPr lang="en-US" sz="1600" dirty="0"/>
+          </a:p>
+        </p:txBody>
+      </p:sp>
+      <p:sp>
+        <p:nvSpPr>
+          <p:cNvPr id="29" name="¿Y si alguien no lo usa?"/>
+          <p:cNvSpPr/>
+          <p:nvPr/>
+        </p:nvSpPr>
+        <p:spPr>
+          <a:xfrm>
+            <a:off x="6233008" y="4572000"/>
+            <a:ext cx="2567864" cy="868680"/>
+          </a:xfrm>
+          <a:prstGeom prst="roundRect">
+            <a:avLst>
+              <a:gd name="adj" fmla="val 49474"/>
+            </a:avLst>
+          </a:prstGeom>
+          <a:solidFill>
+            <a:schemeClr val="tx1"/>
+          </a:solidFill>
+          <a:ln/>
+        </p:spPr>
+      </p:sp>
+      <p:sp>
+        <p:nvSpPr>
+          <p:cNvPr id="30" name="¿Y si alguien no lo usa?"/>
+          <p:cNvSpPr/>
+          <p:nvPr/>
+        </p:nvSpPr>
+        <p:spPr>
+          <a:xfrm>
+            <a:off x="6370168" y="4681728"/>
+            <a:ext cx="640080" cy="640080"/>
+          </a:xfrm>
+          <a:prstGeom prst="ellipse">
+            <a:avLst/>
+          </a:prstGeom>
+          <a:solidFill>
+            <a:schemeClr val="accent3"/>
+          </a:solidFill>
+          <a:ln/>
+        </p:spPr>
+      </p:sp>
+      <p:pic>
+        <p:nvPicPr>
+          <p:cNvPr id="31" name="Image 5" descr="¿Y si alguien no lo usa?"/>
+          <p:cNvPicPr>
+            <a:picLocks noChangeAspect="1"/>
+          </p:cNvPicPr>
+          <p:nvPr/>
+        </p:nvPicPr>
+        <p:blipFill>
+          <a:blip r:embed="rId8"/>
+          <a:stretch>
+            <a:fillRect/>
+          </a:stretch>
+        </p:blipFill>
+        <p:spPr>
+          <a:xfrm>
+            <a:off x="6523787" y="4835347"/>
+            <a:ext cx="332842" cy="332842"/>
+          </a:xfrm>
+          <a:prstGeom prst="rect">
+            <a:avLst/>
+          </a:prstGeom>
+        </p:spPr>
+      </p:pic>
+      <p:sp>
+        <p:nvSpPr>
+          <p:cNvPr id="32" name="Text 24"/>
+          <p:cNvSpPr txBox="1"/>
+          <p:nvPr/>
+        </p:nvSpPr>
+        <p:spPr>
+          <a:xfrm>
+            <a:off x="7147408" y="4572000"/>
+            <a:ext cx="1516304" cy="868680"/>
+          </a:xfrm>
+          <a:prstGeom prst="rect">
+            <a:avLst/>
+          </a:prstGeom>
+          <a:noFill/>
+          <a:ln/>
+        </p:spPr>
+        <p:txBody>
+          <a:bodyPr wrap="square" lIns="0" tIns="0" rIns="0" bIns="0" rtlCol="0" anchor="ctr"/>
+          <a:lstStyle/>
+          <a:p>
+            <a:pPr marL="0" indent="0">
+              <a:buNone/>
+            </a:pPr>
+            <a:r>
+              <a:rPr lang="en-US" sz="1600" b="1" dirty="0">
+                <a:solidFill>
+                  <a:schemeClr val="bg1"/>
+                </a:solidFill>
+              </a:rPr>
+              <a:t>¿Y si alguien no lo usa?</a:t>
+            </a:r>
+            <a:endParaRPr lang="en-US" sz="1600" dirty="0"/>
+          </a:p>
+        </p:txBody>
+      </p:sp>
+      <p:sp>
+        <p:nvSpPr>
+          <p:cNvPr id="33" name="¿Cómo sabremos si funciona?"/>
+          <p:cNvSpPr/>
+          <p:nvPr/>
+        </p:nvSpPr>
+        <p:spPr>
+          <a:xfrm>
+            <a:off x="9075191" y="4572000"/>
+            <a:ext cx="2567864" cy="868680"/>
+          </a:xfrm>
+          <a:prstGeom prst="roundRect">
+            <a:avLst>
+              <a:gd name="adj" fmla="val 49474"/>
+            </a:avLst>
+          </a:prstGeom>
+          <a:solidFill>
+            <a:schemeClr val="tx1"/>
+          </a:solidFill>
+          <a:ln/>
+        </p:spPr>
+      </p:sp>
+      <p:sp>
+        <p:nvSpPr>
+          <p:cNvPr id="34" name="¿Cómo sabremos si funciona?"/>
+          <p:cNvSpPr/>
+          <p:nvPr/>
+        </p:nvSpPr>
+        <p:spPr>
+          <a:xfrm>
+            <a:off x="9212351" y="4681728"/>
+            <a:ext cx="640080" cy="640080"/>
+          </a:xfrm>
+          <a:prstGeom prst="ellipse">
+            <a:avLst/>
+          </a:prstGeom>
+          <a:solidFill>
+            <a:schemeClr val="accent3"/>
+          </a:solidFill>
+          <a:ln/>
+        </p:spPr>
+      </p:sp>
+      <p:pic>
+        <p:nvPicPr>
+          <p:cNvPr id="35" name="Image 6" descr="¿Cómo sabremos si funciona?"/>
+          <p:cNvPicPr>
+            <a:picLocks noChangeAspect="1"/>
+          </p:cNvPicPr>
+          <p:nvPr/>
+        </p:nvPicPr>
+        <p:blipFill>
+          <a:blip r:embed="rId9"/>
+          <a:stretch>
+            <a:fillRect/>
+          </a:stretch>
+        </p:blipFill>
+        <p:spPr>
+          <a:xfrm>
             <a:off x="9365971" y="4835347"/>
             <a:ext cx="332842" cy="332842"/>
           </a:xfrm>
@@ -6440,7 +6269,7 @@
           <a:bodyPr wrap="square" lIns="0" tIns="0" rIns="0" bIns="0" rtlCol="0" anchor="ctr"/>
           <a:lstStyle/>
           <a:p>
-            <a:pPr indent="0" marL="0">
+            <a:pPr marL="0" indent="0">
               <a:buNone/>
             </a:pPr>
             <a:r>
@@ -6457,7 +6286,7 @@
       </p:sp>
       <p:sp>
         <p:nvSpPr>
-          <p:cNvPr id="25" name="Slide Number Placeholder 0"/>
+          <p:cNvPr id="37" name="Slide Number Placeholder 0"/>
           <p:cNvSpPr>
             <a:spLocks noGrp="1"/>
           </p:cNvSpPr>
@@ -6475,7 +6304,7 @@
           </a:prstGeom>
           <a:extLst>
             <a:ext uri="{C572A759-6A51-4108-AA02-DFA0A04FC94B}">
-              <ma14:wrappingTextBoxFlag xmlns:ma14="http://schemas.microsoft.com/office/mac/drawingml/2011/main" val="0"/>
+              <ma14:wrappingTextBoxFlag xmlns:ma14="http://schemas.microsoft.com/office/mac/drawingml/2011/main" xmlns="" val="0"/>
             </a:ext>
           </a:extLst>
         </p:spPr>
@@ -6493,7 +6322,7 @@
           <a:p>
             <a:pPr algn="r"/>
             <a:fld id="{F7021451-1387-4CA6-816F-3879F97B5CBC}" type="slidenum">
-              <a:rPr b="0" lang="en-US"/>
+              <a:rPr lang="en-US" b="0"/>
               <a:t>3</a:t>
             </a:fld>
             <a:endParaRPr lang="en-US"/>
@@ -6528,9 +6357,11 @@
       <p:sp>
         <p:nvSpPr>
           <p:cNvPr id="2" name="Text 0"/>
-          <p:cNvSpPr/>
+          <p:cNvSpPr>
+            <a:spLocks noGrp="1"/>
+          </p:cNvSpPr>
           <p:nvPr>
-            <p:ph idx="100" type="title" hasCustomPrompt="1"/>
+            <p:ph type="title" idx="100" hasCustomPrompt="1"/>
           </p:nvPr>
         </p:nvSpPr>
         <p:spPr>
@@ -6548,7 +6379,7 @@
           <a:bodyPr wrap="square" lIns="0" tIns="0" rIns="0" bIns="0" rtlCol="0" anchor="ctr"/>
           <a:lstStyle/>
           <a:p>
-            <a:pPr algn="l" indent="0" marL="0">
+            <a:pPr marL="0" indent="0" algn="l">
               <a:buNone/>
             </a:pPr>
             <a:r>
@@ -6606,7 +6437,7 @@
           <a:bodyPr wrap="square" lIns="0" tIns="0" rIns="0" bIns="0" rtlCol="0" anchor="ctr"/>
           <a:lstStyle/>
           <a:p>
-            <a:pPr algn="ctr" indent="0" marL="0">
+            <a:pPr marL="0" indent="0" algn="ctr">
               <a:buNone/>
             </a:pPr>
             <a:r>
@@ -6642,7 +6473,7 @@
           <a:bodyPr wrap="square" lIns="0" tIns="0" rIns="0" bIns="0" rtlCol="0" anchor="ctr"/>
           <a:lstStyle/>
           <a:p>
-            <a:pPr indent="0" marL="0">
+            <a:pPr marL="0" indent="0">
               <a:buNone/>
             </a:pPr>
             <a:r>
@@ -6698,7 +6529,7 @@
           <a:bodyPr wrap="square" lIns="0" tIns="0" rIns="0" bIns="0" rtlCol="0" anchor="ctr"/>
           <a:lstStyle/>
           <a:p>
-            <a:pPr algn="ctr" indent="0" marL="0">
+            <a:pPr marL="0" indent="0" algn="ctr">
               <a:buNone/>
             </a:pPr>
             <a:r>
@@ -6781,7 +6612,7 @@
           <a:bodyPr wrap="square" lIns="0" tIns="0" rIns="0" bIns="0" rtlCol="0" anchor="ctr"/>
           <a:lstStyle/>
           <a:p>
-            <a:pPr algn="ctr" indent="0" marL="0">
+            <a:pPr marL="0" indent="0" algn="ctr">
               <a:buNone/>
             </a:pPr>
             <a:r>
@@ -6845,14 +6676,14 @@
       </p:sp>
       <p:pic>
         <p:nvPicPr>
-          <p:cNvPr id="13" name="Image 0" descr="Documento">    </p:cNvPr>
+          <p:cNvPr id="13" name="Image 0" descr="Documento"/>
           <p:cNvPicPr>
             <a:picLocks noChangeAspect="1"/>
           </p:cNvPicPr>
           <p:nvPr/>
         </p:nvPicPr>
         <p:blipFill>
-          <a:blip r:embed="rId1"/>
+          <a:blip r:embed="rId3"/>
           <a:stretch>
             <a:fillRect/>
           </a:stretch>
@@ -6888,7 +6719,7 @@
           <a:bodyPr wrap="square" lIns="0" tIns="0" rIns="0" bIns="0" rtlCol="0" anchor="ctr"/>
           <a:lstStyle/>
           <a:p>
-            <a:pPr indent="0" marL="0">
+            <a:pPr marL="0" indent="0">
               <a:buNone/>
             </a:pPr>
             <a:r>
@@ -6923,7 +6754,7 @@
           </a:prstGeom>
           <a:extLst>
             <a:ext uri="{C572A759-6A51-4108-AA02-DFA0A04FC94B}">
-              <ma14:wrappingTextBoxFlag xmlns:ma14="http://schemas.microsoft.com/office/mac/drawingml/2011/main" val="0"/>
+              <ma14:wrappingTextBoxFlag xmlns:ma14="http://schemas.microsoft.com/office/mac/drawingml/2011/main" xmlns="" val="0"/>
             </a:ext>
           </a:extLst>
         </p:spPr>
@@ -6941,7 +6772,7 @@
           <a:p>
             <a:pPr algn="r"/>
             <a:fld id="{F7021451-1387-4CA6-816F-3879F97B5CBC}" type="slidenum">
-              <a:rPr b="0" lang="en-US"/>
+              <a:rPr lang="en-US" b="0"/>
               <a:t>4</a:t>
             </a:fld>
             <a:endParaRPr lang="en-US"/>
@@ -6976,9 +6807,11 @@
       <p:sp>
         <p:nvSpPr>
           <p:cNvPr id="2" name="Text 0"/>
-          <p:cNvSpPr/>
+          <p:cNvSpPr>
+            <a:spLocks noGrp="1"/>
+          </p:cNvSpPr>
           <p:nvPr>
-            <p:ph idx="100" type="title" hasCustomPrompt="1"/>
+            <p:ph type="title" idx="100" hasCustomPrompt="1"/>
           </p:nvPr>
         </p:nvSpPr>
         <p:spPr>
@@ -6996,7 +6829,7 @@
           <a:bodyPr wrap="square" lIns="0" tIns="0" rIns="0" bIns="0" rtlCol="0" anchor="ctr"/>
           <a:lstStyle/>
           <a:p>
-            <a:pPr algn="l" indent="0" marL="0">
+            <a:pPr marL="0" indent="0" algn="l">
               <a:buNone/>
             </a:pPr>
             <a:r>
@@ -7054,7 +6887,7 @@
           <a:bodyPr wrap="square" lIns="0" tIns="0" rIns="0" bIns="0" rtlCol="0" anchor="ctr"/>
           <a:lstStyle/>
           <a:p>
-            <a:pPr algn="ctr" indent="0" marL="0">
+            <a:pPr marL="0" indent="0" algn="ctr">
               <a:buNone/>
             </a:pPr>
             <a:r>
@@ -7090,7 +6923,7 @@
           <a:bodyPr wrap="square" lIns="0" tIns="0" rIns="0" bIns="0" rtlCol="0" anchor="ctr"/>
           <a:lstStyle/>
           <a:p>
-            <a:pPr indent="0" marL="0">
+            <a:pPr marL="0" indent="0">
               <a:buNone/>
             </a:pPr>
             <a:r>
@@ -7168,7 +7001,7 @@
           <a:bodyPr wrap="square" lIns="0" tIns="0" rIns="0" bIns="0" rtlCol="0" anchor="ctr"/>
           <a:lstStyle/>
           <a:p>
-            <a:pPr algn="ctr" indent="0" marL="0">
+            <a:pPr marL="0" indent="0" algn="ctr">
               <a:buNone/>
             </a:pPr>
             <a:r>
@@ -7204,7 +7037,7 @@
           <a:bodyPr wrap="square" lIns="0" tIns="0" rIns="0" bIns="0" rtlCol="0" anchor="ctr"/>
           <a:lstStyle/>
           <a:p>
-            <a:pPr indent="0" marL="0">
+            <a:pPr marL="0" indent="0">
               <a:buNone/>
             </a:pPr>
             <a:r>
@@ -7282,7 +7115,7 @@
           <a:bodyPr wrap="square" lIns="0" tIns="0" rIns="0" bIns="0" rtlCol="0" anchor="ctr"/>
           <a:lstStyle/>
           <a:p>
-            <a:pPr algn="ctr" indent="0" marL="0">
+            <a:pPr marL="0" indent="0" algn="ctr">
               <a:buNone/>
             </a:pPr>
             <a:r>
@@ -7318,7 +7151,7 @@
           <a:bodyPr wrap="square" lIns="0" tIns="0" rIns="0" bIns="0" rtlCol="0" anchor="ctr"/>
           <a:lstStyle/>
           <a:p>
-            <a:pPr indent="0" marL="0">
+            <a:pPr marL="0" indent="0">
               <a:buNone/>
             </a:pPr>
             <a:r>
@@ -7396,7 +7229,7 @@
           <a:bodyPr wrap="square" lIns="0" tIns="0" rIns="0" bIns="0" rtlCol="0" anchor="ctr"/>
           <a:lstStyle/>
           <a:p>
-            <a:pPr algn="ctr" indent="0" marL="0">
+            <a:pPr marL="0" indent="0" algn="ctr">
               <a:buNone/>
             </a:pPr>
             <a:r>
@@ -7432,7 +7265,7 @@
           <a:bodyPr wrap="square" lIns="0" tIns="0" rIns="0" bIns="0" rtlCol="0" anchor="ctr"/>
           <a:lstStyle/>
           <a:p>
-            <a:pPr indent="0" marL="0">
+            <a:pPr marL="0" indent="0">
               <a:buNone/>
             </a:pPr>
             <a:r>
@@ -7510,7 +7343,7 @@
           <a:bodyPr wrap="square" lIns="0" tIns="0" rIns="0" bIns="0" rtlCol="0" anchor="ctr"/>
           <a:lstStyle/>
           <a:p>
-            <a:pPr algn="ctr" indent="0" marL="0">
+            <a:pPr marL="0" indent="0" algn="ctr">
               <a:buNone/>
             </a:pPr>
             <a:r>
@@ -7546,7 +7379,7 @@
           <a:bodyPr wrap="square" lIns="0" tIns="0" rIns="0" bIns="0" rtlCol="0" anchor="ctr"/>
           <a:lstStyle/>
           <a:p>
-            <a:pPr indent="0" marL="0">
+            <a:pPr marL="0" indent="0">
               <a:buNone/>
             </a:pPr>
             <a:r>
@@ -7624,7 +7457,7 @@
           <a:bodyPr wrap="square" lIns="0" tIns="0" rIns="0" bIns="0" rtlCol="0" anchor="ctr"/>
           <a:lstStyle/>
           <a:p>
-            <a:pPr algn="ctr" indent="0" marL="0">
+            <a:pPr marL="0" indent="0" algn="ctr">
               <a:buNone/>
             </a:pPr>
             <a:r>
@@ -7660,7 +7493,7 @@
           <a:bodyPr wrap="square" lIns="0" tIns="0" rIns="0" bIns="0" rtlCol="0" anchor="ctr"/>
           <a:lstStyle/>
           <a:p>
-            <a:pPr indent="0" marL="0">
+            <a:pPr marL="0" indent="0">
               <a:buNone/>
             </a:pPr>
             <a:r>
@@ -7738,7 +7571,7 @@
           <a:bodyPr wrap="square" lIns="0" tIns="0" rIns="0" bIns="0" rtlCol="0" anchor="ctr"/>
           <a:lstStyle/>
           <a:p>
-            <a:pPr algn="ctr" indent="0" marL="0">
+            <a:pPr marL="0" indent="0" algn="ctr">
               <a:buNone/>
             </a:pPr>
             <a:r>
@@ -7774,7 +7607,7 @@
           <a:bodyPr wrap="square" lIns="0" tIns="0" rIns="0" bIns="0" rtlCol="0" anchor="ctr"/>
           <a:lstStyle/>
           <a:p>
-            <a:pPr indent="0" marL="0">
+            <a:pPr marL="0" indent="0">
               <a:buNone/>
             </a:pPr>
             <a:r>
@@ -7852,7 +7685,7 @@
           <a:bodyPr wrap="square" lIns="0" tIns="0" rIns="0" bIns="0" rtlCol="0" anchor="ctr"/>
           <a:lstStyle/>
           <a:p>
-            <a:pPr algn="ctr" indent="0" marL="0">
+            <a:pPr marL="0" indent="0" algn="ctr">
               <a:buNone/>
             </a:pPr>
             <a:r>
@@ -7888,7 +7721,7 @@
           <a:bodyPr wrap="square" lIns="0" tIns="0" rIns="0" bIns="0" rtlCol="0" anchor="ctr"/>
           <a:lstStyle/>
           <a:p>
-            <a:pPr indent="0" marL="0">
+            <a:pPr marL="0" indent="0">
               <a:buNone/>
             </a:pPr>
             <a:r>
@@ -7946,7 +7779,7 @@
           <a:bodyPr wrap="square" lIns="0" tIns="0" rIns="0" bIns="0" rtlCol="0" anchor="ctr"/>
           <a:lstStyle/>
           <a:p>
-            <a:pPr indent="0" marL="0">
+            <a:pPr marL="0" indent="0">
               <a:buNone/>
             </a:pPr>
             <a:r>
@@ -7983,167 +7816,7 @@
       </p:sp>
       <p:pic>
         <p:nvPicPr>
-          <p:cNvPr id="37" name="Image 0" descr="¿Qué sobra?">    </p:cNvPr>
-          <p:cNvPicPr>
-            <a:picLocks noChangeAspect="1"/>
-          </p:cNvPicPr>
-          <p:nvPr/>
-        </p:nvPicPr>
-        <p:blipFill>
-          <a:blip r:embed="rId1"/>
-          <a:stretch>
-            <a:fillRect/>
-          </a:stretch>
-        </p:blipFill>
-        <p:spPr>
-          <a:xfrm>
-            <a:off x="702259" y="5137099"/>
-            <a:ext cx="332842" cy="332842"/>
-          </a:xfrm>
-          <a:prstGeom prst="rect">
-            <a:avLst/>
-          </a:prstGeom>
-        </p:spPr>
-      </p:pic>
-      <p:sp>
-        <p:nvSpPr>
-          <p:cNvPr id="38" name="Text 35"/>
-          <p:cNvSpPr txBox="1"/>
-          <p:nvPr/>
-        </p:nvSpPr>
-        <p:spPr>
-          <a:xfrm>
-            <a:off x="1371600" y="4983480"/>
-            <a:ext cx="2600858" cy="640080"/>
-          </a:xfrm>
-          <a:prstGeom prst="rect">
-            <a:avLst/>
-          </a:prstGeom>
-          <a:noFill/>
-          <a:ln/>
-        </p:spPr>
-        <p:txBody>
-          <a:bodyPr wrap="square" lIns="0" tIns="0" rIns="0" bIns="0" rtlCol="0" anchor="ctr"/>
-          <a:lstStyle/>
-          <a:p>
-            <a:pPr indent="0" marL="0">
-              <a:buNone/>
-            </a:pPr>
-            <a:r>
-              <a:rPr lang="en-US" sz="1900" b="1" dirty="0">
-                <a:solidFill>
-                  <a:schemeClr val="tx1"/>
-                </a:solidFill>
-              </a:rPr>
-              <a:t>¿Qué sobra?</a:t>
-            </a:r>
-            <a:endParaRPr lang="en-US" sz="1900" dirty="0"/>
-          </a:p>
-        </p:txBody>
-      </p:sp>
-      <p:sp>
-        <p:nvSpPr>
-          <p:cNvPr id="39" name="¿Qué falta?"/>
-          <p:cNvSpPr/>
-          <p:nvPr/>
-        </p:nvSpPr>
-        <p:spPr>
-          <a:xfrm>
-            <a:off x="4338218" y="4983480"/>
-            <a:ext cx="640080" cy="640080"/>
-          </a:xfrm>
-          <a:prstGeom prst="ellipse">
-            <a:avLst/>
-          </a:prstGeom>
-          <a:solidFill>
-            <a:schemeClr val="accent2"/>
-          </a:solidFill>
-          <a:ln/>
-        </p:spPr>
-      </p:sp>
-      <p:pic>
-        <p:nvPicPr>
-          <p:cNvPr id="40" name="Image 1" descr="¿Qué falta?">    </p:cNvPr>
-          <p:cNvPicPr>
-            <a:picLocks noChangeAspect="1"/>
-          </p:cNvPicPr>
-          <p:nvPr/>
-        </p:nvPicPr>
-        <p:blipFill>
-          <a:blip r:embed="rId2"/>
-          <a:stretch>
-            <a:fillRect/>
-          </a:stretch>
-        </p:blipFill>
-        <p:spPr>
-          <a:xfrm>
-            <a:off x="4491838" y="5137099"/>
-            <a:ext cx="332842" cy="332842"/>
-          </a:xfrm>
-          <a:prstGeom prst="rect">
-            <a:avLst/>
-          </a:prstGeom>
-        </p:spPr>
-      </p:pic>
-      <p:sp>
-        <p:nvSpPr>
-          <p:cNvPr id="41" name="Text 37"/>
-          <p:cNvSpPr txBox="1"/>
-          <p:nvPr/>
-        </p:nvSpPr>
-        <p:spPr>
-          <a:xfrm>
-            <a:off x="5161178" y="4983480"/>
-            <a:ext cx="2600858" cy="640080"/>
-          </a:xfrm>
-          <a:prstGeom prst="rect">
-            <a:avLst/>
-          </a:prstGeom>
-          <a:noFill/>
-          <a:ln/>
-        </p:spPr>
-        <p:txBody>
-          <a:bodyPr wrap="square" lIns="0" tIns="0" rIns="0" bIns="0" rtlCol="0" anchor="ctr"/>
-          <a:lstStyle/>
-          <a:p>
-            <a:pPr indent="0" marL="0">
-              <a:buNone/>
-            </a:pPr>
-            <a:r>
-              <a:rPr lang="en-US" sz="1900" b="1" dirty="0">
-                <a:solidFill>
-                  <a:schemeClr val="tx1"/>
-                </a:solidFill>
-              </a:rPr>
-              <a:t>¿Qué falta?</a:t>
-            </a:r>
-            <a:endParaRPr lang="en-US" sz="1900" dirty="0"/>
-          </a:p>
-        </p:txBody>
-      </p:sp>
-      <p:sp>
-        <p:nvSpPr>
-          <p:cNvPr id="42" name="¿Qué no es cierto?"/>
-          <p:cNvSpPr/>
-          <p:nvPr/>
-        </p:nvSpPr>
-        <p:spPr>
-          <a:xfrm>
-            <a:off x="8127797" y="4983480"/>
-            <a:ext cx="640080" cy="640080"/>
-          </a:xfrm>
-          <a:prstGeom prst="ellipse">
-            <a:avLst/>
-          </a:prstGeom>
-          <a:solidFill>
-            <a:schemeClr val="accent2"/>
-          </a:solidFill>
-          <a:ln/>
-        </p:spPr>
-      </p:sp>
-      <p:pic>
-        <p:nvPicPr>
-          <p:cNvPr id="43" name="Image 2" descr="¿Qué no es cierto?">    </p:cNvPr>
+          <p:cNvPr id="37" name="Image 0" descr="¿Qué sobra?"/>
           <p:cNvPicPr>
             <a:picLocks noChangeAspect="1"/>
           </p:cNvPicPr>
@@ -8157,6 +7830,166 @@
         </p:blipFill>
         <p:spPr>
           <a:xfrm>
+            <a:off x="702259" y="5137099"/>
+            <a:ext cx="332842" cy="332842"/>
+          </a:xfrm>
+          <a:prstGeom prst="rect">
+            <a:avLst/>
+          </a:prstGeom>
+        </p:spPr>
+      </p:pic>
+      <p:sp>
+        <p:nvSpPr>
+          <p:cNvPr id="38" name="Text 35"/>
+          <p:cNvSpPr txBox="1"/>
+          <p:nvPr/>
+        </p:nvSpPr>
+        <p:spPr>
+          <a:xfrm>
+            <a:off x="1371600" y="4983480"/>
+            <a:ext cx="2600858" cy="640080"/>
+          </a:xfrm>
+          <a:prstGeom prst="rect">
+            <a:avLst/>
+          </a:prstGeom>
+          <a:noFill/>
+          <a:ln/>
+        </p:spPr>
+        <p:txBody>
+          <a:bodyPr wrap="square" lIns="0" tIns="0" rIns="0" bIns="0" rtlCol="0" anchor="ctr"/>
+          <a:lstStyle/>
+          <a:p>
+            <a:pPr marL="0" indent="0">
+              <a:buNone/>
+            </a:pPr>
+            <a:r>
+              <a:rPr lang="en-US" sz="1900" b="1" dirty="0">
+                <a:solidFill>
+                  <a:schemeClr val="tx1"/>
+                </a:solidFill>
+              </a:rPr>
+              <a:t>¿Qué sobra?</a:t>
+            </a:r>
+            <a:endParaRPr lang="en-US" sz="1900" dirty="0"/>
+          </a:p>
+        </p:txBody>
+      </p:sp>
+      <p:sp>
+        <p:nvSpPr>
+          <p:cNvPr id="39" name="¿Qué falta?"/>
+          <p:cNvSpPr/>
+          <p:nvPr/>
+        </p:nvSpPr>
+        <p:spPr>
+          <a:xfrm>
+            <a:off x="4338218" y="4983480"/>
+            <a:ext cx="640080" cy="640080"/>
+          </a:xfrm>
+          <a:prstGeom prst="ellipse">
+            <a:avLst/>
+          </a:prstGeom>
+          <a:solidFill>
+            <a:schemeClr val="accent2"/>
+          </a:solidFill>
+          <a:ln/>
+        </p:spPr>
+      </p:sp>
+      <p:pic>
+        <p:nvPicPr>
+          <p:cNvPr id="40" name="Image 1" descr="¿Qué falta?"/>
+          <p:cNvPicPr>
+            <a:picLocks noChangeAspect="1"/>
+          </p:cNvPicPr>
+          <p:nvPr/>
+        </p:nvPicPr>
+        <p:blipFill>
+          <a:blip r:embed="rId4"/>
+          <a:stretch>
+            <a:fillRect/>
+          </a:stretch>
+        </p:blipFill>
+        <p:spPr>
+          <a:xfrm>
+            <a:off x="4491838" y="5137099"/>
+            <a:ext cx="332842" cy="332842"/>
+          </a:xfrm>
+          <a:prstGeom prst="rect">
+            <a:avLst/>
+          </a:prstGeom>
+        </p:spPr>
+      </p:pic>
+      <p:sp>
+        <p:nvSpPr>
+          <p:cNvPr id="41" name="Text 37"/>
+          <p:cNvSpPr txBox="1"/>
+          <p:nvPr/>
+        </p:nvSpPr>
+        <p:spPr>
+          <a:xfrm>
+            <a:off x="5161178" y="4983480"/>
+            <a:ext cx="2600858" cy="640080"/>
+          </a:xfrm>
+          <a:prstGeom prst="rect">
+            <a:avLst/>
+          </a:prstGeom>
+          <a:noFill/>
+          <a:ln/>
+        </p:spPr>
+        <p:txBody>
+          <a:bodyPr wrap="square" lIns="0" tIns="0" rIns="0" bIns="0" rtlCol="0" anchor="ctr"/>
+          <a:lstStyle/>
+          <a:p>
+            <a:pPr marL="0" indent="0">
+              <a:buNone/>
+            </a:pPr>
+            <a:r>
+              <a:rPr lang="en-US" sz="1900" b="1" dirty="0">
+                <a:solidFill>
+                  <a:schemeClr val="tx1"/>
+                </a:solidFill>
+              </a:rPr>
+              <a:t>¿Qué falta?</a:t>
+            </a:r>
+            <a:endParaRPr lang="en-US" sz="1900" dirty="0"/>
+          </a:p>
+        </p:txBody>
+      </p:sp>
+      <p:sp>
+        <p:nvSpPr>
+          <p:cNvPr id="42" name="¿Qué no es cierto?"/>
+          <p:cNvSpPr/>
+          <p:nvPr/>
+        </p:nvSpPr>
+        <p:spPr>
+          <a:xfrm>
+            <a:off x="8127797" y="4983480"/>
+            <a:ext cx="640080" cy="640080"/>
+          </a:xfrm>
+          <a:prstGeom prst="ellipse">
+            <a:avLst/>
+          </a:prstGeom>
+          <a:solidFill>
+            <a:schemeClr val="accent2"/>
+          </a:solidFill>
+          <a:ln/>
+        </p:spPr>
+      </p:sp>
+      <p:pic>
+        <p:nvPicPr>
+          <p:cNvPr id="43" name="Image 2" descr="¿Qué no es cierto?"/>
+          <p:cNvPicPr>
+            <a:picLocks noChangeAspect="1"/>
+          </p:cNvPicPr>
+          <p:nvPr/>
+        </p:nvPicPr>
+        <p:blipFill>
+          <a:blip r:embed="rId5"/>
+          <a:stretch>
+            <a:fillRect/>
+          </a:stretch>
+        </p:blipFill>
+        <p:spPr>
+          <a:xfrm>
             <a:off x="8281416" y="5137099"/>
             <a:ext cx="332842" cy="332842"/>
           </a:xfrm>
@@ -8186,7 +8019,7 @@
           <a:bodyPr wrap="square" lIns="0" tIns="0" rIns="0" bIns="0" rtlCol="0" anchor="ctr"/>
           <a:lstStyle/>
           <a:p>
-            <a:pPr indent="0" marL="0">
+            <a:pPr marL="0" indent="0">
               <a:buNone/>
             </a:pPr>
             <a:r>
@@ -8203,7 +8036,7 @@
       </p:sp>
       <p:sp>
         <p:nvSpPr>
-          <p:cNvPr id="25" name="Slide Number Placeholder 0"/>
+          <p:cNvPr id="45" name="Slide Number Placeholder 0"/>
           <p:cNvSpPr>
             <a:spLocks noGrp="1"/>
           </p:cNvSpPr>
@@ -8221,7 +8054,7 @@
           </a:prstGeom>
           <a:extLst>
             <a:ext uri="{C572A759-6A51-4108-AA02-DFA0A04FC94B}">
-              <ma14:wrappingTextBoxFlag xmlns:ma14="http://schemas.microsoft.com/office/mac/drawingml/2011/main" val="0"/>
+              <ma14:wrappingTextBoxFlag xmlns:ma14="http://schemas.microsoft.com/office/mac/drawingml/2011/main" xmlns="" val="0"/>
             </a:ext>
           </a:extLst>
         </p:spPr>
@@ -8239,7 +8072,7 @@
           <a:p>
             <a:pPr algn="r"/>
             <a:fld id="{F7021451-1387-4CA6-816F-3879F97B5CBC}" type="slidenum">
-              <a:rPr b="0" lang="en-US"/>
+              <a:rPr lang="en-US" b="0"/>
               <a:t>5</a:t>
             </a:fld>
             <a:endParaRPr lang="en-US"/>
@@ -8274,9 +8107,11 @@
       <p:sp>
         <p:nvSpPr>
           <p:cNvPr id="2" name="Text 0"/>
-          <p:cNvSpPr/>
+          <p:cNvSpPr>
+            <a:spLocks noGrp="1"/>
+          </p:cNvSpPr>
           <p:nvPr>
-            <p:ph idx="100" type="title" hasCustomPrompt="1"/>
+            <p:ph type="title" idx="100" hasCustomPrompt="1"/>
           </p:nvPr>
         </p:nvSpPr>
         <p:spPr>
@@ -8294,7 +8129,7 @@
           <a:bodyPr wrap="square" lIns="0" tIns="0" rIns="0" bIns="0" rtlCol="0" anchor="ctr"/>
           <a:lstStyle/>
           <a:p>
-            <a:pPr algn="l" indent="0" marL="0">
+            <a:pPr marL="0" indent="0" algn="l">
               <a:buNone/>
             </a:pPr>
             <a:r>
@@ -8352,7 +8187,7 @@
           <a:bodyPr wrap="square" lIns="0" tIns="0" rIns="0" bIns="0" rtlCol="0" anchor="ctr"/>
           <a:lstStyle/>
           <a:p>
-            <a:pPr algn="ctr" indent="0" marL="0">
+            <a:pPr marL="0" indent="0" algn="ctr">
               <a:buNone/>
             </a:pPr>
             <a:r>
@@ -8411,211 +8246,7 @@
       </p:sp>
       <p:pic>
         <p:nvPicPr>
-          <p:cNvPr id="7" name="Image 0" descr="Pregunta">    </p:cNvPr>
-          <p:cNvPicPr>
-            <a:picLocks noChangeAspect="1"/>
-          </p:cNvPicPr>
-          <p:nvPr/>
-        </p:nvPicPr>
-        <p:blipFill>
-          <a:blip r:embed="rId1"/>
-          <a:stretch>
-            <a:fillRect/>
-          </a:stretch>
-        </p:blipFill>
-        <p:spPr>
-          <a:xfrm>
-            <a:off x="1966722" y="2205533"/>
-            <a:ext cx="618134" cy="618134"/>
-          </a:xfrm>
-          <a:prstGeom prst="rect">
-            <a:avLst/>
-          </a:prstGeom>
-        </p:spPr>
-      </p:pic>
-      <p:sp>
-        <p:nvSpPr>
-          <p:cNvPr id="8" name="Text 5"/>
-          <p:cNvSpPr txBox="1"/>
-          <p:nvPr/>
-        </p:nvSpPr>
-        <p:spPr>
-          <a:xfrm>
-            <a:off x="868680" y="3383280"/>
-            <a:ext cx="2814218" cy="1737360"/>
-          </a:xfrm>
-          <a:prstGeom prst="rect">
-            <a:avLst/>
-          </a:prstGeom>
-          <a:noFill/>
-          <a:ln/>
-        </p:spPr>
-        <p:txBody>
-          <a:bodyPr wrap="square" lIns="0" tIns="0" rIns="0" bIns="0" rtlCol="0" anchor="t"/>
-          <a:lstStyle/>
-          <a:p>
-            <a:pPr algn="ctr" indent="0" marL="0">
-              <a:buNone/>
-            </a:pPr>
-            <a:r>
-              <a:rPr lang="en-US" sz="2100" dirty="0">
-                <a:solidFill>
-                  <a:schemeClr val="tx1"/>
-                </a:solidFill>
-              </a:rPr>
-              <a:t>¿Habéis respondido a las preguntas que no supisteis contestar en el intercambio?</a:t>
-            </a:r>
-            <a:endParaRPr lang="en-US" sz="2100" dirty="0"/>
-          </a:p>
-        </p:txBody>
-      </p:sp>
-      <p:sp>
-        <p:nvSpPr>
-          <p:cNvPr id="9" name="Tarjeta"/>
-          <p:cNvSpPr/>
-          <p:nvPr/>
-        </p:nvSpPr>
-        <p:spPr>
-          <a:xfrm>
-            <a:off x="4368698" y="1554480"/>
-            <a:ext cx="3454298" cy="3749040"/>
-          </a:xfrm>
-          <a:prstGeom prst="roundRect">
-            <a:avLst>
-              <a:gd name="adj" fmla="val 3971"/>
-            </a:avLst>
-          </a:prstGeom>
-          <a:solidFill>
-            <a:schemeClr val="bg2"/>
-          </a:solidFill>
-          <a:ln/>
-        </p:spPr>
-      </p:sp>
-      <p:sp>
-        <p:nvSpPr>
-          <p:cNvPr id="10" name="Pregunta"/>
-          <p:cNvSpPr/>
-          <p:nvPr/>
-        </p:nvSpPr>
-        <p:spPr>
-          <a:xfrm>
-            <a:off x="5501488" y="1920240"/>
-            <a:ext cx="1188720" cy="1188720"/>
-          </a:xfrm>
-          <a:prstGeom prst="ellipse">
-            <a:avLst/>
-          </a:prstGeom>
-          <a:solidFill>
-            <a:schemeClr val="tx2"/>
-          </a:solidFill>
-          <a:ln/>
-        </p:spPr>
-      </p:sp>
-      <p:pic>
-        <p:nvPicPr>
-          <p:cNvPr id="11" name="Image 1" descr="Pregunta">    </p:cNvPr>
-          <p:cNvPicPr>
-            <a:picLocks noChangeAspect="1"/>
-          </p:cNvPicPr>
-          <p:nvPr/>
-        </p:nvPicPr>
-        <p:blipFill>
-          <a:blip r:embed="rId2"/>
-          <a:stretch>
-            <a:fillRect/>
-          </a:stretch>
-        </p:blipFill>
-        <p:spPr>
-          <a:xfrm>
-            <a:off x="5786780" y="2205533"/>
-            <a:ext cx="618134" cy="618134"/>
-          </a:xfrm>
-          <a:prstGeom prst="rect">
-            <a:avLst/>
-          </a:prstGeom>
-        </p:spPr>
-      </p:pic>
-      <p:sp>
-        <p:nvSpPr>
-          <p:cNvPr id="12" name="Text 8"/>
-          <p:cNvSpPr txBox="1"/>
-          <p:nvPr/>
-        </p:nvSpPr>
-        <p:spPr>
-          <a:xfrm>
-            <a:off x="4688738" y="3383280"/>
-            <a:ext cx="2814218" cy="1737360"/>
-          </a:xfrm>
-          <a:prstGeom prst="rect">
-            <a:avLst/>
-          </a:prstGeom>
-          <a:noFill/>
-          <a:ln/>
-        </p:spPr>
-        <p:txBody>
-          <a:bodyPr wrap="square" lIns="0" tIns="0" rIns="0" bIns="0" rtlCol="0" anchor="t"/>
-          <a:lstStyle/>
-          <a:p>
-            <a:pPr algn="ctr" indent="0" marL="0">
-              <a:buNone/>
-            </a:pPr>
-            <a:r>
-              <a:rPr lang="en-US" sz="2100" dirty="0">
-                <a:solidFill>
-                  <a:schemeClr val="tx1"/>
-                </a:solidFill>
-              </a:rPr>
-              <a:t>¿Qué actividades requieren supervisión humana?</a:t>
-            </a:r>
-            <a:endParaRPr lang="en-US" sz="2100" dirty="0"/>
-          </a:p>
-        </p:txBody>
-      </p:sp>
-      <p:sp>
-        <p:nvSpPr>
-          <p:cNvPr id="13" name="Tarjeta"/>
-          <p:cNvSpPr/>
-          <p:nvPr/>
-        </p:nvSpPr>
-        <p:spPr>
-          <a:xfrm>
-            <a:off x="8188757" y="1554480"/>
-            <a:ext cx="3454298" cy="3749040"/>
-          </a:xfrm>
-          <a:prstGeom prst="roundRect">
-            <a:avLst>
-              <a:gd name="adj" fmla="val 3971"/>
-            </a:avLst>
-          </a:prstGeom>
-          <a:solidFill>
-            <a:schemeClr val="bg2"/>
-          </a:solidFill>
-          <a:ln/>
-        </p:spPr>
-      </p:sp>
-      <p:sp>
-        <p:nvSpPr>
-          <p:cNvPr id="14" name="Pregunta"/>
-          <p:cNvSpPr/>
-          <p:nvPr/>
-        </p:nvSpPr>
-        <p:spPr>
-          <a:xfrm>
-            <a:off x="9321546" y="1920240"/>
-            <a:ext cx="1188720" cy="1188720"/>
-          </a:xfrm>
-          <a:prstGeom prst="ellipse">
-            <a:avLst/>
-          </a:prstGeom>
-          <a:solidFill>
-            <a:schemeClr val="tx2"/>
-          </a:solidFill>
-          <a:ln/>
-        </p:spPr>
-      </p:sp>
-      <p:pic>
-        <p:nvPicPr>
-          <p:cNvPr id="15" name="Image 2" descr="Pregunta">    </p:cNvPr>
+          <p:cNvPr id="7" name="Image 0" descr="Pregunta"/>
           <p:cNvPicPr>
             <a:picLocks noChangeAspect="1"/>
           </p:cNvPicPr>
@@ -8629,6 +8260,210 @@
         </p:blipFill>
         <p:spPr>
           <a:xfrm>
+            <a:off x="1966722" y="2205533"/>
+            <a:ext cx="618134" cy="618134"/>
+          </a:xfrm>
+          <a:prstGeom prst="rect">
+            <a:avLst/>
+          </a:prstGeom>
+        </p:spPr>
+      </p:pic>
+      <p:sp>
+        <p:nvSpPr>
+          <p:cNvPr id="8" name="Text 5"/>
+          <p:cNvSpPr txBox="1"/>
+          <p:nvPr/>
+        </p:nvSpPr>
+        <p:spPr>
+          <a:xfrm>
+            <a:off x="868680" y="3383280"/>
+            <a:ext cx="2814218" cy="1737360"/>
+          </a:xfrm>
+          <a:prstGeom prst="rect">
+            <a:avLst/>
+          </a:prstGeom>
+          <a:noFill/>
+          <a:ln/>
+        </p:spPr>
+        <p:txBody>
+          <a:bodyPr wrap="square" lIns="0" tIns="0" rIns="0" bIns="0" rtlCol="0" anchor="t"/>
+          <a:lstStyle/>
+          <a:p>
+            <a:pPr marL="0" indent="0" algn="ctr">
+              <a:buNone/>
+            </a:pPr>
+            <a:r>
+              <a:rPr lang="en-US" sz="2100" dirty="0">
+                <a:solidFill>
+                  <a:schemeClr val="tx1"/>
+                </a:solidFill>
+              </a:rPr>
+              <a:t>¿Habéis respondido a las preguntas que no supisteis contestar en el intercambio?</a:t>
+            </a:r>
+            <a:endParaRPr lang="en-US" sz="2100" dirty="0"/>
+          </a:p>
+        </p:txBody>
+      </p:sp>
+      <p:sp>
+        <p:nvSpPr>
+          <p:cNvPr id="9" name="Tarjeta"/>
+          <p:cNvSpPr/>
+          <p:nvPr/>
+        </p:nvSpPr>
+        <p:spPr>
+          <a:xfrm>
+            <a:off x="4368698" y="1554480"/>
+            <a:ext cx="3454298" cy="3749040"/>
+          </a:xfrm>
+          <a:prstGeom prst="roundRect">
+            <a:avLst>
+              <a:gd name="adj" fmla="val 3971"/>
+            </a:avLst>
+          </a:prstGeom>
+          <a:solidFill>
+            <a:schemeClr val="bg2"/>
+          </a:solidFill>
+          <a:ln/>
+        </p:spPr>
+      </p:sp>
+      <p:sp>
+        <p:nvSpPr>
+          <p:cNvPr id="10" name="Pregunta"/>
+          <p:cNvSpPr/>
+          <p:nvPr/>
+        </p:nvSpPr>
+        <p:spPr>
+          <a:xfrm>
+            <a:off x="5501488" y="1920240"/>
+            <a:ext cx="1188720" cy="1188720"/>
+          </a:xfrm>
+          <a:prstGeom prst="ellipse">
+            <a:avLst/>
+          </a:prstGeom>
+          <a:solidFill>
+            <a:schemeClr val="tx2"/>
+          </a:solidFill>
+          <a:ln/>
+        </p:spPr>
+      </p:sp>
+      <p:pic>
+        <p:nvPicPr>
+          <p:cNvPr id="11" name="Image 1" descr="Pregunta"/>
+          <p:cNvPicPr>
+            <a:picLocks noChangeAspect="1"/>
+          </p:cNvPicPr>
+          <p:nvPr/>
+        </p:nvPicPr>
+        <p:blipFill>
+          <a:blip r:embed="rId4"/>
+          <a:stretch>
+            <a:fillRect/>
+          </a:stretch>
+        </p:blipFill>
+        <p:spPr>
+          <a:xfrm>
+            <a:off x="5786780" y="2205533"/>
+            <a:ext cx="618134" cy="618134"/>
+          </a:xfrm>
+          <a:prstGeom prst="rect">
+            <a:avLst/>
+          </a:prstGeom>
+        </p:spPr>
+      </p:pic>
+      <p:sp>
+        <p:nvSpPr>
+          <p:cNvPr id="12" name="Text 8"/>
+          <p:cNvSpPr txBox="1"/>
+          <p:nvPr/>
+        </p:nvSpPr>
+        <p:spPr>
+          <a:xfrm>
+            <a:off x="4688738" y="3383280"/>
+            <a:ext cx="2814218" cy="1737360"/>
+          </a:xfrm>
+          <a:prstGeom prst="rect">
+            <a:avLst/>
+          </a:prstGeom>
+          <a:noFill/>
+          <a:ln/>
+        </p:spPr>
+        <p:txBody>
+          <a:bodyPr wrap="square" lIns="0" tIns="0" rIns="0" bIns="0" rtlCol="0" anchor="t"/>
+          <a:lstStyle/>
+          <a:p>
+            <a:pPr marL="0" indent="0" algn="ctr">
+              <a:buNone/>
+            </a:pPr>
+            <a:r>
+              <a:rPr lang="en-US" sz="2100" dirty="0">
+                <a:solidFill>
+                  <a:schemeClr val="tx1"/>
+                </a:solidFill>
+              </a:rPr>
+              <a:t>¿Qué actividades requieren supervisión humana?</a:t>
+            </a:r>
+            <a:endParaRPr lang="en-US" sz="2100" dirty="0"/>
+          </a:p>
+        </p:txBody>
+      </p:sp>
+      <p:sp>
+        <p:nvSpPr>
+          <p:cNvPr id="13" name="Tarjeta"/>
+          <p:cNvSpPr/>
+          <p:nvPr/>
+        </p:nvSpPr>
+        <p:spPr>
+          <a:xfrm>
+            <a:off x="8188757" y="1554480"/>
+            <a:ext cx="3454298" cy="3749040"/>
+          </a:xfrm>
+          <a:prstGeom prst="roundRect">
+            <a:avLst>
+              <a:gd name="adj" fmla="val 3971"/>
+            </a:avLst>
+          </a:prstGeom>
+          <a:solidFill>
+            <a:schemeClr val="bg2"/>
+          </a:solidFill>
+          <a:ln/>
+        </p:spPr>
+      </p:sp>
+      <p:sp>
+        <p:nvSpPr>
+          <p:cNvPr id="14" name="Pregunta"/>
+          <p:cNvSpPr/>
+          <p:nvPr/>
+        </p:nvSpPr>
+        <p:spPr>
+          <a:xfrm>
+            <a:off x="9321546" y="1920240"/>
+            <a:ext cx="1188720" cy="1188720"/>
+          </a:xfrm>
+          <a:prstGeom prst="ellipse">
+            <a:avLst/>
+          </a:prstGeom>
+          <a:solidFill>
+            <a:schemeClr val="tx2"/>
+          </a:solidFill>
+          <a:ln/>
+        </p:spPr>
+      </p:sp>
+      <p:pic>
+        <p:nvPicPr>
+          <p:cNvPr id="15" name="Image 2" descr="Pregunta"/>
+          <p:cNvPicPr>
+            <a:picLocks noChangeAspect="1"/>
+          </p:cNvPicPr>
+          <p:nvPr/>
+        </p:nvPicPr>
+        <p:blipFill>
+          <a:blip r:embed="rId5"/>
+          <a:stretch>
+            <a:fillRect/>
+          </a:stretch>
+        </p:blipFill>
+        <p:spPr>
+          <a:xfrm>
             <a:off x="9606839" y="2205533"/>
             <a:ext cx="618134" cy="618134"/>
           </a:xfrm>
@@ -8658,7 +8493,7 @@
           <a:bodyPr wrap="square" lIns="0" tIns="0" rIns="0" bIns="0" rtlCol="0" anchor="t"/>
           <a:lstStyle/>
           <a:p>
-            <a:pPr algn="ctr" indent="0" marL="0">
+            <a:pPr marL="0" indent="0" algn="ctr">
               <a:buNone/>
             </a:pPr>
             <a:r>
@@ -8693,7 +8528,7 @@
           </a:prstGeom>
           <a:extLst>
             <a:ext uri="{C572A759-6A51-4108-AA02-DFA0A04FC94B}">
-              <ma14:wrappingTextBoxFlag xmlns:ma14="http://schemas.microsoft.com/office/mac/drawingml/2011/main" val="0"/>
+              <ma14:wrappingTextBoxFlag xmlns:ma14="http://schemas.microsoft.com/office/mac/drawingml/2011/main" xmlns="" val="0"/>
             </a:ext>
           </a:extLst>
         </p:spPr>
@@ -8711,7 +8546,7 @@
           <a:p>
             <a:pPr algn="r"/>
             <a:fld id="{F7021451-1387-4CA6-816F-3879F97B5CBC}" type="slidenum">
-              <a:rPr b="0" lang="en-US"/>
+              <a:rPr lang="en-US" b="0"/>
               <a:t>6</a:t>
             </a:fld>
             <a:endParaRPr lang="en-US"/>
@@ -8746,9 +8581,11 @@
       <p:sp>
         <p:nvSpPr>
           <p:cNvPr id="2" name="Text 0"/>
-          <p:cNvSpPr/>
+          <p:cNvSpPr>
+            <a:spLocks noGrp="1"/>
+          </p:cNvSpPr>
           <p:nvPr>
-            <p:ph idx="100" type="title" hasCustomPrompt="1"/>
+            <p:ph type="title" idx="100" hasCustomPrompt="1"/>
           </p:nvPr>
         </p:nvSpPr>
         <p:spPr>
@@ -8766,7 +8603,7 @@
           <a:bodyPr wrap="square" lIns="0" tIns="0" rIns="0" bIns="0" rtlCol="0" anchor="ctr"/>
           <a:lstStyle/>
           <a:p>
-            <a:pPr algn="l" indent="0" marL="0">
+            <a:pPr marL="0" indent="0" algn="l">
               <a:buNone/>
             </a:pPr>
             <a:r>
@@ -8824,7 +8661,7 @@
           <a:bodyPr wrap="square" lIns="0" tIns="0" rIns="0" bIns="0" rtlCol="0" anchor="ctr"/>
           <a:lstStyle/>
           <a:p>
-            <a:pPr algn="ctr" indent="0" marL="0">
+            <a:pPr marL="0" indent="0" algn="ctr">
               <a:buNone/>
             </a:pPr>
             <a:r>
@@ -8860,7 +8697,7 @@
           <a:bodyPr wrap="square" lIns="0" tIns="0" rIns="0" bIns="0" rtlCol="0" anchor="ctr"/>
           <a:lstStyle/>
           <a:p>
-            <a:pPr indent="0" marL="0">
+            <a:pPr marL="0" indent="0">
               <a:buNone/>
             </a:pPr>
             <a:r>
@@ -8919,14 +8756,14 @@
       </p:sp>
       <p:pic>
         <p:nvPicPr>
-          <p:cNvPr id="8" name="Image 0" descr="Qué medimos">    </p:cNvPr>
+          <p:cNvPr id="8" name="Image 0" descr="Qué medimos"/>
           <p:cNvPicPr>
             <a:picLocks noChangeAspect="1"/>
           </p:cNvPicPr>
           <p:nvPr/>
         </p:nvPicPr>
         <p:blipFill>
-          <a:blip r:embed="rId1"/>
+          <a:blip r:embed="rId3"/>
           <a:stretch>
             <a:fillRect/>
           </a:stretch>
@@ -8962,7 +8799,7 @@
           <a:bodyPr wrap="square" lIns="0" tIns="0" rIns="0" bIns="0" rtlCol="0" anchor="ctr"/>
           <a:lstStyle/>
           <a:p>
-            <a:pPr indent="0" marL="0">
+            <a:pPr marL="0" indent="0">
               <a:buNone/>
             </a:pPr>
             <a:r>
@@ -8998,7 +8835,7 @@
           <a:bodyPr wrap="square" lIns="0" tIns="0" rIns="0" bIns="0" rtlCol="0" anchor="t"/>
           <a:lstStyle/>
           <a:p>
-            <a:pPr indent="0" marL="0">
+            <a:pPr marL="0" indent="0">
               <a:buNone/>
             </a:pPr>
             <a:r>
@@ -9081,14 +8918,14 @@
       </p:sp>
       <p:pic>
         <p:nvPicPr>
-          <p:cNvPr id="14" name="Image 1" descr="Antes">    </p:cNvPr>
+          <p:cNvPr id="14" name="Image 1" descr="Antes"/>
           <p:cNvPicPr>
             <a:picLocks noChangeAspect="1"/>
           </p:cNvPicPr>
           <p:nvPr/>
         </p:nvPicPr>
         <p:blipFill>
-          <a:blip r:embed="rId2"/>
+          <a:blip r:embed="rId4"/>
           <a:stretch>
             <a:fillRect/>
           </a:stretch>
@@ -9124,7 +8961,7 @@
           <a:bodyPr wrap="square" lIns="0" tIns="0" rIns="0" bIns="0" rtlCol="0" anchor="ctr"/>
           <a:lstStyle/>
           <a:p>
-            <a:pPr indent="0" marL="0">
+            <a:pPr marL="0" indent="0">
               <a:buNone/>
             </a:pPr>
             <a:r>
@@ -9160,7 +8997,7 @@
           <a:bodyPr wrap="square" lIns="0" tIns="0" rIns="0" bIns="0" rtlCol="0" anchor="t"/>
           <a:lstStyle/>
           <a:p>
-            <a:pPr indent="0" marL="0">
+            <a:pPr marL="0" indent="0">
               <a:buNone/>
             </a:pPr>
             <a:r>
@@ -9243,14 +9080,14 @@
       </p:sp>
       <p:pic>
         <p:nvPicPr>
-          <p:cNvPr id="20" name="Image 2" descr="Durante un mes">    </p:cNvPr>
+          <p:cNvPr id="20" name="Image 2" descr="Durante un mes"/>
           <p:cNvPicPr>
             <a:picLocks noChangeAspect="1"/>
           </p:cNvPicPr>
           <p:nvPr/>
         </p:nvPicPr>
         <p:blipFill>
-          <a:blip r:embed="rId3"/>
+          <a:blip r:embed="rId5"/>
           <a:stretch>
             <a:fillRect/>
           </a:stretch>
@@ -9286,7 +9123,7 @@
           <a:bodyPr wrap="square" lIns="0" tIns="0" rIns="0" bIns="0" rtlCol="0" anchor="ctr"/>
           <a:lstStyle/>
           <a:p>
-            <a:pPr indent="0" marL="0">
+            <a:pPr marL="0" indent="0">
               <a:buNone/>
             </a:pPr>
             <a:r>
@@ -9322,7 +9159,7 @@
           <a:bodyPr wrap="square" lIns="0" tIns="0" rIns="0" bIns="0" rtlCol="0" anchor="t"/>
           <a:lstStyle/>
           <a:p>
-            <a:pPr indent="0" marL="0">
+            <a:pPr marL="0" indent="0">
               <a:buNone/>
             </a:pPr>
             <a:r>
@@ -9405,14 +9242,14 @@
       </p:sp>
       <p:pic>
         <p:nvPicPr>
-          <p:cNvPr id="26" name="Image 3" descr="Después">    </p:cNvPr>
+          <p:cNvPr id="26" name="Image 3" descr="Después"/>
           <p:cNvPicPr>
             <a:picLocks noChangeAspect="1"/>
           </p:cNvPicPr>
           <p:nvPr/>
         </p:nvPicPr>
         <p:blipFill>
-          <a:blip r:embed="rId4"/>
+          <a:blip r:embed="rId6"/>
           <a:stretch>
             <a:fillRect/>
           </a:stretch>
@@ -9448,7 +9285,7 @@
           <a:bodyPr wrap="square" lIns="0" tIns="0" rIns="0" bIns="0" rtlCol="0" anchor="ctr"/>
           <a:lstStyle/>
           <a:p>
-            <a:pPr indent="0" marL="0">
+            <a:pPr marL="0" indent="0">
               <a:buNone/>
             </a:pPr>
             <a:r>
@@ -9484,7 +9321,7 @@
           <a:bodyPr wrap="square" lIns="0" tIns="0" rIns="0" bIns="0" rtlCol="0" anchor="t"/>
           <a:lstStyle/>
           <a:p>
-            <a:pPr indent="0" marL="0">
+            <a:pPr marL="0" indent="0">
               <a:buNone/>
             </a:pPr>
             <a:r>
@@ -9543,14 +9380,14 @@
       </p:sp>
       <p:pic>
         <p:nvPicPr>
-          <p:cNvPr id="31" name="Image 4" descr="Sin inventar">    </p:cNvPr>
+          <p:cNvPr id="31" name="Image 4" descr="Sin inventar"/>
           <p:cNvPicPr>
             <a:picLocks noChangeAspect="1"/>
           </p:cNvPicPr>
           <p:nvPr/>
         </p:nvPicPr>
         <p:blipFill>
-          <a:blip r:embed="rId5"/>
+          <a:blip r:embed="rId7"/>
           <a:stretch>
             <a:fillRect/>
           </a:stretch>
@@ -9586,7 +9423,7 @@
           <a:bodyPr wrap="square" lIns="0" tIns="0" rIns="0" bIns="0" rtlCol="0" anchor="ctr"/>
           <a:lstStyle/>
           <a:p>
-            <a:pPr indent="0" marL="0">
+            <a:pPr marL="0" indent="0">
               <a:buNone/>
             </a:pPr>
             <a:r>
@@ -9597,9 +9434,6 @@
               </a:rPr>
               <a:t>No inventamos resultados: </a:t>
             </a:r>
-            <a:pPr indent="0" marL="0">
-              <a:buNone/>
-            </a:pPr>
             <a:r>
               <a:rPr lang="en-US" sz="2000" dirty="0">
                 <a:solidFill>
@@ -9614,7 +9448,7 @@
       </p:sp>
       <p:sp>
         <p:nvSpPr>
-          <p:cNvPr id="25" name="Slide Number Placeholder 0"/>
+          <p:cNvPr id="33" name="Slide Number Placeholder 0"/>
           <p:cNvSpPr>
             <a:spLocks noGrp="1"/>
           </p:cNvSpPr>
@@ -9632,7 +9466,7 @@
           </a:prstGeom>
           <a:extLst>
             <a:ext uri="{C572A759-6A51-4108-AA02-DFA0A04FC94B}">
-              <ma14:wrappingTextBoxFlag xmlns:ma14="http://schemas.microsoft.com/office/mac/drawingml/2011/main" val="0"/>
+              <ma14:wrappingTextBoxFlag xmlns:ma14="http://schemas.microsoft.com/office/mac/drawingml/2011/main" xmlns="" val="0"/>
             </a:ext>
           </a:extLst>
         </p:spPr>
@@ -9650,7 +9484,7 @@
           <a:p>
             <a:pPr algn="r"/>
             <a:fld id="{F7021451-1387-4CA6-816F-3879F97B5CBC}" type="slidenum">
-              <a:rPr b="0" lang="en-US"/>
+              <a:rPr lang="en-US" b="0"/>
               <a:t>7</a:t>
             </a:fld>
             <a:endParaRPr lang="en-US"/>
@@ -9685,9 +9519,11 @@
       <p:sp>
         <p:nvSpPr>
           <p:cNvPr id="2" name="Text 0"/>
-          <p:cNvSpPr/>
+          <p:cNvSpPr>
+            <a:spLocks noGrp="1"/>
+          </p:cNvSpPr>
           <p:nvPr>
-            <p:ph idx="100" type="title" hasCustomPrompt="1"/>
+            <p:ph type="title" idx="100" hasCustomPrompt="1"/>
           </p:nvPr>
         </p:nvSpPr>
         <p:spPr>
@@ -9705,7 +9541,7 @@
           <a:bodyPr wrap="square" lIns="0" tIns="0" rIns="0" bIns="0" rtlCol="0" anchor="ctr"/>
           <a:lstStyle/>
           <a:p>
-            <a:pPr algn="l" indent="0" marL="0">
+            <a:pPr marL="0" indent="0" algn="l">
               <a:buNone/>
             </a:pPr>
             <a:r>
@@ -9763,7 +9599,7 @@
           <a:bodyPr wrap="square" lIns="0" tIns="0" rIns="0" bIns="0" rtlCol="0" anchor="ctr"/>
           <a:lstStyle/>
           <a:p>
-            <a:pPr algn="ctr" indent="0" marL="0">
+            <a:pPr marL="0" indent="0" algn="ctr">
               <a:buNone/>
             </a:pPr>
             <a:r>
@@ -9799,7 +9635,7 @@
           <a:bodyPr wrap="square" lIns="0" tIns="0" rIns="0" bIns="0" rtlCol="0" anchor="ctr"/>
           <a:lstStyle/>
           <a:p>
-            <a:pPr indent="0" marL="0">
+            <a:pPr marL="0" indent="0">
               <a:buNone/>
             </a:pPr>
             <a:r>
@@ -9857,7 +9693,7 @@
           <a:bodyPr wrap="square" lIns="0" tIns="0" rIns="0" bIns="0" rtlCol="0" anchor="t"/>
           <a:lstStyle/>
           <a:p>
-            <a:pPr indent="0" marL="0">
+            <a:pPr marL="0" indent="0">
               <a:lnSpc>
                 <a:spcPct val="95000"/>
               </a:lnSpc>
@@ -9874,138 +9710,92 @@
               </a:rPr>
               <a:t>Esta es nuestra propuesta: </a:t>
             </a:r>
-            <a:pPr indent="0" marL="0">
+            <a:r>
+              <a:rPr lang="en-US" sz="1800" b="1" dirty="0">
+                <a:solidFill>
+                  <a:schemeClr val="accent1"/>
+                </a:solidFill>
+                <a:latin typeface="Courier New" pitchFamily="34" charset="0"/>
+                <a:ea typeface="Courier New" pitchFamily="34" charset="-122"/>
+                <a:cs typeface="Courier New" pitchFamily="34" charset="-120"/>
+              </a:rPr>
+              <a:t>[resumen sin datos personales]</a:t>
+            </a:r>
+            <a:r>
+              <a:rPr lang="en-US" sz="1800" dirty="0">
+                <a:solidFill>
+                  <a:schemeClr val="bg1"/>
+                </a:solidFill>
+                <a:latin typeface="Courier New" pitchFamily="34" charset="0"/>
+                <a:ea typeface="Courier New" pitchFamily="34" charset="-122"/>
+                <a:cs typeface="Courier New" pitchFamily="34" charset="-120"/>
+              </a:rPr>
+              <a:t>.</a:t>
+            </a:r>
+            <a:endParaRPr lang="en-US" sz="1800" dirty="0"/>
+          </a:p>
+          <a:p>
+            <a:pPr marL="0" indent="0">
               <a:lnSpc>
                 <a:spcPct val="95000"/>
               </a:lnSpc>
               <a:buNone/>
             </a:pPr>
             <a:r>
-              <a:rPr lang="en-US" sz="1800" b="1" dirty="0">
-                <a:solidFill>
-                  <a:schemeClr val="accent1"/>
+              <a:rPr lang="en-US" sz="1800" dirty="0">
+                <a:solidFill>
+                  <a:schemeClr val="bg1"/>
                 </a:solidFill>
                 <a:latin typeface="Courier New" pitchFamily="34" charset="0"/>
                 <a:ea typeface="Courier New" pitchFamily="34" charset="-122"/>
                 <a:cs typeface="Courier New" pitchFamily="34" charset="-120"/>
               </a:rPr>
-              <a:t>[</a:t>
-            </a:r>
-            <a:pPr indent="0" marL="0">
+              <a:t>Propón cinco indicadores medibles para comprobar si funciona durante</a:t>
+            </a:r>
+            <a:endParaRPr lang="en-US" sz="1800" dirty="0"/>
+          </a:p>
+          <a:p>
+            <a:pPr marL="0" indent="0">
               <a:lnSpc>
                 <a:spcPct val="95000"/>
               </a:lnSpc>
               <a:buNone/>
             </a:pPr>
             <a:r>
-              <a:rPr lang="en-US" sz="1800" b="1" dirty="0">
-                <a:solidFill>
-                  <a:schemeClr val="accent1"/>
+              <a:rPr lang="en-US" sz="1800" dirty="0">
+                <a:solidFill>
+                  <a:schemeClr val="bg1"/>
                 </a:solidFill>
                 <a:latin typeface="Courier New" pitchFamily="34" charset="0"/>
                 <a:ea typeface="Courier New" pitchFamily="34" charset="-122"/>
                 <a:cs typeface="Courier New" pitchFamily="34" charset="-120"/>
               </a:rPr>
-              <a:t>resumen sin datos personales</a:t>
-            </a:r>
-            <a:pPr indent="0" marL="0">
+              <a:t>una prueba de un mes. Para cada uno, explica cómo medirlo antes y</a:t>
+            </a:r>
+            <a:endParaRPr lang="en-US" sz="1800" dirty="0"/>
+          </a:p>
+          <a:p>
+            <a:pPr marL="0" indent="0">
               <a:lnSpc>
                 <a:spcPct val="95000"/>
               </a:lnSpc>
               <a:buNone/>
             </a:pPr>
             <a:r>
-              <a:rPr lang="en-US" sz="1800" b="1" dirty="0">
-                <a:solidFill>
-                  <a:schemeClr val="accent1"/>
+              <a:rPr lang="en-US" sz="1800" dirty="0">
+                <a:solidFill>
+                  <a:schemeClr val="bg1"/>
                 </a:solidFill>
                 <a:latin typeface="Courier New" pitchFamily="34" charset="0"/>
                 <a:ea typeface="Courier New" pitchFamily="34" charset="-122"/>
                 <a:cs typeface="Courier New" pitchFamily="34" charset="-120"/>
               </a:rPr>
-              <a:t>]</a:t>
-            </a:r>
-            <a:pPr indent="0" marL="0">
-              <a:lnSpc>
-                <a:spcPct val="95000"/>
-              </a:lnSpc>
-              <a:buNone/>
-            </a:pPr>
-            <a:r>
-              <a:rPr lang="en-US" sz="1800" dirty="0">
-                <a:solidFill>
-                  <a:schemeClr val="bg1"/>
-                </a:solidFill>
-                <a:latin typeface="Courier New" pitchFamily="34" charset="0"/>
-                <a:ea typeface="Courier New" pitchFamily="34" charset="-122"/>
-                <a:cs typeface="Courier New" pitchFamily="34" charset="-120"/>
-              </a:rPr>
-              <a:t>.</a:t>
+              <a:t>después de la prueba con herramientas sencillas. No inventes</a:t>
             </a:r>
             <a:endParaRPr lang="en-US" sz="1800" dirty="0"/>
           </a:p>
           <a:p>
-            <a:pPr indent="0" marL="0">
-              <a:lnSpc>
-                <a:spcPct val="95000"/>
-              </a:lnSpc>
-              <a:buNone/>
-            </a:pPr>
-            <a:r>
-              <a:rPr lang="en-US" sz="1800" dirty="0">
-                <a:solidFill>
-                  <a:schemeClr val="bg1"/>
-                </a:solidFill>
-                <a:latin typeface="Courier New" pitchFamily="34" charset="0"/>
-                <a:ea typeface="Courier New" pitchFamily="34" charset="-122"/>
-                <a:cs typeface="Courier New" pitchFamily="34" charset="-120"/>
-              </a:rPr>
-              <a:t>Propón cinco indicadores medibles para comprobar si funciona durante</a:t>
-            </a:r>
-            <a:endParaRPr lang="en-US" sz="1800" dirty="0"/>
-          </a:p>
-          <a:p>
-            <a:pPr indent="0" marL="0">
-              <a:lnSpc>
-                <a:spcPct val="95000"/>
-              </a:lnSpc>
-              <a:buNone/>
-            </a:pPr>
-            <a:r>
-              <a:rPr lang="en-US" sz="1800" dirty="0">
-                <a:solidFill>
-                  <a:schemeClr val="bg1"/>
-                </a:solidFill>
-                <a:latin typeface="Courier New" pitchFamily="34" charset="0"/>
-                <a:ea typeface="Courier New" pitchFamily="34" charset="-122"/>
-                <a:cs typeface="Courier New" pitchFamily="34" charset="-120"/>
-              </a:rPr>
-              <a:t>una prueba de un mes. Para cada uno, explica cómo medirlo antes y</a:t>
-            </a:r>
-            <a:endParaRPr lang="en-US" sz="1800" dirty="0"/>
-          </a:p>
-          <a:p>
-            <a:pPr indent="0" marL="0">
-              <a:lnSpc>
-                <a:spcPct val="95000"/>
-              </a:lnSpc>
-              <a:buNone/>
-            </a:pPr>
-            <a:r>
-              <a:rPr lang="en-US" sz="1800" dirty="0">
-                <a:solidFill>
-                  <a:schemeClr val="bg1"/>
-                </a:solidFill>
-                <a:latin typeface="Courier New" pitchFamily="34" charset="0"/>
-                <a:ea typeface="Courier New" pitchFamily="34" charset="-122"/>
-                <a:cs typeface="Courier New" pitchFamily="34" charset="-120"/>
-              </a:rPr>
-              <a:t>después de la prueba con herramientas sencillas. No inventes</a:t>
-            </a:r>
-            <a:endParaRPr lang="en-US" sz="1800" dirty="0"/>
-          </a:p>
-          <a:p>
-            <a:pPr indent="0" marL="0">
+            <a:pPr marL="0" indent="0">
               <a:lnSpc>
                 <a:spcPct val="95000"/>
               </a:lnSpc>
@@ -10070,14 +9860,14 @@
       </p:sp>
       <p:pic>
         <p:nvPicPr>
-          <p:cNvPr id="10" name="Image 0" descr="Elegir">    </p:cNvPr>
+          <p:cNvPr id="10" name="Image 0" descr="Elegir"/>
           <p:cNvPicPr>
             <a:picLocks noChangeAspect="1"/>
           </p:cNvPicPr>
           <p:nvPr/>
         </p:nvPicPr>
         <p:blipFill>
-          <a:blip r:embed="rId1"/>
+          <a:blip r:embed="rId3"/>
           <a:stretch>
             <a:fillRect/>
           </a:stretch>
@@ -10113,7 +9903,7 @@
           <a:bodyPr wrap="square" lIns="0" tIns="0" rIns="0" bIns="0" rtlCol="0" anchor="ctr"/>
           <a:lstStyle/>
           <a:p>
-            <a:pPr indent="0" marL="0">
+            <a:pPr marL="0" indent="0">
               <a:buNone/>
             </a:pPr>
             <a:r>
@@ -10148,7 +9938,7 @@
           </a:prstGeom>
           <a:extLst>
             <a:ext uri="{C572A759-6A51-4108-AA02-DFA0A04FC94B}">
-              <ma14:wrappingTextBoxFlag xmlns:ma14="http://schemas.microsoft.com/office/mac/drawingml/2011/main" val="0"/>
+              <ma14:wrappingTextBoxFlag xmlns:ma14="http://schemas.microsoft.com/office/mac/drawingml/2011/main" xmlns="" val="0"/>
             </a:ext>
           </a:extLst>
         </p:spPr>
@@ -10166,7 +9956,7 @@
           <a:p>
             <a:pPr algn="r"/>
             <a:fld id="{F7021451-1387-4CA6-816F-3879F97B5CBC}" type="slidenum">
-              <a:rPr b="0" lang="en-US"/>
+              <a:rPr lang="en-US" b="0"/>
               <a:t>8</a:t>
             </a:fld>
             <a:endParaRPr lang="en-US"/>
@@ -10201,9 +9991,11 @@
       <p:sp>
         <p:nvSpPr>
           <p:cNvPr id="2" name="Text 0"/>
-          <p:cNvSpPr/>
+          <p:cNvSpPr>
+            <a:spLocks noGrp="1"/>
+          </p:cNvSpPr>
           <p:nvPr>
-            <p:ph idx="100" type="title" hasCustomPrompt="1"/>
+            <p:ph type="title" idx="100" hasCustomPrompt="1"/>
           </p:nvPr>
         </p:nvSpPr>
         <p:spPr>
@@ -10221,7 +10013,7 @@
           <a:bodyPr wrap="square" lIns="0" tIns="0" rIns="0" bIns="0" rtlCol="0" anchor="ctr"/>
           <a:lstStyle/>
           <a:p>
-            <a:pPr algn="l" indent="0" marL="0">
+            <a:pPr marL="0" indent="0" algn="l">
               <a:buNone/>
             </a:pPr>
             <a:r>
@@ -10279,7 +10071,7 @@
           <a:bodyPr wrap="square" lIns="0" tIns="0" rIns="0" bIns="0" rtlCol="0" anchor="ctr"/>
           <a:lstStyle/>
           <a:p>
-            <a:pPr algn="ctr" indent="0" marL="0">
+            <a:pPr marL="0" indent="0" algn="ctr">
               <a:buNone/>
             </a:pPr>
             <a:r>
@@ -10310,18 +10102,48 @@
         </p:nvGraphicFramePr>
         <p:xfrm>
           <a:off x="548640" y="1463040"/>
-          <a:ext cx="11094415" cy="914400"/>
+          <a:ext cx="11094415" cy="3291840"/>
         </p:xfrm>
         <a:graphic>
           <a:graphicData uri="http://schemas.openxmlformats.org/drawingml/2006/table">
             <a:tbl>
               <a:tblPr/>
               <a:tblGrid>
-                <a:gridCol w="640080"/>
-                <a:gridCol w="2926080"/>
-                <a:gridCol w="2926080"/>
-                <a:gridCol w="2286000"/>
-                <a:gridCol w="2316175"/>
+                <a:gridCol w="640080">
+                  <a:extLst>
+                    <a:ext uri="{9D8B030D-6E8A-4147-A177-3AD203B41FA5}">
+                      <a16:colId xmlns:a16="http://schemas.microsoft.com/office/drawing/2014/main" val="20000"/>
+                    </a:ext>
+                  </a:extLst>
+                </a:gridCol>
+                <a:gridCol w="2926080">
+                  <a:extLst>
+                    <a:ext uri="{9D8B030D-6E8A-4147-A177-3AD203B41FA5}">
+                      <a16:colId xmlns:a16="http://schemas.microsoft.com/office/drawing/2014/main" val="20001"/>
+                    </a:ext>
+                  </a:extLst>
+                </a:gridCol>
+                <a:gridCol w="2926080">
+                  <a:extLst>
+                    <a:ext uri="{9D8B030D-6E8A-4147-A177-3AD203B41FA5}">
+                      <a16:colId xmlns:a16="http://schemas.microsoft.com/office/drawing/2014/main" val="20002"/>
+                    </a:ext>
+                  </a:extLst>
+                </a:gridCol>
+                <a:gridCol w="2286000">
+                  <a:extLst>
+                    <a:ext uri="{9D8B030D-6E8A-4147-A177-3AD203B41FA5}">
+                      <a16:colId xmlns:a16="http://schemas.microsoft.com/office/drawing/2014/main" val="20003"/>
+                    </a:ext>
+                  </a:extLst>
+                </a:gridCol>
+                <a:gridCol w="2316175">
+                  <a:extLst>
+                    <a:ext uri="{9D8B030D-6E8A-4147-A177-3AD203B41FA5}">
+                      <a16:colId xmlns:a16="http://schemas.microsoft.com/office/drawing/2014/main" val="20004"/>
+                    </a:ext>
+                  </a:extLst>
+                </a:gridCol>
               </a:tblGrid>
               <a:tr h="548640">
                 <a:tc>
@@ -10329,13 +10151,13 @@
                     <a:bodyPr/>
                     <a:lstStyle/>
                     <a:p>
-                      <a:pPr algn="ctr" indent="0" marL="0">
+                      <a:pPr marL="0" indent="0" algn="ctr">
                         <a:buNone/>
                       </a:pPr>
                       <a:endParaRPr lang="en-US" sz="1800" dirty="0"/>
                     </a:p>
                   </a:txBody>
-                  <a:tcPr marL="91440" marR="91440" marT="91440" marB="91440" anchor="ctr">
+                  <a:tcPr marT="91440" marB="91440" anchor="ctr">
                     <a:lnL w="12700" cap="flat" cmpd="sng" algn="ctr">
                       <a:solidFill>
                         <a:srgbClr val="8A94A6"/>
@@ -10382,7 +10204,7 @@
                     <a:bodyPr/>
                     <a:lstStyle/>
                     <a:p>
-                      <a:pPr algn="ctr" indent="0" marL="0">
+                      <a:pPr marL="0" indent="0" algn="ctr">
                         <a:buNone/>
                       </a:pPr>
                       <a:r>
@@ -10396,7 +10218,7 @@
                       <a:endParaRPr lang="en-US" sz="1800" dirty="0"/>
                     </a:p>
                   </a:txBody>
-                  <a:tcPr marL="91440" marR="91440" marT="91440" marB="91440" anchor="ctr">
+                  <a:tcPr marT="91440" marB="91440" anchor="ctr">
                     <a:lnL w="12700" cap="flat" cmpd="sng" algn="ctr">
                       <a:solidFill>
                         <a:srgbClr val="8A94A6"/>
@@ -10443,7 +10265,7 @@
                     <a:bodyPr/>
                     <a:lstStyle/>
                     <a:p>
-                      <a:pPr algn="ctr" indent="0" marL="0">
+                      <a:pPr marL="0" indent="0" algn="ctr">
                         <a:buNone/>
                       </a:pPr>
                       <a:r>
@@ -10457,7 +10279,7 @@
                       <a:endParaRPr lang="en-US" sz="1800" dirty="0"/>
                     </a:p>
                   </a:txBody>
-                  <a:tcPr marL="91440" marR="91440" marT="91440" marB="91440" anchor="ctr">
+                  <a:tcPr marT="91440" marB="91440" anchor="ctr">
                     <a:lnL w="12700" cap="flat" cmpd="sng" algn="ctr">
                       <a:solidFill>
                         <a:srgbClr val="8A94A6"/>
@@ -10504,7 +10326,7 @@
                     <a:bodyPr/>
                     <a:lstStyle/>
                     <a:p>
-                      <a:pPr algn="ctr" indent="0" marL="0">
+                      <a:pPr marL="0" indent="0" algn="ctr">
                         <a:buNone/>
                       </a:pPr>
                       <a:r>
@@ -10518,7 +10340,7 @@
                       <a:endParaRPr lang="en-US" sz="1800" dirty="0"/>
                     </a:p>
                   </a:txBody>
-                  <a:tcPr marL="91440" marR="91440" marT="91440" marB="91440" anchor="ctr">
+                  <a:tcPr marT="91440" marB="91440" anchor="ctr">
                     <a:lnL w="12700" cap="flat" cmpd="sng" algn="ctr">
                       <a:solidFill>
                         <a:srgbClr val="8A94A6"/>
@@ -10565,7 +10387,7 @@
                     <a:bodyPr/>
                     <a:lstStyle/>
                     <a:p>
-                      <a:pPr algn="ctr" indent="0" marL="0">
+                      <a:pPr marL="0" indent="0" algn="ctr">
                         <a:buNone/>
                       </a:pPr>
                       <a:r>
@@ -10579,7 +10401,7 @@
                       <a:endParaRPr lang="en-US" sz="1800" dirty="0"/>
                     </a:p>
                   </a:txBody>
-                  <a:tcPr marL="91440" marR="91440" marT="91440" marB="91440" anchor="ctr">
+                  <a:tcPr marT="91440" marB="91440" anchor="ctr">
                     <a:lnL w="12700" cap="flat" cmpd="sng" algn="ctr">
                       <a:solidFill>
                         <a:srgbClr val="8A94A6"/>
@@ -10621,6 +10443,11 @@
                     </a:solidFill>
                   </a:tcPr>
                 </a:tc>
+                <a:extLst>
+                  <a:ext uri="{0D108BD9-81ED-4DB2-BD59-A6C34878D82A}">
+                    <a16:rowId xmlns:a16="http://schemas.microsoft.com/office/drawing/2014/main" val="10000"/>
+                  </a:ext>
+                </a:extLst>
               </a:tr>
               <a:tr h="1371600">
                 <a:tc>
@@ -10628,7 +10455,7 @@
                     <a:bodyPr/>
                     <a:lstStyle/>
                     <a:p>
-                      <a:pPr algn="ctr" indent="0" marL="0">
+                      <a:pPr marL="0" indent="0" algn="ctr">
                         <a:buNone/>
                       </a:pPr>
                       <a:r>
@@ -10642,7 +10469,7 @@
                       <a:endParaRPr lang="en-US" sz="1800" dirty="0"/>
                     </a:p>
                   </a:txBody>
-                  <a:tcPr marL="91440" marR="91440" marT="91440" marB="91440" anchor="ctr">
+                  <a:tcPr marT="91440" marB="91440" anchor="ctr">
                     <a:lnL w="12700" cap="flat" cmpd="sng" algn="ctr">
                       <a:solidFill>
                         <a:srgbClr val="8A94A6"/>
@@ -10686,13 +10513,13 @@
                     <a:bodyPr/>
                     <a:lstStyle/>
                     <a:p>
-                      <a:pPr algn="ctr" indent="0" marL="0">
+                      <a:pPr marL="0" indent="0" algn="ctr">
                         <a:buNone/>
                       </a:pPr>
                       <a:endParaRPr lang="en-US" sz="1800" dirty="0"/>
                     </a:p>
                   </a:txBody>
-                  <a:tcPr marL="91440" marR="91440" marT="91440" marB="91440" anchor="ctr">
+                  <a:tcPr marT="91440" marB="91440" anchor="ctr">
                     <a:lnL w="12700" cap="flat" cmpd="sng" algn="ctr">
                       <a:solidFill>
                         <a:srgbClr val="8A94A6"/>
@@ -10736,13 +10563,13 @@
                     <a:bodyPr/>
                     <a:lstStyle/>
                     <a:p>
-                      <a:pPr algn="ctr" indent="0" marL="0">
+                      <a:pPr marL="0" indent="0" algn="ctr">
                         <a:buNone/>
                       </a:pPr>
                       <a:endParaRPr lang="en-US" sz="1800" dirty="0"/>
                     </a:p>
                   </a:txBody>
-                  <a:tcPr marL="91440" marR="91440" marT="91440" marB="91440" anchor="ctr">
+                  <a:tcPr marT="91440" marB="91440" anchor="ctr">
                     <a:lnL w="12700" cap="flat" cmpd="sng" algn="ctr">
                       <a:solidFill>
                         <a:srgbClr val="8A94A6"/>
@@ -10786,13 +10613,13 @@
                     <a:bodyPr/>
                     <a:lstStyle/>
                     <a:p>
-                      <a:pPr algn="ctr" indent="0" marL="0">
+                      <a:pPr marL="0" indent="0" algn="ctr">
                         <a:buNone/>
                       </a:pPr>
                       <a:endParaRPr lang="en-US" sz="1800" dirty="0"/>
                     </a:p>
                   </a:txBody>
-                  <a:tcPr marL="91440" marR="91440" marT="91440" marB="91440" anchor="ctr">
+                  <a:tcPr marT="91440" marB="91440" anchor="ctr">
                     <a:lnL w="12700" cap="flat" cmpd="sng" algn="ctr">
                       <a:solidFill>
                         <a:srgbClr val="8A94A6"/>
@@ -10836,13 +10663,13 @@
                     <a:bodyPr/>
                     <a:lstStyle/>
                     <a:p>
-                      <a:pPr algn="ctr" indent="0" marL="0">
+                      <a:pPr marL="0" indent="0" algn="ctr">
                         <a:buNone/>
                       </a:pPr>
                       <a:endParaRPr lang="en-US" sz="1800" dirty="0"/>
                     </a:p>
                   </a:txBody>
-                  <a:tcPr marL="91440" marR="91440" marT="91440" marB="91440" anchor="ctr">
+                  <a:tcPr marT="91440" marB="91440" anchor="ctr">
                     <a:lnL w="12700" cap="flat" cmpd="sng" algn="ctr">
                       <a:solidFill>
                         <a:srgbClr val="8A94A6"/>
@@ -10881,6 +10708,11 @@
                     </a:lnB>
                   </a:tcPr>
                 </a:tc>
+                <a:extLst>
+                  <a:ext uri="{0D108BD9-81ED-4DB2-BD59-A6C34878D82A}">
+                    <a16:rowId xmlns:a16="http://schemas.microsoft.com/office/drawing/2014/main" val="10001"/>
+                  </a:ext>
+                </a:extLst>
               </a:tr>
               <a:tr h="1371600">
                 <a:tc>
@@ -10888,7 +10720,7 @@
                     <a:bodyPr/>
                     <a:lstStyle/>
                     <a:p>
-                      <a:pPr algn="ctr" indent="0" marL="0">
+                      <a:pPr marL="0" indent="0" algn="ctr">
                         <a:buNone/>
                       </a:pPr>
                       <a:r>
@@ -10902,7 +10734,7 @@
                       <a:endParaRPr lang="en-US" sz="1800" dirty="0"/>
                     </a:p>
                   </a:txBody>
-                  <a:tcPr marL="91440" marR="91440" marT="91440" marB="91440" anchor="ctr">
+                  <a:tcPr marT="91440" marB="91440" anchor="ctr">
                     <a:lnL w="12700" cap="flat" cmpd="sng" algn="ctr">
                       <a:solidFill>
                         <a:srgbClr val="8A94A6"/>
@@ -10946,13 +10778,13 @@
                     <a:bodyPr/>
                     <a:lstStyle/>
                     <a:p>
-                      <a:pPr algn="ctr" indent="0" marL="0">
+                      <a:pPr marL="0" indent="0" algn="ctr">
                         <a:buNone/>
                       </a:pPr>
                       <a:endParaRPr lang="en-US" sz="1800" dirty="0"/>
                     </a:p>
                   </a:txBody>
-                  <a:tcPr marL="91440" marR="91440" marT="91440" marB="91440" anchor="ctr">
+                  <a:tcPr marT="91440" marB="91440" anchor="ctr">
                     <a:lnL w="12700" cap="flat" cmpd="sng" algn="ctr">
                       <a:solidFill>
                         <a:srgbClr val="8A94A6"/>
@@ -10996,13 +10828,13 @@
                     <a:bodyPr/>
                     <a:lstStyle/>
                     <a:p>
-                      <a:pPr algn="ctr" indent="0" marL="0">
+                      <a:pPr marL="0" indent="0" algn="ctr">
                         <a:buNone/>
                       </a:pPr>
                       <a:endParaRPr lang="en-US" sz="1800" dirty="0"/>
                     </a:p>
                   </a:txBody>
-                  <a:tcPr marL="91440" marR="91440" marT="91440" marB="91440" anchor="ctr">
+                  <a:tcPr marT="91440" marB="91440" anchor="ctr">
                     <a:lnL w="12700" cap="flat" cmpd="sng" algn="ctr">
                       <a:solidFill>
                         <a:srgbClr val="8A94A6"/>
@@ -11046,13 +10878,13 @@
                     <a:bodyPr/>
                     <a:lstStyle/>
                     <a:p>
-                      <a:pPr algn="ctr" indent="0" marL="0">
+                      <a:pPr marL="0" indent="0" algn="ctr">
                         <a:buNone/>
                       </a:pPr>
                       <a:endParaRPr lang="en-US" sz="1800" dirty="0"/>
                     </a:p>
                   </a:txBody>
-                  <a:tcPr marL="91440" marR="91440" marT="91440" marB="91440" anchor="ctr">
+                  <a:tcPr marT="91440" marB="91440" anchor="ctr">
                     <a:lnL w="12700" cap="flat" cmpd="sng" algn="ctr">
                       <a:solidFill>
                         <a:srgbClr val="8A94A6"/>
@@ -11096,13 +10928,13 @@
                     <a:bodyPr/>
                     <a:lstStyle/>
                     <a:p>
-                      <a:pPr algn="ctr" indent="0" marL="0">
+                      <a:pPr marL="0" indent="0" algn="ctr">
                         <a:buNone/>
                       </a:pPr>
                       <a:endParaRPr lang="en-US" sz="1800" dirty="0"/>
                     </a:p>
                   </a:txBody>
-                  <a:tcPr marL="91440" marR="91440" marT="91440" marB="91440" anchor="ctr">
+                  <a:tcPr marT="91440" marB="91440" anchor="ctr">
                     <a:lnL w="12700" cap="flat" cmpd="sng" algn="ctr">
                       <a:solidFill>
                         <a:srgbClr val="8A94A6"/>
@@ -11141,6 +10973,11 @@
                     </a:lnB>
                   </a:tcPr>
                 </a:tc>
+                <a:extLst>
+                  <a:ext uri="{0D108BD9-81ED-4DB2-BD59-A6C34878D82A}">
+                    <a16:rowId xmlns:a16="http://schemas.microsoft.com/office/drawing/2014/main" val="10002"/>
+                  </a:ext>
+                </a:extLst>
               </a:tr>
             </a:tbl>
           </a:graphicData>
@@ -11167,7 +11004,7 @@
           <a:bodyPr wrap="square" lIns="0" tIns="0" rIns="0" bIns="0" rtlCol="0" anchor="ctr"/>
           <a:lstStyle/>
           <a:p>
-            <a:pPr indent="0" marL="0">
+            <a:pPr marL="0" indent="0">
               <a:buNone/>
             </a:pPr>
             <a:r>
@@ -11202,7 +11039,7 @@
           </a:prstGeom>
           <a:extLst>
             <a:ext uri="{C572A759-6A51-4108-AA02-DFA0A04FC94B}">
-              <ma14:wrappingTextBoxFlag xmlns:ma14="http://schemas.microsoft.com/office/mac/drawingml/2011/main" val="0"/>
+              <ma14:wrappingTextBoxFlag xmlns:ma14="http://schemas.microsoft.com/office/mac/drawingml/2011/main" xmlns="" val="0"/>
             </a:ext>
           </a:extLst>
         </p:spPr>
@@ -11220,7 +11057,7 @@
           <a:p>
             <a:pPr algn="r"/>
             <a:fld id="{F7021451-1387-4CA6-816F-3879F97B5CBC}" type="slidenum">
-              <a:rPr b="0" lang="en-US"/>
+              <a:rPr lang="en-US" b="0"/>
               <a:t>9</a:t>
             </a:fld>
             <a:endParaRPr lang="en-US"/>
@@ -11528,4 +11365,299 @@
     </a:ext>
   </a:extLst>
 </a:theme>
+</file>
+
+<file path=ppt/theme/theme2.xml><?xml version="1.0" encoding="utf-8"?>
+<a:theme xmlns:a="http://schemas.openxmlformats.org/drawingml/2006/main" name="Tema de Office">
+  <a:themeElements>
+    <a:clrScheme name="Office">
+      <a:dk1>
+        <a:sysClr val="windowText" lastClr="000000"/>
+      </a:dk1>
+      <a:lt1>
+        <a:sysClr val="window" lastClr="FFFFFF"/>
+      </a:lt1>
+      <a:dk2>
+        <a:srgbClr val="44546A"/>
+      </a:dk2>
+      <a:lt2>
+        <a:srgbClr val="E7E6E6"/>
+      </a:lt2>
+      <a:accent1>
+        <a:srgbClr val="4472C4"/>
+      </a:accent1>
+      <a:accent2>
+        <a:srgbClr val="ED7D31"/>
+      </a:accent2>
+      <a:accent3>
+        <a:srgbClr val="A5A5A5"/>
+      </a:accent3>
+      <a:accent4>
+        <a:srgbClr val="FFC000"/>
+      </a:accent4>
+      <a:accent5>
+        <a:srgbClr val="5B9BD5"/>
+      </a:accent5>
+      <a:accent6>
+        <a:srgbClr val="70AD47"/>
+      </a:accent6>
+      <a:hlink>
+        <a:srgbClr val="0563C1"/>
+      </a:hlink>
+      <a:folHlink>
+        <a:srgbClr val="954F72"/>
+      </a:folHlink>
+    </a:clrScheme>
+    <a:fontScheme name="Office">
+      <a:majorFont>
+        <a:latin typeface="Calibri Light" panose="020F0302020204030204"/>
+        <a:ea typeface=""/>
+        <a:cs typeface=""/>
+        <a:font script="Jpan" typeface="游ゴシック Light"/>
+        <a:font script="Hang" typeface="맑은 고딕"/>
+        <a:font script="Hans" typeface="等线 Light"/>
+        <a:font script="Hant" typeface="新細明體"/>
+        <a:font script="Arab" typeface="Times New Roman"/>
+        <a:font script="Hebr" typeface="Times New Roman"/>
+        <a:font script="Thai" typeface="Angsana New"/>
+        <a:font script="Ethi" typeface="Nyala"/>
+        <a:font script="Beng" typeface="Vrinda"/>
+        <a:font script="Gujr" typeface="Shruti"/>
+        <a:font script="Khmr" typeface="MoolBoran"/>
+        <a:font script="Knda" typeface="Tunga"/>
+        <a:font script="Guru" typeface="Raavi"/>
+        <a:font script="Cans" typeface="Euphemia"/>
+        <a:font script="Cher" typeface="Plantagenet Cherokee"/>
+        <a:font script="Yiii" typeface="Microsoft Yi Baiti"/>
+        <a:font script="Tibt" typeface="Microsoft Himalaya"/>
+        <a:font script="Thaa" typeface="MV Boli"/>
+        <a:font script="Deva" typeface="Mangal"/>
+        <a:font script="Telu" typeface="Gautami"/>
+        <a:font script="Taml" typeface="Latha"/>
+        <a:font script="Syrc" typeface="Estrangelo Edessa"/>
+        <a:font script="Orya" typeface="Kalinga"/>
+        <a:font script="Mlym" typeface="Kartika"/>
+        <a:font script="Laoo" typeface="DokChampa"/>
+        <a:font script="Sinh" typeface="Iskoola Pota"/>
+        <a:font script="Mong" typeface="Mongolian Baiti"/>
+        <a:font script="Viet" typeface="Times New Roman"/>
+        <a:font script="Uigh" typeface="Microsoft Uighur"/>
+        <a:font script="Geor" typeface="Sylfaen"/>
+        <a:font script="Armn" typeface="Arial"/>
+        <a:font script="Bugi" typeface="Leelawadee UI"/>
+        <a:font script="Bopo" typeface="Microsoft JhengHei"/>
+        <a:font script="Java" typeface="Javanese Text"/>
+        <a:font script="Lisu" typeface="Segoe UI"/>
+        <a:font script="Mymr" typeface="Myanmar Text"/>
+        <a:font script="Nkoo" typeface="Ebrima"/>
+        <a:font script="Olck" typeface="Nirmala UI"/>
+        <a:font script="Osma" typeface="Ebrima"/>
+        <a:font script="Phag" typeface="Phagspa"/>
+        <a:font script="Syrn" typeface="Estrangelo Edessa"/>
+        <a:font script="Syrj" typeface="Estrangelo Edessa"/>
+        <a:font script="Syre" typeface="Estrangelo Edessa"/>
+        <a:font script="Sora" typeface="Nirmala UI"/>
+        <a:font script="Tale" typeface="Microsoft Tai Le"/>
+        <a:font script="Talu" typeface="Microsoft New Tai Lue"/>
+        <a:font script="Tfng" typeface="Ebrima"/>
+      </a:majorFont>
+      <a:minorFont>
+        <a:latin typeface="Calibri" panose="020F0502020204030204"/>
+        <a:ea typeface=""/>
+        <a:cs typeface=""/>
+        <a:font script="Jpan" typeface="游ゴシック"/>
+        <a:font script="Hang" typeface="맑은 고딕"/>
+        <a:font script="Hans" typeface="等线"/>
+        <a:font script="Hant" typeface="新細明體"/>
+        <a:font script="Arab" typeface="Arial"/>
+        <a:font script="Hebr" typeface="Arial"/>
+        <a:font script="Thai" typeface="Cordia New"/>
+        <a:font script="Ethi" typeface="Nyala"/>
+        <a:font script="Beng" typeface="Vrinda"/>
+        <a:font script="Gujr" typeface="Shruti"/>
+        <a:font script="Khmr" typeface="DaunPenh"/>
+        <a:font script="Knda" typeface="Tunga"/>
+        <a:font script="Guru" typeface="Raavi"/>
+        <a:font script="Cans" typeface="Euphemia"/>
+        <a:font script="Cher" typeface="Plantagenet Cherokee"/>
+        <a:font script="Yiii" typeface="Microsoft Yi Baiti"/>
+        <a:font script="Tibt" typeface="Microsoft Himalaya"/>
+        <a:font script="Thaa" typeface="MV Boli"/>
+        <a:font script="Deva" typeface="Mangal"/>
+        <a:font script="Telu" typeface="Gautami"/>
+        <a:font script="Taml" typeface="Latha"/>
+        <a:font script="Syrc" typeface="Estrangelo Edessa"/>
+        <a:font script="Orya" typeface="Kalinga"/>
+        <a:font script="Mlym" typeface="Kartika"/>
+        <a:font script="Laoo" typeface="DokChampa"/>
+        <a:font script="Sinh" typeface="Iskoola Pota"/>
+        <a:font script="Mong" typeface="Mongolian Baiti"/>
+        <a:font script="Viet" typeface="Arial"/>
+        <a:font script="Uigh" typeface="Microsoft Uighur"/>
+        <a:font script="Geor" typeface="Sylfaen"/>
+        <a:font script="Armn" typeface="Arial"/>
+        <a:font script="Bugi" typeface="Leelawadee UI"/>
+        <a:font script="Bopo" typeface="Microsoft JhengHei"/>
+        <a:font script="Java" typeface="Javanese Text"/>
+        <a:font script="Lisu" typeface="Segoe UI"/>
+        <a:font script="Mymr" typeface="Myanmar Text"/>
+        <a:font script="Nkoo" typeface="Ebrima"/>
+        <a:font script="Olck" typeface="Nirmala UI"/>
+        <a:font script="Osma" typeface="Ebrima"/>
+        <a:font script="Phag" typeface="Phagspa"/>
+        <a:font script="Syrn" typeface="Estrangelo Edessa"/>
+        <a:font script="Syrj" typeface="Estrangelo Edessa"/>
+        <a:font script="Syre" typeface="Estrangelo Edessa"/>
+        <a:font script="Sora" typeface="Nirmala UI"/>
+        <a:font script="Tale" typeface="Microsoft Tai Le"/>
+        <a:font script="Talu" typeface="Microsoft New Tai Lue"/>
+        <a:font script="Tfng" typeface="Ebrima"/>
+      </a:minorFont>
+    </a:fontScheme>
+    <a:fmtScheme name="Office">
+      <a:fillStyleLst>
+        <a:solidFill>
+          <a:schemeClr val="phClr"/>
+        </a:solidFill>
+        <a:gradFill rotWithShape="1">
+          <a:gsLst>
+            <a:gs pos="0">
+              <a:schemeClr val="phClr">
+                <a:lumMod val="110000"/>
+                <a:satMod val="105000"/>
+                <a:tint val="67000"/>
+              </a:schemeClr>
+            </a:gs>
+            <a:gs pos="50000">
+              <a:schemeClr val="phClr">
+                <a:lumMod val="105000"/>
+                <a:satMod val="103000"/>
+                <a:tint val="73000"/>
+              </a:schemeClr>
+            </a:gs>
+            <a:gs pos="100000">
+              <a:schemeClr val="phClr">
+                <a:lumMod val="105000"/>
+                <a:satMod val="109000"/>
+                <a:tint val="81000"/>
+              </a:schemeClr>
+            </a:gs>
+          </a:gsLst>
+          <a:lin ang="5400000" scaled="0"/>
+        </a:gradFill>
+        <a:gradFill rotWithShape="1">
+          <a:gsLst>
+            <a:gs pos="0">
+              <a:schemeClr val="phClr">
+                <a:satMod val="103000"/>
+                <a:lumMod val="102000"/>
+                <a:tint val="94000"/>
+              </a:schemeClr>
+            </a:gs>
+            <a:gs pos="50000">
+              <a:schemeClr val="phClr">
+                <a:satMod val="110000"/>
+                <a:lumMod val="100000"/>
+                <a:shade val="100000"/>
+              </a:schemeClr>
+            </a:gs>
+            <a:gs pos="100000">
+              <a:schemeClr val="phClr">
+                <a:lumMod val="99000"/>
+                <a:satMod val="120000"/>
+                <a:shade val="78000"/>
+              </a:schemeClr>
+            </a:gs>
+          </a:gsLst>
+          <a:lin ang="5400000" scaled="0"/>
+        </a:gradFill>
+      </a:fillStyleLst>
+      <a:lnStyleLst>
+        <a:ln w="6350" cap="flat" cmpd="sng" algn="ctr">
+          <a:solidFill>
+            <a:schemeClr val="phClr"/>
+          </a:solidFill>
+          <a:prstDash val="solid"/>
+          <a:miter lim="800000"/>
+        </a:ln>
+        <a:ln w="12700" cap="flat" cmpd="sng" algn="ctr">
+          <a:solidFill>
+            <a:schemeClr val="phClr"/>
+          </a:solidFill>
+          <a:prstDash val="solid"/>
+          <a:miter lim="800000"/>
+        </a:ln>
+        <a:ln w="19050" cap="flat" cmpd="sng" algn="ctr">
+          <a:solidFill>
+            <a:schemeClr val="phClr"/>
+          </a:solidFill>
+          <a:prstDash val="solid"/>
+          <a:miter lim="800000"/>
+        </a:ln>
+      </a:lnStyleLst>
+      <a:effectStyleLst>
+        <a:effectStyle>
+          <a:effectLst/>
+        </a:effectStyle>
+        <a:effectStyle>
+          <a:effectLst/>
+        </a:effectStyle>
+        <a:effectStyle>
+          <a:effectLst>
+            <a:outerShdw blurRad="57150" dist="19050" dir="5400000" algn="ctr" rotWithShape="0">
+              <a:srgbClr val="000000">
+                <a:alpha val="63000"/>
+              </a:srgbClr>
+            </a:outerShdw>
+          </a:effectLst>
+        </a:effectStyle>
+      </a:effectStyleLst>
+      <a:bgFillStyleLst>
+        <a:solidFill>
+          <a:schemeClr val="phClr"/>
+        </a:solidFill>
+        <a:solidFill>
+          <a:schemeClr val="phClr">
+            <a:tint val="95000"/>
+            <a:satMod val="170000"/>
+          </a:schemeClr>
+        </a:solidFill>
+        <a:gradFill rotWithShape="1">
+          <a:gsLst>
+            <a:gs pos="0">
+              <a:schemeClr val="phClr">
+                <a:tint val="93000"/>
+                <a:satMod val="150000"/>
+                <a:shade val="98000"/>
+                <a:lumMod val="102000"/>
+              </a:schemeClr>
+            </a:gs>
+            <a:gs pos="50000">
+              <a:schemeClr val="phClr">
+                <a:tint val="98000"/>
+                <a:satMod val="130000"/>
+                <a:shade val="90000"/>
+                <a:lumMod val="103000"/>
+              </a:schemeClr>
+            </a:gs>
+            <a:gs pos="100000">
+              <a:schemeClr val="phClr">
+                <a:shade val="63000"/>
+                <a:satMod val="120000"/>
+              </a:schemeClr>
+            </a:gs>
+          </a:gsLst>
+          <a:lin ang="5400000" scaled="0"/>
+        </a:gradFill>
+      </a:bgFillStyleLst>
+    </a:fmtScheme>
+  </a:themeElements>
+  <a:objectDefaults/>
+  <a:extraClrSchemeLst/>
+  <a:extLst>
+    <a:ext uri="{05A4C25C-085E-4340-85A3-A5531E510DB2}">
+      <thm15:themeFamily xmlns:thm15="http://schemas.microsoft.com/office/thememl/2012/main" name="Office Theme" id="{62F939B6-93AF-4DB8-9C6B-D6C7DFDC589F}" vid="{4A3C46E8-61CC-4603-A589-7422A47A8E4A}"/>
+    </a:ext>
+  </a:extLst>
+</a:theme>
 </file>
--- a/diapositivas/bloque4.pptx
+++ b/diapositivas/bloque4.pptx
@@ -1032,7 +1032,7 @@
           <a:p>
             <a:r>
               <a:rPr lang="en-US" dirty="0"/>
-              <a:t>Minutos 175–195. Ampliar la ficha exprés hasta un máximo de dos páginas con los siete apartados. La IA puede ayudar a redactar, pero cada apartado lo revisa la pareja con el mismo criterio de la ficha exprés: qué sobra, qué falta y qué no es cierto.</a:t>
+              <a:t>Minutos 175–195. Ampliar la ficha exprés hasta el documento del proyecto, de máximo dos páginas: los seis apartados de la ficha, ampliados (en «Solución», cómo funciona; en «Beneficios esperados», los dos indicadores que se definen después; en «Recursos», las herramientas ofimáticas y de IA; en «Riesgos», sus medidas preventivas), más un apartado nuevo: tres pasos para ponerla en práctica. La IA puede ayudar a redactar, pero cada apartado lo revisa la pareja con el mismo criterio de la ficha exprés: qué sobra, qué falta y qué no es cierto.</a:t>
             </a:r>
           </a:p>
         </p:txBody>
@@ -6932,7 +6932,7 @@
                   <a:schemeClr val="tx2"/>
                 </a:solidFill>
               </a:rPr>
-              <a:t>En Word o Google Docs, ampliad la ficha exprés hasta un máximo de dos páginas:</a:t>
+              <a:t>Los seis apartados de la ficha exprés, ampliados, y uno nuevo (máximo dos páginas):</a:t>
             </a:r>
             <a:endParaRPr lang="en-US" sz="1900" dirty="0"/>
           </a:p>
@@ -7160,7 +7160,7 @@
                   <a:schemeClr val="tx1"/>
                 </a:solidFill>
               </a:rPr>
-              <a:t>Problema concreto</a:t>
+              <a:t>Problema</a:t>
             </a:r>
             <a:endParaRPr lang="en-US" sz="1800" dirty="0"/>
           </a:p>
@@ -7274,7 +7274,7 @@
                   <a:schemeClr val="tx1"/>
                 </a:solidFill>
               </a:rPr>
-              <a:t>Funcionamiento de la solución</a:t>
+              <a:t>Solución</a:t>
             </a:r>
             <a:endParaRPr lang="en-US" sz="1800" dirty="0"/>
           </a:p>
@@ -7388,7 +7388,7 @@
                   <a:schemeClr val="tx1"/>
                 </a:solidFill>
               </a:rPr>
-              <a:t>Herramientas ofimáticas y de IA</a:t>
+              <a:t>Beneficios esperados</a:t>
             </a:r>
             <a:endParaRPr lang="en-US" sz="1800" dirty="0"/>
           </a:p>
@@ -7502,7 +7502,7 @@
                   <a:schemeClr val="tx1"/>
                 </a:solidFill>
               </a:rPr>
-              <a:t>Beneficios esperados</a:t>
+              <a:t>Recursos</a:t>
             </a:r>
             <a:endParaRPr lang="en-US" sz="1800" dirty="0"/>
           </a:p>
@@ -7616,7 +7616,7 @@
                   <a:schemeClr val="tx1"/>
                 </a:solidFill>
               </a:rPr>
-              <a:t>Riesgos y medidas preventivas</a:t>
+              <a:t>Riesgos</a:t>
             </a:r>
             <a:endParaRPr lang="en-US" sz="1800" dirty="0"/>
           </a:p>
